--- a/examples/recreations/07_Dropbox_a_Chesterton__ChestertonABQ_EmergencyCommunicationOptions_2022-0/out_mat2ppt.pptx
+++ b/examples/recreations/07_Dropbox_a_Chesterton__ChestertonABQ_EmergencyCommunicationOptions_2022-0/out_mat2ppt.pptx
@@ -3093,9 +3093,57 @@
         <p:nvPr/>
       </p:nvGrpSpPr>
       <p:grpSpPr/>
-      <p:sp>
-        <p:nvSpPr>
-          <p:cNvPr id="2" name="Rectangle 1"/>
+      <p:pic>
+        <p:nvPicPr>
+          <p:cNvPr id="2" name="Picture 1" descr="image2.jpeg"/>
+          <p:cNvPicPr>
+            <a:picLocks noChangeAspect="1"/>
+          </p:cNvPicPr>
+          <p:nvPr/>
+        </p:nvPicPr>
+        <p:blipFill>
+          <a:blip r:embed="rId2"/>
+          <a:stretch>
+            <a:fillRect/>
+          </a:stretch>
+        </p:blipFill>
+        <p:spPr>
+          <a:xfrm>
+            <a:off x="73820" y="6096269"/>
+            <a:ext cx="648692" cy="694793"/>
+          </a:xfrm>
+          <a:prstGeom prst="rect">
+            <a:avLst/>
+          </a:prstGeom>
+        </p:spPr>
+      </p:pic>
+      <p:pic>
+        <p:nvPicPr>
+          <p:cNvPr id="3" name="Picture 2" descr="image3.jpg"/>
+          <p:cNvPicPr>
+            <a:picLocks noChangeAspect="1"/>
+          </p:cNvPicPr>
+          <p:nvPr/>
+        </p:nvPicPr>
+        <p:blipFill>
+          <a:blip r:embed="rId3"/>
+          <a:stretch>
+            <a:fillRect/>
+          </a:stretch>
+        </p:blipFill>
+        <p:spPr>
+          <a:xfrm>
+            <a:off x="11000831" y="82217"/>
+            <a:ext cx="1097280" cy="1067079"/>
+          </a:xfrm>
+          <a:prstGeom prst="rect">
+            <a:avLst/>
+          </a:prstGeom>
+        </p:spPr>
+      </p:pic>
+      <p:sp>
+        <p:nvSpPr>
+          <p:cNvPr id="4" name="Rectangle 3"/>
           <p:cNvSpPr/>
           <p:nvPr/>
         </p:nvSpPr>
@@ -3134,7 +3182,7 @@
       </p:sp>
       <p:sp>
         <p:nvSpPr>
-          <p:cNvPr id="3" name="Rectangle 2"/>
+          <p:cNvPr id="5" name="Rectangle 4"/>
           <p:cNvSpPr/>
           <p:nvPr/>
         </p:nvSpPr>
@@ -3189,9 +3237,96 @@
         <p:nvPr/>
       </p:nvGrpSpPr>
       <p:grpSpPr/>
-      <p:sp>
-        <p:nvSpPr>
-          <p:cNvPr id="2" name="Rectangle 1"/>
+      <p:pic>
+        <p:nvPicPr>
+          <p:cNvPr id="2" name="Picture 1" descr="image2.jpeg"/>
+          <p:cNvPicPr>
+            <a:picLocks noChangeAspect="1"/>
+          </p:cNvPicPr>
+          <p:nvPr/>
+        </p:nvPicPr>
+        <p:blipFill>
+          <a:blip r:embed="rId2"/>
+          <a:stretch>
+            <a:fillRect/>
+          </a:stretch>
+        </p:blipFill>
+        <p:spPr>
+          <a:xfrm>
+            <a:off x="73820" y="6096269"/>
+            <a:ext cx="648692" cy="694793"/>
+          </a:xfrm>
+          <a:prstGeom prst="rect">
+            <a:avLst/>
+          </a:prstGeom>
+        </p:spPr>
+      </p:pic>
+      <p:pic>
+        <p:nvPicPr>
+          <p:cNvPr id="3" name="Picture 2" descr="image3.jpg"/>
+          <p:cNvPicPr>
+            <a:picLocks noChangeAspect="1"/>
+          </p:cNvPicPr>
+          <p:nvPr/>
+        </p:nvPicPr>
+        <p:blipFill>
+          <a:blip r:embed="rId3"/>
+          <a:stretch>
+            <a:fillRect/>
+          </a:stretch>
+        </p:blipFill>
+        <p:spPr>
+          <a:xfrm>
+            <a:off x="11000831" y="82217"/>
+            <a:ext cx="1097280" cy="1067079"/>
+          </a:xfrm>
+          <a:prstGeom prst="rect">
+            <a:avLst/>
+          </a:prstGeom>
+        </p:spPr>
+      </p:pic>
+      <p:sp>
+        <p:nvSpPr>
+          <p:cNvPr id="4" name="Rectangle 3"/>
+          <p:cNvSpPr/>
+          <p:nvPr/>
+        </p:nvSpPr>
+        <p:spPr>
+          <a:xfrm>
+            <a:off x="838200" y="365125"/>
+            <a:ext cx="10515600" cy="1325563"/>
+          </a:xfrm>
+          <a:prstGeom prst="rect">
+            <a:avLst/>
+          </a:prstGeom>
+        </p:spPr>
+        <p:style>
+          <a:lnRef idx="1">
+            <a:schemeClr val="accent1"/>
+          </a:lnRef>
+          <a:fillRef idx="3">
+            <a:schemeClr val="accent1"/>
+          </a:fillRef>
+          <a:effectRef idx="2">
+            <a:schemeClr val="accent1"/>
+          </a:effectRef>
+          <a:fontRef idx="minor">
+            <a:schemeClr val="lt1"/>
+          </a:fontRef>
+        </p:style>
+        <p:txBody>
+          <a:bodyPr rtlCol="0" anchor="ctr"/>
+          <a:lstStyle/>
+          <a:p>
+            <a:r>
+              <a:t>Overview of Options</a:t>
+            </a:r>
+          </a:p>
+        </p:txBody>
+      </p:sp>
+      <p:sp>
+        <p:nvSpPr>
+          <p:cNvPr id="5" name="Rectangle 4"/>
           <p:cNvSpPr/>
           <p:nvPr/>
         </p:nvSpPr>
@@ -3246,9 +3381,96 @@
         <p:nvPr/>
       </p:nvGrpSpPr>
       <p:grpSpPr/>
-      <p:sp>
-        <p:nvSpPr>
-          <p:cNvPr id="2" name="Rectangle 1"/>
+      <p:pic>
+        <p:nvPicPr>
+          <p:cNvPr id="2" name="Picture 1" descr="image2.jpeg"/>
+          <p:cNvPicPr>
+            <a:picLocks noChangeAspect="1"/>
+          </p:cNvPicPr>
+          <p:nvPr/>
+        </p:nvPicPr>
+        <p:blipFill>
+          <a:blip r:embed="rId2"/>
+          <a:stretch>
+            <a:fillRect/>
+          </a:stretch>
+        </p:blipFill>
+        <p:spPr>
+          <a:xfrm>
+            <a:off x="73820" y="6096269"/>
+            <a:ext cx="648692" cy="694793"/>
+          </a:xfrm>
+          <a:prstGeom prst="rect">
+            <a:avLst/>
+          </a:prstGeom>
+        </p:spPr>
+      </p:pic>
+      <p:pic>
+        <p:nvPicPr>
+          <p:cNvPr id="3" name="Picture 2" descr="image3.jpg"/>
+          <p:cNvPicPr>
+            <a:picLocks noChangeAspect="1"/>
+          </p:cNvPicPr>
+          <p:nvPr/>
+        </p:nvPicPr>
+        <p:blipFill>
+          <a:blip r:embed="rId3"/>
+          <a:stretch>
+            <a:fillRect/>
+          </a:stretch>
+        </p:blipFill>
+        <p:spPr>
+          <a:xfrm>
+            <a:off x="11000831" y="82217"/>
+            <a:ext cx="1097280" cy="1067079"/>
+          </a:xfrm>
+          <a:prstGeom prst="rect">
+            <a:avLst/>
+          </a:prstGeom>
+        </p:spPr>
+      </p:pic>
+      <p:sp>
+        <p:nvSpPr>
+          <p:cNvPr id="4" name="Rectangle 3"/>
+          <p:cNvSpPr/>
+          <p:nvPr/>
+        </p:nvSpPr>
+        <p:spPr>
+          <a:xfrm>
+            <a:off x="838200" y="365125"/>
+            <a:ext cx="10515600" cy="1325563"/>
+          </a:xfrm>
+          <a:prstGeom prst="rect">
+            <a:avLst/>
+          </a:prstGeom>
+        </p:spPr>
+        <p:style>
+          <a:lnRef idx="1">
+            <a:schemeClr val="accent1"/>
+          </a:lnRef>
+          <a:fillRef idx="3">
+            <a:schemeClr val="accent1"/>
+          </a:fillRef>
+          <a:effectRef idx="2">
+            <a:schemeClr val="accent1"/>
+          </a:effectRef>
+          <a:fontRef idx="minor">
+            <a:schemeClr val="lt1"/>
+          </a:fontRef>
+        </p:style>
+        <p:txBody>
+          <a:bodyPr rtlCol="0" anchor="ctr"/>
+          <a:lstStyle/>
+          <a:p>
+            <a:r>
+              <a:t>JupiterEd.com</a:t>
+            </a:r>
+          </a:p>
+        </p:txBody>
+      </p:sp>
+      <p:sp>
+        <p:nvSpPr>
+          <p:cNvPr id="5" name="Rectangle 4"/>
           <p:cNvSpPr/>
           <p:nvPr/>
         </p:nvSpPr>
@@ -3303,6 +3525,132 @@
         <p:nvPr/>
       </p:nvGrpSpPr>
       <p:grpSpPr/>
+      <p:pic>
+        <p:nvPicPr>
+          <p:cNvPr id="2" name="Picture 1" descr="image2.jpeg"/>
+          <p:cNvPicPr>
+            <a:picLocks noChangeAspect="1"/>
+          </p:cNvPicPr>
+          <p:nvPr/>
+        </p:nvPicPr>
+        <p:blipFill>
+          <a:blip r:embed="rId2"/>
+          <a:stretch>
+            <a:fillRect/>
+          </a:stretch>
+        </p:blipFill>
+        <p:spPr>
+          <a:xfrm>
+            <a:off x="73820" y="6096269"/>
+            <a:ext cx="648692" cy="694793"/>
+          </a:xfrm>
+          <a:prstGeom prst="rect">
+            <a:avLst/>
+          </a:prstGeom>
+        </p:spPr>
+      </p:pic>
+      <p:pic>
+        <p:nvPicPr>
+          <p:cNvPr id="3" name="Picture 2" descr="image3.jpg"/>
+          <p:cNvPicPr>
+            <a:picLocks noChangeAspect="1"/>
+          </p:cNvPicPr>
+          <p:nvPr/>
+        </p:nvPicPr>
+        <p:blipFill>
+          <a:blip r:embed="rId3"/>
+          <a:stretch>
+            <a:fillRect/>
+          </a:stretch>
+        </p:blipFill>
+        <p:spPr>
+          <a:xfrm>
+            <a:off x="11000831" y="82217"/>
+            <a:ext cx="1097280" cy="1067079"/>
+          </a:xfrm>
+          <a:prstGeom prst="rect">
+            <a:avLst/>
+          </a:prstGeom>
+        </p:spPr>
+      </p:pic>
+      <p:sp>
+        <p:nvSpPr>
+          <p:cNvPr id="4" name="Rectangle 3"/>
+          <p:cNvSpPr/>
+          <p:nvPr/>
+        </p:nvSpPr>
+        <p:spPr>
+          <a:xfrm>
+            <a:off x="838200" y="365125"/>
+            <a:ext cx="10515600" cy="1325563"/>
+          </a:xfrm>
+          <a:prstGeom prst="rect">
+            <a:avLst/>
+          </a:prstGeom>
+        </p:spPr>
+        <p:style>
+          <a:lnRef idx="1">
+            <a:schemeClr val="accent1"/>
+          </a:lnRef>
+          <a:fillRef idx="3">
+            <a:schemeClr val="accent1"/>
+          </a:fillRef>
+          <a:effectRef idx="2">
+            <a:schemeClr val="accent1"/>
+          </a:effectRef>
+          <a:fontRef idx="minor">
+            <a:schemeClr val="lt1"/>
+          </a:fontRef>
+        </p:style>
+        <p:txBody>
+          <a:bodyPr rtlCol="0" anchor="ctr"/>
+          <a:lstStyle/>
+          <a:p>
+            <a:r>
+              <a:t>Flocknotes</a:t>
+            </a:r>
+          </a:p>
+        </p:txBody>
+      </p:sp>
+      <p:sp>
+        <p:nvSpPr>
+          <p:cNvPr id="5" name="Rectangle 4"/>
+          <p:cNvSpPr/>
+          <p:nvPr/>
+        </p:nvSpPr>
+        <p:spPr>
+          <a:xfrm>
+            <a:off x="838200" y="365125"/>
+            <a:ext cx="10515600" cy="1325563"/>
+          </a:xfrm>
+          <a:prstGeom prst="rect">
+            <a:avLst/>
+          </a:prstGeom>
+        </p:spPr>
+        <p:style>
+          <a:lnRef idx="1">
+            <a:schemeClr val="accent1"/>
+          </a:lnRef>
+          <a:fillRef idx="3">
+            <a:schemeClr val="accent1"/>
+          </a:fillRef>
+          <a:effectRef idx="2">
+            <a:schemeClr val="accent1"/>
+          </a:effectRef>
+          <a:fontRef idx="minor">
+            <a:schemeClr val="lt1"/>
+          </a:fontRef>
+        </p:style>
+        <p:txBody>
+          <a:bodyPr rtlCol="0" anchor="ctr"/>
+          <a:lstStyle/>
+          <a:p>
+            <a:r>
+              <a:t>Comprehensive email and texting serviceMrs. Sena is familiar with the serviceMore expensive at ~</a:t>
+            </a:r>
+          </a:p>
+        </p:txBody>
+      </p:sp>
     </p:spTree>
   </p:cSld>
   <p:clrMapOvr>
@@ -3321,6 +3669,132 @@
         <p:nvPr/>
       </p:nvGrpSpPr>
       <p:grpSpPr/>
+      <p:pic>
+        <p:nvPicPr>
+          <p:cNvPr id="2" name="Picture 1" descr="image2.jpeg"/>
+          <p:cNvPicPr>
+            <a:picLocks noChangeAspect="1"/>
+          </p:cNvPicPr>
+          <p:nvPr/>
+        </p:nvPicPr>
+        <p:blipFill>
+          <a:blip r:embed="rId2"/>
+          <a:stretch>
+            <a:fillRect/>
+          </a:stretch>
+        </p:blipFill>
+        <p:spPr>
+          <a:xfrm>
+            <a:off x="73820" y="6096269"/>
+            <a:ext cx="648692" cy="694793"/>
+          </a:xfrm>
+          <a:prstGeom prst="rect">
+            <a:avLst/>
+          </a:prstGeom>
+        </p:spPr>
+      </p:pic>
+      <p:pic>
+        <p:nvPicPr>
+          <p:cNvPr id="3" name="Picture 2" descr="image3.jpg"/>
+          <p:cNvPicPr>
+            <a:picLocks noChangeAspect="1"/>
+          </p:cNvPicPr>
+          <p:nvPr/>
+        </p:nvPicPr>
+        <p:blipFill>
+          <a:blip r:embed="rId3"/>
+          <a:stretch>
+            <a:fillRect/>
+          </a:stretch>
+        </p:blipFill>
+        <p:spPr>
+          <a:xfrm>
+            <a:off x="11000831" y="82217"/>
+            <a:ext cx="1097280" cy="1067079"/>
+          </a:xfrm>
+          <a:prstGeom prst="rect">
+            <a:avLst/>
+          </a:prstGeom>
+        </p:spPr>
+      </p:pic>
+      <p:sp>
+        <p:nvSpPr>
+          <p:cNvPr id="4" name="Rectangle 3"/>
+          <p:cNvSpPr/>
+          <p:nvPr/>
+        </p:nvSpPr>
+        <p:spPr>
+          <a:xfrm>
+            <a:off x="838200" y="365125"/>
+            <a:ext cx="10515600" cy="1325563"/>
+          </a:xfrm>
+          <a:prstGeom prst="rect">
+            <a:avLst/>
+          </a:prstGeom>
+        </p:spPr>
+        <p:style>
+          <a:lnRef idx="1">
+            <a:schemeClr val="accent1"/>
+          </a:lnRef>
+          <a:fillRef idx="3">
+            <a:schemeClr val="accent1"/>
+          </a:fillRef>
+          <a:effectRef idx="2">
+            <a:schemeClr val="accent1"/>
+          </a:effectRef>
+          <a:fontRef idx="minor">
+            <a:schemeClr val="lt1"/>
+          </a:fontRef>
+        </p:style>
+        <p:txBody>
+          <a:bodyPr rtlCol="0" anchor="ctr"/>
+          <a:lstStyle/>
+          <a:p>
+            <a:r>
+              <a:t>ExpertTexting.com</a:t>
+            </a:r>
+          </a:p>
+        </p:txBody>
+      </p:sp>
+      <p:sp>
+        <p:nvSpPr>
+          <p:cNvPr id="5" name="Rectangle 4"/>
+          <p:cNvSpPr/>
+          <p:nvPr/>
+        </p:nvSpPr>
+        <p:spPr>
+          <a:xfrm>
+            <a:off x="838200" y="365125"/>
+            <a:ext cx="10515600" cy="1325563"/>
+          </a:xfrm>
+          <a:prstGeom prst="rect">
+            <a:avLst/>
+          </a:prstGeom>
+        </p:spPr>
+        <p:style>
+          <a:lnRef idx="1">
+            <a:schemeClr val="accent1"/>
+          </a:lnRef>
+          <a:fillRef idx="3">
+            <a:schemeClr val="accent1"/>
+          </a:fillRef>
+          <a:effectRef idx="2">
+            <a:schemeClr val="accent1"/>
+          </a:effectRef>
+          <a:fontRef idx="minor">
+            <a:schemeClr val="lt1"/>
+          </a:fontRef>
+        </p:style>
+        <p:txBody>
+          <a:bodyPr rtlCol="0" anchor="ctr"/>
+          <a:lstStyle/>
+          <a:p>
+            <a:r>
+              <a:t>Com</a:t>
+            </a:r>
+          </a:p>
+        </p:txBody>
+      </p:sp>
     </p:spTree>
   </p:cSld>
   <p:clrMapOvr>
@@ -3339,6 +3813,132 @@
         <p:nvPr/>
       </p:nvGrpSpPr>
       <p:grpSpPr/>
+      <p:pic>
+        <p:nvPicPr>
+          <p:cNvPr id="2" name="Picture 1" descr="image2.jpeg"/>
+          <p:cNvPicPr>
+            <a:picLocks noChangeAspect="1"/>
+          </p:cNvPicPr>
+          <p:nvPr/>
+        </p:nvPicPr>
+        <p:blipFill>
+          <a:blip r:embed="rId2"/>
+          <a:stretch>
+            <a:fillRect/>
+          </a:stretch>
+        </p:blipFill>
+        <p:spPr>
+          <a:xfrm>
+            <a:off x="73820" y="6096269"/>
+            <a:ext cx="648692" cy="694793"/>
+          </a:xfrm>
+          <a:prstGeom prst="rect">
+            <a:avLst/>
+          </a:prstGeom>
+        </p:spPr>
+      </p:pic>
+      <p:pic>
+        <p:nvPicPr>
+          <p:cNvPr id="3" name="Picture 2" descr="image3.jpg"/>
+          <p:cNvPicPr>
+            <a:picLocks noChangeAspect="1"/>
+          </p:cNvPicPr>
+          <p:nvPr/>
+        </p:nvPicPr>
+        <p:blipFill>
+          <a:blip r:embed="rId3"/>
+          <a:stretch>
+            <a:fillRect/>
+          </a:stretch>
+        </p:blipFill>
+        <p:spPr>
+          <a:xfrm>
+            <a:off x="11000831" y="82217"/>
+            <a:ext cx="1097280" cy="1067079"/>
+          </a:xfrm>
+          <a:prstGeom prst="rect">
+            <a:avLst/>
+          </a:prstGeom>
+        </p:spPr>
+      </p:pic>
+      <p:sp>
+        <p:nvSpPr>
+          <p:cNvPr id="4" name="Rectangle 3"/>
+          <p:cNvSpPr/>
+          <p:nvPr/>
+        </p:nvSpPr>
+        <p:spPr>
+          <a:xfrm>
+            <a:off x="838200" y="365125"/>
+            <a:ext cx="10515600" cy="1325563"/>
+          </a:xfrm>
+          <a:prstGeom prst="rect">
+            <a:avLst/>
+          </a:prstGeom>
+        </p:spPr>
+        <p:style>
+          <a:lnRef idx="1">
+            <a:schemeClr val="accent1"/>
+          </a:lnRef>
+          <a:fillRef idx="3">
+            <a:schemeClr val="accent1"/>
+          </a:fillRef>
+          <a:effectRef idx="2">
+            <a:schemeClr val="accent1"/>
+          </a:effectRef>
+          <a:fontRef idx="minor">
+            <a:schemeClr val="lt1"/>
+          </a:fontRef>
+        </p:style>
+        <p:txBody>
+          <a:bodyPr rtlCol="0" anchor="ctr"/>
+          <a:lstStyle/>
+          <a:p>
+            <a:r>
+              <a:t>TextEmAll.com</a:t>
+            </a:r>
+          </a:p>
+        </p:txBody>
+      </p:sp>
+      <p:sp>
+        <p:nvSpPr>
+          <p:cNvPr id="5" name="Rectangle 4"/>
+          <p:cNvSpPr/>
+          <p:nvPr/>
+        </p:nvSpPr>
+        <p:spPr>
+          <a:xfrm>
+            <a:off x="838200" y="365125"/>
+            <a:ext cx="10515600" cy="1325563"/>
+          </a:xfrm>
+          <a:prstGeom prst="rect">
+            <a:avLst/>
+          </a:prstGeom>
+        </p:spPr>
+        <p:style>
+          <a:lnRef idx="1">
+            <a:schemeClr val="accent1"/>
+          </a:lnRef>
+          <a:fillRef idx="3">
+            <a:schemeClr val="accent1"/>
+          </a:fillRef>
+          <a:effectRef idx="2">
+            <a:schemeClr val="accent1"/>
+          </a:effectRef>
+          <a:fontRef idx="minor">
+            <a:schemeClr val="lt1"/>
+          </a:fontRef>
+        </p:style>
+        <p:txBody>
+          <a:bodyPr rtlCol="0" anchor="ctr"/>
+          <a:lstStyle/>
+          <a:p>
+            <a:r>
+              <a:t>jkh</a:t>
+            </a:r>
+          </a:p>
+        </p:txBody>
+      </p:sp>
     </p:spTree>
   </p:cSld>
   <p:clrMapOvr>

--- a/examples/recreations/07_Dropbox_a_Chesterton__ChestertonABQ_EmergencyCommunicationOptions_2022-0/out_mat2ppt.pptx
+++ b/examples/recreations/07_Dropbox_a_Chesterton__ChestertonABQ_EmergencyCommunicationOptions_2022-0/out_mat2ppt.pptx
@@ -3237,57 +3237,9 @@
         <p:nvPr/>
       </p:nvGrpSpPr>
       <p:grpSpPr/>
-      <p:pic>
-        <p:nvPicPr>
-          <p:cNvPr id="2" name="Picture 1" descr="image2.jpeg"/>
-          <p:cNvPicPr>
-            <a:picLocks noChangeAspect="1"/>
-          </p:cNvPicPr>
-          <p:nvPr/>
-        </p:nvPicPr>
-        <p:blipFill>
-          <a:blip r:embed="rId2"/>
-          <a:stretch>
-            <a:fillRect/>
-          </a:stretch>
-        </p:blipFill>
-        <p:spPr>
-          <a:xfrm>
-            <a:off x="73820" y="6096269"/>
-            <a:ext cx="648692" cy="694793"/>
-          </a:xfrm>
-          <a:prstGeom prst="rect">
-            <a:avLst/>
-          </a:prstGeom>
-        </p:spPr>
-      </p:pic>
-      <p:pic>
-        <p:nvPicPr>
-          <p:cNvPr id="3" name="Picture 2" descr="image3.jpg"/>
-          <p:cNvPicPr>
-            <a:picLocks noChangeAspect="1"/>
-          </p:cNvPicPr>
-          <p:nvPr/>
-        </p:nvPicPr>
-        <p:blipFill>
-          <a:blip r:embed="rId3"/>
-          <a:stretch>
-            <a:fillRect/>
-          </a:stretch>
-        </p:blipFill>
-        <p:spPr>
-          <a:xfrm>
-            <a:off x="11000831" y="82217"/>
-            <a:ext cx="1097280" cy="1067079"/>
-          </a:xfrm>
-          <a:prstGeom prst="rect">
-            <a:avLst/>
-          </a:prstGeom>
-        </p:spPr>
-      </p:pic>
-      <p:sp>
-        <p:nvSpPr>
-          <p:cNvPr id="4" name="Rectangle 3"/>
+      <p:sp>
+        <p:nvSpPr>
+          <p:cNvPr id="2" name="Rectangle 1"/>
           <p:cNvSpPr/>
           <p:nvPr/>
         </p:nvSpPr>
@@ -3326,7 +3278,7 @@
       </p:sp>
       <p:sp>
         <p:nvSpPr>
-          <p:cNvPr id="5" name="Rectangle 4"/>
+          <p:cNvPr id="3" name="Rectangle 2"/>
           <p:cNvSpPr/>
           <p:nvPr/>
         </p:nvSpPr>
@@ -3381,57 +3333,9 @@
         <p:nvPr/>
       </p:nvGrpSpPr>
       <p:grpSpPr/>
-      <p:pic>
-        <p:nvPicPr>
-          <p:cNvPr id="2" name="Picture 1" descr="image2.jpeg"/>
-          <p:cNvPicPr>
-            <a:picLocks noChangeAspect="1"/>
-          </p:cNvPicPr>
-          <p:nvPr/>
-        </p:nvPicPr>
-        <p:blipFill>
-          <a:blip r:embed="rId2"/>
-          <a:stretch>
-            <a:fillRect/>
-          </a:stretch>
-        </p:blipFill>
-        <p:spPr>
-          <a:xfrm>
-            <a:off x="73820" y="6096269"/>
-            <a:ext cx="648692" cy="694793"/>
-          </a:xfrm>
-          <a:prstGeom prst="rect">
-            <a:avLst/>
-          </a:prstGeom>
-        </p:spPr>
-      </p:pic>
-      <p:pic>
-        <p:nvPicPr>
-          <p:cNvPr id="3" name="Picture 2" descr="image3.jpg"/>
-          <p:cNvPicPr>
-            <a:picLocks noChangeAspect="1"/>
-          </p:cNvPicPr>
-          <p:nvPr/>
-        </p:nvPicPr>
-        <p:blipFill>
-          <a:blip r:embed="rId3"/>
-          <a:stretch>
-            <a:fillRect/>
-          </a:stretch>
-        </p:blipFill>
-        <p:spPr>
-          <a:xfrm>
-            <a:off x="11000831" y="82217"/>
-            <a:ext cx="1097280" cy="1067079"/>
-          </a:xfrm>
-          <a:prstGeom prst="rect">
-            <a:avLst/>
-          </a:prstGeom>
-        </p:spPr>
-      </p:pic>
-      <p:sp>
-        <p:nvSpPr>
-          <p:cNvPr id="4" name="Rectangle 3"/>
+      <p:sp>
+        <p:nvSpPr>
+          <p:cNvPr id="2" name="Rectangle 1"/>
           <p:cNvSpPr/>
           <p:nvPr/>
         </p:nvSpPr>
@@ -3470,7 +3374,7 @@
       </p:sp>
       <p:sp>
         <p:nvSpPr>
-          <p:cNvPr id="5" name="Rectangle 4"/>
+          <p:cNvPr id="3" name="Rectangle 2"/>
           <p:cNvSpPr/>
           <p:nvPr/>
         </p:nvSpPr>
@@ -3525,57 +3429,9 @@
         <p:nvPr/>
       </p:nvGrpSpPr>
       <p:grpSpPr/>
-      <p:pic>
-        <p:nvPicPr>
-          <p:cNvPr id="2" name="Picture 1" descr="image2.jpeg"/>
-          <p:cNvPicPr>
-            <a:picLocks noChangeAspect="1"/>
-          </p:cNvPicPr>
-          <p:nvPr/>
-        </p:nvPicPr>
-        <p:blipFill>
-          <a:blip r:embed="rId2"/>
-          <a:stretch>
-            <a:fillRect/>
-          </a:stretch>
-        </p:blipFill>
-        <p:spPr>
-          <a:xfrm>
-            <a:off x="73820" y="6096269"/>
-            <a:ext cx="648692" cy="694793"/>
-          </a:xfrm>
-          <a:prstGeom prst="rect">
-            <a:avLst/>
-          </a:prstGeom>
-        </p:spPr>
-      </p:pic>
-      <p:pic>
-        <p:nvPicPr>
-          <p:cNvPr id="3" name="Picture 2" descr="image3.jpg"/>
-          <p:cNvPicPr>
-            <a:picLocks noChangeAspect="1"/>
-          </p:cNvPicPr>
-          <p:nvPr/>
-        </p:nvPicPr>
-        <p:blipFill>
-          <a:blip r:embed="rId3"/>
-          <a:stretch>
-            <a:fillRect/>
-          </a:stretch>
-        </p:blipFill>
-        <p:spPr>
-          <a:xfrm>
-            <a:off x="11000831" y="82217"/>
-            <a:ext cx="1097280" cy="1067079"/>
-          </a:xfrm>
-          <a:prstGeom prst="rect">
-            <a:avLst/>
-          </a:prstGeom>
-        </p:spPr>
-      </p:pic>
-      <p:sp>
-        <p:nvSpPr>
-          <p:cNvPr id="4" name="Rectangle 3"/>
+      <p:sp>
+        <p:nvSpPr>
+          <p:cNvPr id="2" name="Rectangle 1"/>
           <p:cNvSpPr/>
           <p:nvPr/>
         </p:nvSpPr>
@@ -3614,7 +3470,7 @@
       </p:sp>
       <p:sp>
         <p:nvSpPr>
-          <p:cNvPr id="5" name="Rectangle 4"/>
+          <p:cNvPr id="3" name="Rectangle 2"/>
           <p:cNvSpPr/>
           <p:nvPr/>
         </p:nvSpPr>
@@ -3669,57 +3525,9 @@
         <p:nvPr/>
       </p:nvGrpSpPr>
       <p:grpSpPr/>
-      <p:pic>
-        <p:nvPicPr>
-          <p:cNvPr id="2" name="Picture 1" descr="image2.jpeg"/>
-          <p:cNvPicPr>
-            <a:picLocks noChangeAspect="1"/>
-          </p:cNvPicPr>
-          <p:nvPr/>
-        </p:nvPicPr>
-        <p:blipFill>
-          <a:blip r:embed="rId2"/>
-          <a:stretch>
-            <a:fillRect/>
-          </a:stretch>
-        </p:blipFill>
-        <p:spPr>
-          <a:xfrm>
-            <a:off x="73820" y="6096269"/>
-            <a:ext cx="648692" cy="694793"/>
-          </a:xfrm>
-          <a:prstGeom prst="rect">
-            <a:avLst/>
-          </a:prstGeom>
-        </p:spPr>
-      </p:pic>
-      <p:pic>
-        <p:nvPicPr>
-          <p:cNvPr id="3" name="Picture 2" descr="image3.jpg"/>
-          <p:cNvPicPr>
-            <a:picLocks noChangeAspect="1"/>
-          </p:cNvPicPr>
-          <p:nvPr/>
-        </p:nvPicPr>
-        <p:blipFill>
-          <a:blip r:embed="rId3"/>
-          <a:stretch>
-            <a:fillRect/>
-          </a:stretch>
-        </p:blipFill>
-        <p:spPr>
-          <a:xfrm>
-            <a:off x="11000831" y="82217"/>
-            <a:ext cx="1097280" cy="1067079"/>
-          </a:xfrm>
-          <a:prstGeom prst="rect">
-            <a:avLst/>
-          </a:prstGeom>
-        </p:spPr>
-      </p:pic>
-      <p:sp>
-        <p:nvSpPr>
-          <p:cNvPr id="4" name="Rectangle 3"/>
+      <p:sp>
+        <p:nvSpPr>
+          <p:cNvPr id="2" name="Rectangle 1"/>
           <p:cNvSpPr/>
           <p:nvPr/>
         </p:nvSpPr>
@@ -3758,7 +3566,7 @@
       </p:sp>
       <p:sp>
         <p:nvSpPr>
-          <p:cNvPr id="5" name="Rectangle 4"/>
+          <p:cNvPr id="3" name="Rectangle 2"/>
           <p:cNvSpPr/>
           <p:nvPr/>
         </p:nvSpPr>
@@ -3813,57 +3621,9 @@
         <p:nvPr/>
       </p:nvGrpSpPr>
       <p:grpSpPr/>
-      <p:pic>
-        <p:nvPicPr>
-          <p:cNvPr id="2" name="Picture 1" descr="image2.jpeg"/>
-          <p:cNvPicPr>
-            <a:picLocks noChangeAspect="1"/>
-          </p:cNvPicPr>
-          <p:nvPr/>
-        </p:nvPicPr>
-        <p:blipFill>
-          <a:blip r:embed="rId2"/>
-          <a:stretch>
-            <a:fillRect/>
-          </a:stretch>
-        </p:blipFill>
-        <p:spPr>
-          <a:xfrm>
-            <a:off x="73820" y="6096269"/>
-            <a:ext cx="648692" cy="694793"/>
-          </a:xfrm>
-          <a:prstGeom prst="rect">
-            <a:avLst/>
-          </a:prstGeom>
-        </p:spPr>
-      </p:pic>
-      <p:pic>
-        <p:nvPicPr>
-          <p:cNvPr id="3" name="Picture 2" descr="image3.jpg"/>
-          <p:cNvPicPr>
-            <a:picLocks noChangeAspect="1"/>
-          </p:cNvPicPr>
-          <p:nvPr/>
-        </p:nvPicPr>
-        <p:blipFill>
-          <a:blip r:embed="rId3"/>
-          <a:stretch>
-            <a:fillRect/>
-          </a:stretch>
-        </p:blipFill>
-        <p:spPr>
-          <a:xfrm>
-            <a:off x="11000831" y="82217"/>
-            <a:ext cx="1097280" cy="1067079"/>
-          </a:xfrm>
-          <a:prstGeom prst="rect">
-            <a:avLst/>
-          </a:prstGeom>
-        </p:spPr>
-      </p:pic>
-      <p:sp>
-        <p:nvSpPr>
-          <p:cNvPr id="4" name="Rectangle 3"/>
+      <p:sp>
+        <p:nvSpPr>
+          <p:cNvPr id="2" name="Rectangle 1"/>
           <p:cNvSpPr/>
           <p:nvPr/>
         </p:nvSpPr>
@@ -3902,7 +3662,7 @@
       </p:sp>
       <p:sp>
         <p:nvSpPr>
-          <p:cNvPr id="5" name="Rectangle 4"/>
+          <p:cNvPr id="3" name="Rectangle 2"/>
           <p:cNvSpPr/>
           <p:nvPr/>
         </p:nvSpPr>

--- a/examples/recreations/07_Dropbox_a_Chesterton__ChestertonABQ_EmergencyCommunicationOptions_2022-0/out_mat2ppt.pptx
+++ b/examples/recreations/07_Dropbox_a_Chesterton__ChestertonABQ_EmergencyCommunicationOptions_2022-0/out_mat2ppt.pptx
@@ -3245,8 +3245,8 @@
         </p:nvSpPr>
         <p:spPr>
           <a:xfrm>
-            <a:off x="838200" y="365125"/>
-            <a:ext cx="10515600" cy="1325563"/>
+            <a:off x="493095" y="1227"/>
+            <a:ext cx="10515600" cy="1067080"/>
           </a:xfrm>
           <a:prstGeom prst="rect">
             <a:avLst/>
@@ -3341,8 +3341,8 @@
         </p:nvSpPr>
         <p:spPr>
           <a:xfrm>
-            <a:off x="838200" y="365125"/>
-            <a:ext cx="10515600" cy="1325563"/>
+            <a:off x="493095" y="1227"/>
+            <a:ext cx="10515600" cy="1067080"/>
           </a:xfrm>
           <a:prstGeom prst="rect">
             <a:avLst/>
@@ -3437,8 +3437,8 @@
         </p:nvSpPr>
         <p:spPr>
           <a:xfrm>
-            <a:off x="838200" y="365125"/>
-            <a:ext cx="10515600" cy="1325563"/>
+            <a:off x="493095" y="1227"/>
+            <a:ext cx="10515600" cy="1067080"/>
           </a:xfrm>
           <a:prstGeom prst="rect">
             <a:avLst/>
@@ -3476,8 +3476,8 @@
         </p:nvSpPr>
         <p:spPr>
           <a:xfrm>
-            <a:off x="838200" y="365125"/>
-            <a:ext cx="10515600" cy="1325563"/>
+            <a:off x="493095" y="1190542"/>
+            <a:ext cx="11243092" cy="4848274"/>
           </a:xfrm>
           <a:prstGeom prst="rect">
             <a:avLst/>
@@ -3533,8 +3533,8 @@
         </p:nvSpPr>
         <p:spPr>
           <a:xfrm>
-            <a:off x="838200" y="365125"/>
-            <a:ext cx="10515600" cy="1325563"/>
+            <a:off x="493095" y="1227"/>
+            <a:ext cx="10515600" cy="1067080"/>
           </a:xfrm>
           <a:prstGeom prst="rect">
             <a:avLst/>
@@ -3572,8 +3572,8 @@
         </p:nvSpPr>
         <p:spPr>
           <a:xfrm>
-            <a:off x="838200" y="365125"/>
-            <a:ext cx="10515600" cy="1325563"/>
+            <a:off x="493095" y="1190542"/>
+            <a:ext cx="11243092" cy="4848274"/>
           </a:xfrm>
           <a:prstGeom prst="rect">
             <a:avLst/>
@@ -3629,8 +3629,8 @@
         </p:nvSpPr>
         <p:spPr>
           <a:xfrm>
-            <a:off x="838200" y="365125"/>
-            <a:ext cx="10515600" cy="1325563"/>
+            <a:off x="493095" y="1227"/>
+            <a:ext cx="10515600" cy="1067080"/>
           </a:xfrm>
           <a:prstGeom prst="rect">
             <a:avLst/>
@@ -3668,8 +3668,8 @@
         </p:nvSpPr>
         <p:spPr>
           <a:xfrm>
-            <a:off x="838200" y="365125"/>
-            <a:ext cx="10515600" cy="1325563"/>
+            <a:off x="493095" y="1190542"/>
+            <a:ext cx="11243092" cy="4848274"/>
           </a:xfrm>
           <a:prstGeom prst="rect">
             <a:avLst/>

--- a/examples/recreations/07_Dropbox_a_Chesterton__ChestertonABQ_EmergencyCommunicationOptions_2022-0/out_mat2ppt.pptx
+++ b/examples/recreations/07_Dropbox_a_Chesterton__ChestertonABQ_EmergencyCommunicationOptions_2022-0/out_mat2ppt.pptx
@@ -1,19 +1,22 @@
 
 <file path=ppt/presentation.xml><?xml version="1.0" encoding="utf-8"?>
-<p:presentation xmlns:a="http://schemas.openxmlformats.org/drawingml/2006/main" xmlns:r="http://schemas.openxmlformats.org/officeDocument/2006/relationships" xmlns:p="http://schemas.openxmlformats.org/presentationml/2006/main" saveSubsetFonts="1" autoCompressPictures="0">
+<p:presentation xmlns:a="http://schemas.openxmlformats.org/drawingml/2006/main" xmlns:r="http://schemas.openxmlformats.org/officeDocument/2006/relationships" xmlns:p="http://schemas.openxmlformats.org/presentationml/2006/main" saveSubsetFonts="1">
   <p:sldMasterIdLst>
-    <p:sldMasterId id="2147483648" r:id="rId1"/>
+    <p:sldMasterId id="2147483673" r:id="rId1"/>
   </p:sldMasterIdLst>
+  <p:notesMasterIdLst>
+    <p:notesMasterId r:id="rId8"/>
+  </p:notesMasterIdLst>
   <p:sldIdLst>
-    <p:sldId id="256" r:id="rId7"/>
-    <p:sldId id="257" r:id="rId8"/>
-    <p:sldId id="258" r:id="rId9"/>
-    <p:sldId id="259" r:id="rId10"/>
-    <p:sldId id="260" r:id="rId11"/>
-    <p:sldId id="261" r:id="rId12"/>
+    <p:sldId id="256" r:id="rId13"/>
+    <p:sldId id="257" r:id="rId14"/>
+    <p:sldId id="258" r:id="rId15"/>
+    <p:sldId id="259" r:id="rId16"/>
+    <p:sldId id="260" r:id="rId17"/>
+    <p:sldId id="261" r:id="rId18"/>
   </p:sldIdLst>
-  <p:sldSz cx="12192000" cy="6858000" type="screen4x3"/>
-  <p:notesSz cx="6858000" cy="9144000"/>
+  <p:sldSz cx="12192000" cy="6858000"/>
+  <p:notesSz cx="7023100" cy="9309100"/>
   <p:defaultTextStyle>
     <a:defPPr>
       <a:defRPr lang="en-US"/>
@@ -109,7 +112,372 @@
       </a:defRPr>
     </a:lvl9pPr>
   </p:defaultTextStyle>
+  <p:extLst>
+    <p:ext uri="{EFAFB233-063F-42B5-8137-9DF3F51BA10A}">
+      <p15:sldGuideLst xmlns:p15="http://schemas.microsoft.com/office/powerpoint/2012/main">
+        <p15:guide id="1" orient="horz" pos="2160" userDrawn="1">
+          <p15:clr>
+            <a:srgbClr val="A4A3A4"/>
+          </p15:clr>
+        </p15:guide>
+        <p15:guide id="2" pos="3840" userDrawn="1">
+          <p15:clr>
+            <a:srgbClr val="A4A3A4"/>
+          </p15:clr>
+        </p15:guide>
+      </p15:sldGuideLst>
+    </p:ext>
+  </p:extLst>
 </p:presentation>
+</file>
+
+<file path=ppt/notesMasters/notesMaster1.xml><?xml version="1.0" encoding="utf-8"?>
+<p:notesMaster xmlns:a="http://schemas.openxmlformats.org/drawingml/2006/main" xmlns:r="http://schemas.openxmlformats.org/officeDocument/2006/relationships" xmlns:p="http://schemas.openxmlformats.org/presentationml/2006/main">
+  <p:cSld>
+    <p:bg>
+      <p:bgRef idx="1001">
+        <a:schemeClr val="bg1"/>
+      </p:bgRef>
+    </p:bg>
+    <p:spTree>
+      <p:nvGrpSpPr>
+        <p:cNvPr id="1" name=""/>
+        <p:cNvGrpSpPr/>
+        <p:nvPr/>
+      </p:nvGrpSpPr>
+      <p:grpSpPr>
+        <a:xfrm>
+          <a:off x="0" y="0"/>
+          <a:ext cx="0" cy="0"/>
+          <a:chOff x="0" y="0"/>
+          <a:chExt cx="0" cy="0"/>
+        </a:xfrm>
+      </p:grpSpPr>
+      <p:sp>
+        <p:nvSpPr>
+          <p:cNvPr id="2" name="Header Placeholder 1"/>
+          <p:cNvSpPr>
+            <a:spLocks noGrp="1"/>
+          </p:cNvSpPr>
+          <p:nvPr>
+            <p:ph type="hdr" sz="quarter"/>
+          </p:nvPr>
+        </p:nvSpPr>
+        <p:spPr>
+          <a:xfrm>
+            <a:off x="0" y="1"/>
+            <a:ext cx="3043343" cy="467071"/>
+          </a:xfrm>
+          <a:prstGeom prst="rect">
+            <a:avLst/>
+          </a:prstGeom>
+        </p:spPr>
+        <p:txBody>
+          <a:bodyPr vert="horz" lIns="93304" tIns="46653" rIns="93304" bIns="46653" rtlCol="0"/>
+          <a:lstStyle>
+            <a:lvl1pPr algn="l">
+              <a:defRPr sz="1200"/>
+            </a:lvl1pPr>
+          </a:lstStyle>
+          <a:p>
+            <a:endParaRPr lang="en-US"/>
+          </a:p>
+        </p:txBody>
+      </p:sp>
+      <p:sp>
+        <p:nvSpPr>
+          <p:cNvPr id="3" name="Date Placeholder 2"/>
+          <p:cNvSpPr>
+            <a:spLocks noGrp="1"/>
+          </p:cNvSpPr>
+          <p:nvPr>
+            <p:ph type="dt" idx="1"/>
+          </p:nvPr>
+        </p:nvSpPr>
+        <p:spPr>
+          <a:xfrm>
+            <a:off x="3978132" y="1"/>
+            <a:ext cx="3043343" cy="467071"/>
+          </a:xfrm>
+          <a:prstGeom prst="rect">
+            <a:avLst/>
+          </a:prstGeom>
+        </p:spPr>
+        <p:txBody>
+          <a:bodyPr vert="horz" lIns="93304" tIns="46653" rIns="93304" bIns="46653" rtlCol="0"/>
+          <a:lstStyle>
+            <a:lvl1pPr algn="r">
+              <a:defRPr sz="1200"/>
+            </a:lvl1pPr>
+          </a:lstStyle>
+          <a:p>
+            <a:fld id="{7F7B82D3-D4F7-4B8B-8BE1-460FB89887CB}" type="datetimeFigureOut">
+              <a:rPr lang="en-US" smtClean="0"/>
+              <a:t>2/8/2022</a:t>
+            </a:fld>
+            <a:endParaRPr lang="en-US"/>
+          </a:p>
+        </p:txBody>
+      </p:sp>
+      <p:sp>
+        <p:nvSpPr>
+          <p:cNvPr id="4" name="Slide Image Placeholder 3"/>
+          <p:cNvSpPr>
+            <a:spLocks noGrp="1" noRot="1" noChangeAspect="1"/>
+          </p:cNvSpPr>
+          <p:nvPr>
+            <p:ph type="sldImg" idx="2"/>
+          </p:nvPr>
+        </p:nvSpPr>
+        <p:spPr>
+          <a:xfrm>
+            <a:off x="719138" y="1163638"/>
+            <a:ext cx="5584825" cy="3141662"/>
+          </a:xfrm>
+          <a:prstGeom prst="rect">
+            <a:avLst/>
+          </a:prstGeom>
+          <a:noFill/>
+          <a:ln w="12700">
+            <a:solidFill>
+              <a:prstClr val="black"/>
+            </a:solidFill>
+          </a:ln>
+        </p:spPr>
+        <p:txBody>
+          <a:bodyPr vert="horz" lIns="93304" tIns="46653" rIns="93304" bIns="46653" rtlCol="0" anchor="ctr"/>
+          <a:lstStyle/>
+          <a:p>
+            <a:endParaRPr lang="en-US"/>
+          </a:p>
+        </p:txBody>
+      </p:sp>
+      <p:sp>
+        <p:nvSpPr>
+          <p:cNvPr id="5" name="Notes Placeholder 4"/>
+          <p:cNvSpPr>
+            <a:spLocks noGrp="1"/>
+          </p:cNvSpPr>
+          <p:nvPr>
+            <p:ph type="body" sz="quarter" idx="3"/>
+          </p:nvPr>
+        </p:nvSpPr>
+        <p:spPr>
+          <a:xfrm>
+            <a:off x="702310" y="4480005"/>
+            <a:ext cx="5618480" cy="3665459"/>
+          </a:xfrm>
+          <a:prstGeom prst="rect">
+            <a:avLst/>
+          </a:prstGeom>
+        </p:spPr>
+        <p:txBody>
+          <a:bodyPr vert="horz" lIns="93304" tIns="46653" rIns="93304" bIns="46653" rtlCol="0"/>
+          <a:lstStyle/>
+          <a:p>
+            <a:pPr lvl="0"/>
+            <a:r>
+              <a:rPr lang="en-US"/>
+              <a:t>Click to edit Master text styles</a:t>
+            </a:r>
+          </a:p>
+          <a:p>
+            <a:pPr lvl="1"/>
+            <a:r>
+              <a:rPr lang="en-US"/>
+              <a:t>Second level</a:t>
+            </a:r>
+          </a:p>
+          <a:p>
+            <a:pPr lvl="2"/>
+            <a:r>
+              <a:rPr lang="en-US"/>
+              <a:t>Third level</a:t>
+            </a:r>
+          </a:p>
+          <a:p>
+            <a:pPr lvl="3"/>
+            <a:r>
+              <a:rPr lang="en-US"/>
+              <a:t>Fourth level</a:t>
+            </a:r>
+          </a:p>
+          <a:p>
+            <a:pPr lvl="4"/>
+            <a:r>
+              <a:rPr lang="en-US"/>
+              <a:t>Fifth level</a:t>
+            </a:r>
+          </a:p>
+        </p:txBody>
+      </p:sp>
+      <p:sp>
+        <p:nvSpPr>
+          <p:cNvPr id="6" name="Footer Placeholder 5"/>
+          <p:cNvSpPr>
+            <a:spLocks noGrp="1"/>
+          </p:cNvSpPr>
+          <p:nvPr>
+            <p:ph type="ftr" sz="quarter" idx="4"/>
+          </p:nvPr>
+        </p:nvSpPr>
+        <p:spPr>
+          <a:xfrm>
+            <a:off x="0" y="8842030"/>
+            <a:ext cx="3043343" cy="467070"/>
+          </a:xfrm>
+          <a:prstGeom prst="rect">
+            <a:avLst/>
+          </a:prstGeom>
+        </p:spPr>
+        <p:txBody>
+          <a:bodyPr vert="horz" lIns="93304" tIns="46653" rIns="93304" bIns="46653" rtlCol="0" anchor="b"/>
+          <a:lstStyle>
+            <a:lvl1pPr algn="l">
+              <a:defRPr sz="1200"/>
+            </a:lvl1pPr>
+          </a:lstStyle>
+          <a:p>
+            <a:endParaRPr lang="en-US"/>
+          </a:p>
+        </p:txBody>
+      </p:sp>
+      <p:sp>
+        <p:nvSpPr>
+          <p:cNvPr id="7" name="Slide Number Placeholder 6"/>
+          <p:cNvSpPr>
+            <a:spLocks noGrp="1"/>
+          </p:cNvSpPr>
+          <p:nvPr>
+            <p:ph type="sldNum" sz="quarter" idx="5"/>
+          </p:nvPr>
+        </p:nvSpPr>
+        <p:spPr>
+          <a:xfrm>
+            <a:off x="3978132" y="8842030"/>
+            <a:ext cx="3043343" cy="467070"/>
+          </a:xfrm>
+          <a:prstGeom prst="rect">
+            <a:avLst/>
+          </a:prstGeom>
+        </p:spPr>
+        <p:txBody>
+          <a:bodyPr vert="horz" lIns="93304" tIns="46653" rIns="93304" bIns="46653" rtlCol="0" anchor="b"/>
+          <a:lstStyle>
+            <a:lvl1pPr algn="r">
+              <a:defRPr sz="1200"/>
+            </a:lvl1pPr>
+          </a:lstStyle>
+          <a:p>
+            <a:fld id="{211EEFB6-8312-4F1B-A70E-46D57B978E77}" type="slidenum">
+              <a:rPr lang="en-US" smtClean="0"/>
+              <a:t>‹#›</a:t>
+            </a:fld>
+            <a:endParaRPr lang="en-US"/>
+          </a:p>
+        </p:txBody>
+      </p:sp>
+    </p:spTree>
+    <p:extLst>
+      <p:ext uri="{BB962C8B-B14F-4D97-AF65-F5344CB8AC3E}">
+        <p14:creationId xmlns:p14="http://schemas.microsoft.com/office/powerpoint/2010/main" val="2286616826"/>
+      </p:ext>
+    </p:extLst>
+  </p:cSld>
+  <p:clrMap bg1="lt1" tx1="dk1" bg2="lt2" tx2="dk2" accent1="accent1" accent2="accent2" accent3="accent3" accent4="accent4" accent5="accent5" accent6="accent6" hlink="hlink" folHlink="folHlink"/>
+  <p:notesStyle>
+    <a:lvl1pPr marL="0" algn="l" defTabSz="914400" rtl="0" eaLnBrk="1" latinLnBrk="0" hangingPunct="1">
+      <a:defRPr sz="1200" kern="1200">
+        <a:solidFill>
+          <a:schemeClr val="tx1"/>
+        </a:solidFill>
+        <a:latin typeface="+mn-lt"/>
+        <a:ea typeface="+mn-ea"/>
+        <a:cs typeface="+mn-cs"/>
+      </a:defRPr>
+    </a:lvl1pPr>
+    <a:lvl2pPr marL="457200" algn="l" defTabSz="914400" rtl="0" eaLnBrk="1" latinLnBrk="0" hangingPunct="1">
+      <a:defRPr sz="1200" kern="1200">
+        <a:solidFill>
+          <a:schemeClr val="tx1"/>
+        </a:solidFill>
+        <a:latin typeface="+mn-lt"/>
+        <a:ea typeface="+mn-ea"/>
+        <a:cs typeface="+mn-cs"/>
+      </a:defRPr>
+    </a:lvl2pPr>
+    <a:lvl3pPr marL="914400" algn="l" defTabSz="914400" rtl="0" eaLnBrk="1" latinLnBrk="0" hangingPunct="1">
+      <a:defRPr sz="1200" kern="1200">
+        <a:solidFill>
+          <a:schemeClr val="tx1"/>
+        </a:solidFill>
+        <a:latin typeface="+mn-lt"/>
+        <a:ea typeface="+mn-ea"/>
+        <a:cs typeface="+mn-cs"/>
+      </a:defRPr>
+    </a:lvl3pPr>
+    <a:lvl4pPr marL="1371600" algn="l" defTabSz="914400" rtl="0" eaLnBrk="1" latinLnBrk="0" hangingPunct="1">
+      <a:defRPr sz="1200" kern="1200">
+        <a:solidFill>
+          <a:schemeClr val="tx1"/>
+        </a:solidFill>
+        <a:latin typeface="+mn-lt"/>
+        <a:ea typeface="+mn-ea"/>
+        <a:cs typeface="+mn-cs"/>
+      </a:defRPr>
+    </a:lvl4pPr>
+    <a:lvl5pPr marL="1828800" algn="l" defTabSz="914400" rtl="0" eaLnBrk="1" latinLnBrk="0" hangingPunct="1">
+      <a:defRPr sz="1200" kern="1200">
+        <a:solidFill>
+          <a:schemeClr val="tx1"/>
+        </a:solidFill>
+        <a:latin typeface="+mn-lt"/>
+        <a:ea typeface="+mn-ea"/>
+        <a:cs typeface="+mn-cs"/>
+      </a:defRPr>
+    </a:lvl5pPr>
+    <a:lvl6pPr marL="2286000" algn="l" defTabSz="914400" rtl="0" eaLnBrk="1" latinLnBrk="0" hangingPunct="1">
+      <a:defRPr sz="1200" kern="1200">
+        <a:solidFill>
+          <a:schemeClr val="tx1"/>
+        </a:solidFill>
+        <a:latin typeface="+mn-lt"/>
+        <a:ea typeface="+mn-ea"/>
+        <a:cs typeface="+mn-cs"/>
+      </a:defRPr>
+    </a:lvl6pPr>
+    <a:lvl7pPr marL="2743200" algn="l" defTabSz="914400" rtl="0" eaLnBrk="1" latinLnBrk="0" hangingPunct="1">
+      <a:defRPr sz="1200" kern="1200">
+        <a:solidFill>
+          <a:schemeClr val="tx1"/>
+        </a:solidFill>
+        <a:latin typeface="+mn-lt"/>
+        <a:ea typeface="+mn-ea"/>
+        <a:cs typeface="+mn-cs"/>
+      </a:defRPr>
+    </a:lvl7pPr>
+    <a:lvl8pPr marL="3200400" algn="l" defTabSz="914400" rtl="0" eaLnBrk="1" latinLnBrk="0" hangingPunct="1">
+      <a:defRPr sz="1200" kern="1200">
+        <a:solidFill>
+          <a:schemeClr val="tx1"/>
+        </a:solidFill>
+        <a:latin typeface="+mn-lt"/>
+        <a:ea typeface="+mn-ea"/>
+        <a:cs typeface="+mn-cs"/>
+      </a:defRPr>
+    </a:lvl8pPr>
+    <a:lvl9pPr marL="3657600" algn="l" defTabSz="914400" rtl="0" eaLnBrk="1" latinLnBrk="0" hangingPunct="1">
+      <a:defRPr sz="1200" kern="1200">
+        <a:solidFill>
+          <a:schemeClr val="tx1"/>
+        </a:solidFill>
+        <a:latin typeface="+mn-lt"/>
+        <a:ea typeface="+mn-ea"/>
+        <a:cs typeface="+mn-cs"/>
+      </a:defRPr>
+    </a:lvl9pPr>
+  </p:notesStyle>
+</p:notesMaster>
 </file>
 
 <file path=ppt/slideLayouts/slideLayout1.xml><?xml version="1.0" encoding="utf-8"?>
@@ -141,19 +509,23 @@
         </p:nvSpPr>
         <p:spPr>
           <a:xfrm>
-            <a:off x="685800" y="2130425"/>
-            <a:ext cx="7772400" cy="1470025"/>
+            <a:off x="1524000" y="1122363"/>
+            <a:ext cx="9144000" cy="2387600"/>
           </a:xfrm>
         </p:spPr>
         <p:txBody>
-          <a:bodyPr/>
-          <a:lstStyle/>
-          <a:p>
-            <a:r>
-              <a:rPr lang="en-US" smtClean="0"/>
+          <a:bodyPr anchor="b"/>
+          <a:lstStyle>
+            <a:lvl1pPr algn="ctr">
+              <a:defRPr sz="6000"/>
+            </a:lvl1pPr>
+          </a:lstStyle>
+          <a:p>
+            <a:r>
+              <a:rPr lang="en-US"/>
               <a:t>Click to edit Master title style</a:t>
             </a:r>
-            <a:endParaRPr lang="en-US"/>
+            <a:endParaRPr lang="en-US" dirty="0"/>
           </a:p>
         </p:txBody>
       </p:sp>
@@ -169,8 +541,8 @@
         </p:nvSpPr>
         <p:spPr>
           <a:xfrm>
-            <a:off x="1371600" y="3886200"/>
-            <a:ext cx="6400800" cy="1752600"/>
+            <a:off x="1524000" y="3602038"/>
+            <a:ext cx="9144000" cy="1655762"/>
           </a:xfrm>
         </p:spPr>
         <p:txBody>
@@ -178,112 +550,101 @@
           <a:lstStyle>
             <a:lvl1pPr marL="0" indent="0" algn="ctr">
               <a:buNone/>
-              <a:defRPr>
-                <a:solidFill>
-                  <a:schemeClr val="tx1">
-                    <a:tint val="75000"/>
-                  </a:schemeClr>
-                </a:solidFill>
-              </a:defRPr>
+              <a:defRPr sz="2400"/>
             </a:lvl1pPr>
             <a:lvl2pPr marL="457200" indent="0" algn="ctr">
               <a:buNone/>
-              <a:defRPr>
-                <a:solidFill>
-                  <a:schemeClr val="tx1">
-                    <a:tint val="75000"/>
-                  </a:schemeClr>
-                </a:solidFill>
-              </a:defRPr>
+              <a:defRPr sz="2000"/>
             </a:lvl2pPr>
             <a:lvl3pPr marL="914400" indent="0" algn="ctr">
               <a:buNone/>
-              <a:defRPr>
-                <a:solidFill>
-                  <a:schemeClr val="tx1">
-                    <a:tint val="75000"/>
-                  </a:schemeClr>
-                </a:solidFill>
-              </a:defRPr>
+              <a:defRPr sz="1800"/>
             </a:lvl3pPr>
             <a:lvl4pPr marL="1371600" indent="0" algn="ctr">
               <a:buNone/>
-              <a:defRPr>
-                <a:solidFill>
-                  <a:schemeClr val="tx1">
-                    <a:tint val="75000"/>
-                  </a:schemeClr>
-                </a:solidFill>
-              </a:defRPr>
+              <a:defRPr sz="1600"/>
             </a:lvl4pPr>
             <a:lvl5pPr marL="1828800" indent="0" algn="ctr">
               <a:buNone/>
-              <a:defRPr>
-                <a:solidFill>
-                  <a:schemeClr val="tx1">
-                    <a:tint val="75000"/>
-                  </a:schemeClr>
-                </a:solidFill>
-              </a:defRPr>
+              <a:defRPr sz="1600"/>
             </a:lvl5pPr>
             <a:lvl6pPr marL="2286000" indent="0" algn="ctr">
               <a:buNone/>
-              <a:defRPr>
-                <a:solidFill>
-                  <a:schemeClr val="tx1">
-                    <a:tint val="75000"/>
-                  </a:schemeClr>
-                </a:solidFill>
-              </a:defRPr>
+              <a:defRPr sz="1600"/>
             </a:lvl6pPr>
             <a:lvl7pPr marL="2743200" indent="0" algn="ctr">
               <a:buNone/>
-              <a:defRPr>
-                <a:solidFill>
-                  <a:schemeClr val="tx1">
-                    <a:tint val="75000"/>
-                  </a:schemeClr>
-                </a:solidFill>
-              </a:defRPr>
+              <a:defRPr sz="1600"/>
             </a:lvl7pPr>
             <a:lvl8pPr marL="3200400" indent="0" algn="ctr">
               <a:buNone/>
-              <a:defRPr>
-                <a:solidFill>
-                  <a:schemeClr val="tx1">
-                    <a:tint val="75000"/>
-                  </a:schemeClr>
-                </a:solidFill>
-              </a:defRPr>
+              <a:defRPr sz="1600"/>
             </a:lvl8pPr>
             <a:lvl9pPr marL="3657600" indent="0" algn="ctr">
               <a:buNone/>
-              <a:defRPr>
-                <a:solidFill>
-                  <a:schemeClr val="tx1">
-                    <a:tint val="75000"/>
-                  </a:schemeClr>
-                </a:solidFill>
-              </a:defRPr>
+              <a:defRPr sz="1600"/>
             </a:lvl9pPr>
           </a:lstStyle>
           <a:p>
             <a:r>
+              <a:rPr lang="en-US"/>
+              <a:t>Click to edit Master subtitle style</a:t>
+            </a:r>
+            <a:endParaRPr lang="en-US" dirty="0"/>
+          </a:p>
+        </p:txBody>
+      </p:sp>
+      <p:sp>
+        <p:nvSpPr>
+          <p:cNvPr id="4" name="Date Placeholder 3"/>
+          <p:cNvSpPr>
+            <a:spLocks noGrp="1"/>
+          </p:cNvSpPr>
+          <p:nvPr>
+            <p:ph type="dt" sz="half" idx="10"/>
+          </p:nvPr>
+        </p:nvSpPr>
+        <p:spPr/>
+        <p:txBody>
+          <a:bodyPr/>
+          <a:lstStyle/>
+          <a:p>
+            <a:fld id="{971C0534-AC82-40C9-9D5F-C772AE9BC3F8}" type="datetimeFigureOut">
               <a:rPr lang="en-US" smtClean="0"/>
-              <a:t>Click to edit Master subtitle style</a:t>
-            </a:r>
+              <a:pPr/>
+              <a:t>2/8/2022</a:t>
+            </a:fld>
+            <a:endParaRPr lang="en-US" dirty="0"/>
+          </a:p>
+        </p:txBody>
+      </p:sp>
+      <p:sp>
+        <p:nvSpPr>
+          <p:cNvPr id="5" name="Footer Placeholder 4"/>
+          <p:cNvSpPr>
+            <a:spLocks noGrp="1"/>
+          </p:cNvSpPr>
+          <p:nvPr>
+            <p:ph type="ftr" sz="quarter" idx="11"/>
+          </p:nvPr>
+        </p:nvSpPr>
+        <p:spPr/>
+        <p:txBody>
+          <a:bodyPr/>
+          <a:lstStyle/>
+          <a:p>
             <a:endParaRPr lang="en-US"/>
           </a:p>
         </p:txBody>
       </p:sp>
       <p:sp>
         <p:nvSpPr>
-          <p:cNvPr id="4" name="Date Placeholder 3"/>
-          <p:cNvSpPr>
-            <a:spLocks noGrp="1"/>
-          </p:cNvSpPr>
-          <p:nvPr>
-            <p:ph type="dt" sz="half" idx="10"/>
+          <p:cNvPr id="6" name="Slide Number Placeholder 5"/>
+          <p:cNvSpPr>
+            <a:spLocks noGrp="1"/>
+          </p:cNvSpPr>
+          <p:nvPr>
+            <p:ph type="sldNum" sz="quarter" idx="12"/>
           </p:nvPr>
         </p:nvSpPr>
         <p:spPr/>
@@ -291,49 +652,7 @@
           <a:bodyPr/>
           <a:lstStyle/>
           <a:p>
-            <a:fld id="{5BCAD085-E8A6-8845-BD4E-CB4CCA059FC4}" type="datetimeFigureOut">
-              <a:rPr lang="en-US" smtClean="0"/>
-              <a:t>1/27/13</a:t>
-            </a:fld>
-            <a:endParaRPr lang="en-US"/>
-          </a:p>
-        </p:txBody>
-      </p:sp>
-      <p:sp>
-        <p:nvSpPr>
-          <p:cNvPr id="5" name="Footer Placeholder 4"/>
-          <p:cNvSpPr>
-            <a:spLocks noGrp="1"/>
-          </p:cNvSpPr>
-          <p:nvPr>
-            <p:ph type="ftr" sz="quarter" idx="11"/>
-          </p:nvPr>
-        </p:nvSpPr>
-        <p:spPr/>
-        <p:txBody>
-          <a:bodyPr/>
-          <a:lstStyle/>
-          <a:p>
-            <a:endParaRPr lang="en-US"/>
-          </a:p>
-        </p:txBody>
-      </p:sp>
-      <p:sp>
-        <p:nvSpPr>
-          <p:cNvPr id="6" name="Slide Number Placeholder 5"/>
-          <p:cNvSpPr>
-            <a:spLocks noGrp="1"/>
-          </p:cNvSpPr>
-          <p:nvPr>
-            <p:ph type="sldNum" sz="quarter" idx="12"/>
-          </p:nvPr>
-        </p:nvSpPr>
-        <p:spPr/>
-        <p:txBody>
-          <a:bodyPr/>
-          <a:lstStyle/>
-          <a:p>
-            <a:fld id="{C1FF6DA9-008F-8B48-92A6-B652298478BF}" type="slidenum">
+            <a:fld id="{A58BF1B2-8942-48EC-B5EF-B915FB58F230}" type="slidenum">
               <a:rPr lang="en-US" smtClean="0"/>
               <a:t>‹#›</a:t>
             </a:fld>
@@ -341,10 +660,171 @@
           </a:p>
         </p:txBody>
       </p:sp>
+      <p:sp>
+        <p:nvSpPr>
+          <p:cNvPr id="7" name="Rectangle 6">
+            <a:extLst>
+              <a:ext uri="{FF2B5EF4-FFF2-40B4-BE49-F238E27FC236}">
+                <a16:creationId xmlns:a16="http://schemas.microsoft.com/office/drawing/2014/main" id="{4669A8AA-85C3-4D8C-9C61-3E926044398E}"/>
+              </a:ext>
+            </a:extLst>
+          </p:cNvPr>
+          <p:cNvSpPr/>
+          <p:nvPr userDrawn="1"/>
+        </p:nvSpPr>
+        <p:spPr>
+          <a:xfrm>
+            <a:off x="9682645" y="-4747"/>
+            <a:ext cx="2509355" cy="6869866"/>
+          </a:xfrm>
+          <a:prstGeom prst="rect">
+            <a:avLst/>
+          </a:prstGeom>
+          <a:solidFill>
+            <a:srgbClr val="9B99B3"/>
+          </a:solidFill>
+          <a:ln>
+            <a:noFill/>
+          </a:ln>
+        </p:spPr>
+        <p:style>
+          <a:lnRef idx="2">
+            <a:schemeClr val="accent1">
+              <a:shade val="50000"/>
+            </a:schemeClr>
+          </a:lnRef>
+          <a:fillRef idx="1">
+            <a:schemeClr val="accent1"/>
+          </a:fillRef>
+          <a:effectRef idx="0">
+            <a:schemeClr val="accent1"/>
+          </a:effectRef>
+          <a:fontRef idx="minor">
+            <a:schemeClr val="lt1"/>
+          </a:fontRef>
+        </p:style>
+        <p:txBody>
+          <a:bodyPr rtlCol="0" anchor="ctr"/>
+          <a:lstStyle/>
+          <a:p>
+            <a:pPr algn="ctr"/>
+            <a:endParaRPr lang="en-US" sz="1800"/>
+          </a:p>
+        </p:txBody>
+      </p:sp>
+      <p:sp>
+        <p:nvSpPr>
+          <p:cNvPr id="8" name="Rectangle 7">
+            <a:extLst>
+              <a:ext uri="{FF2B5EF4-FFF2-40B4-BE49-F238E27FC236}">
+                <a16:creationId xmlns:a16="http://schemas.microsoft.com/office/drawing/2014/main" id="{358B2F07-B815-45D0-9D66-9BD0EA66D7C8}"/>
+              </a:ext>
+            </a:extLst>
+          </p:cNvPr>
+          <p:cNvSpPr/>
+          <p:nvPr userDrawn="1"/>
+        </p:nvSpPr>
+        <p:spPr>
+          <a:xfrm>
+            <a:off x="1" y="-4745"/>
+            <a:ext cx="2623225" cy="6869865"/>
+          </a:xfrm>
+          <a:prstGeom prst="rect">
+            <a:avLst/>
+          </a:prstGeom>
+          <a:solidFill>
+            <a:srgbClr val="9B99B3"/>
+          </a:solidFill>
+          <a:ln>
+            <a:noFill/>
+          </a:ln>
+        </p:spPr>
+        <p:style>
+          <a:lnRef idx="2">
+            <a:schemeClr val="accent1">
+              <a:shade val="50000"/>
+            </a:schemeClr>
+          </a:lnRef>
+          <a:fillRef idx="1">
+            <a:schemeClr val="accent1"/>
+          </a:fillRef>
+          <a:effectRef idx="0">
+            <a:schemeClr val="accent1"/>
+          </a:effectRef>
+          <a:fontRef idx="minor">
+            <a:schemeClr val="lt1"/>
+          </a:fontRef>
+        </p:style>
+        <p:txBody>
+          <a:bodyPr rtlCol="0" anchor="ctr"/>
+          <a:lstStyle/>
+          <a:p>
+            <a:pPr algn="ctr"/>
+            <a:endParaRPr lang="en-US" sz="1800"/>
+          </a:p>
+        </p:txBody>
+      </p:sp>
+      <p:sp>
+        <p:nvSpPr>
+          <p:cNvPr id="9" name="Rectangle 8">
+            <a:extLst>
+              <a:ext uri="{FF2B5EF4-FFF2-40B4-BE49-F238E27FC236}">
+                <a16:creationId xmlns:a16="http://schemas.microsoft.com/office/drawing/2014/main" id="{30FBFD15-DCFC-4A08-A2A1-02ACD5A3FF90}"/>
+              </a:ext>
+            </a:extLst>
+          </p:cNvPr>
+          <p:cNvSpPr/>
+          <p:nvPr userDrawn="1"/>
+        </p:nvSpPr>
+        <p:spPr>
+          <a:xfrm>
+            <a:off x="2623226" y="-4747"/>
+            <a:ext cx="7059420" cy="6869866"/>
+          </a:xfrm>
+          <a:prstGeom prst="rect">
+            <a:avLst/>
+          </a:prstGeom>
+          <a:blipFill>
+            <a:blip r:embed="rId2">
+              <a:alphaModFix amt="40000"/>
+            </a:blip>
+            <a:stretch>
+              <a:fillRect/>
+            </a:stretch>
+          </a:blipFill>
+          <a:ln>
+            <a:noFill/>
+          </a:ln>
+        </p:spPr>
+        <p:style>
+          <a:lnRef idx="2">
+            <a:schemeClr val="accent1">
+              <a:shade val="50000"/>
+            </a:schemeClr>
+          </a:lnRef>
+          <a:fillRef idx="1">
+            <a:schemeClr val="accent1"/>
+          </a:fillRef>
+          <a:effectRef idx="0">
+            <a:schemeClr val="accent1"/>
+          </a:effectRef>
+          <a:fontRef idx="minor">
+            <a:schemeClr val="lt1"/>
+          </a:fontRef>
+        </p:style>
+        <p:txBody>
+          <a:bodyPr rtlCol="0" anchor="ctr"/>
+          <a:lstStyle/>
+          <a:p>
+            <a:pPr algn="ctr"/>
+            <a:endParaRPr lang="en-US" sz="1800"/>
+          </a:p>
+        </p:txBody>
+      </p:sp>
     </p:spTree>
     <p:extLst>
       <p:ext uri="{BB962C8B-B14F-4D97-AF65-F5344CB8AC3E}">
-        <p14:creationId xmlns:p14="http://schemas.microsoft.com/office/powerpoint/2010/main" val="3168075583"/>
+        <p14:creationId xmlns:p14="http://schemas.microsoft.com/office/powerpoint/2010/main" val="2628064887"/>
       </p:ext>
     </p:extLst>
   </p:cSld>
@@ -387,83 +867,83 @@
           <a:lstStyle/>
           <a:p>
             <a:r>
+              <a:rPr lang="en-US"/>
+              <a:t>Click to edit Master title style</a:t>
+            </a:r>
+            <a:endParaRPr lang="en-US" dirty="0"/>
+          </a:p>
+        </p:txBody>
+      </p:sp>
+      <p:sp>
+        <p:nvSpPr>
+          <p:cNvPr id="3" name="Vertical Text Placeholder 2"/>
+          <p:cNvSpPr>
+            <a:spLocks noGrp="1"/>
+          </p:cNvSpPr>
+          <p:nvPr>
+            <p:ph type="body" orient="vert" idx="1"/>
+          </p:nvPr>
+        </p:nvSpPr>
+        <p:spPr/>
+        <p:txBody>
+          <a:bodyPr vert="eaVert"/>
+          <a:lstStyle/>
+          <a:p>
+            <a:pPr lvl="0"/>
+            <a:r>
+              <a:rPr lang="en-US"/>
+              <a:t>Edit Master text styles</a:t>
+            </a:r>
+          </a:p>
+          <a:p>
+            <a:pPr lvl="1"/>
+            <a:r>
+              <a:rPr lang="en-US"/>
+              <a:t>Second level</a:t>
+            </a:r>
+          </a:p>
+          <a:p>
+            <a:pPr lvl="2"/>
+            <a:r>
+              <a:rPr lang="en-US"/>
+              <a:t>Third level</a:t>
+            </a:r>
+          </a:p>
+          <a:p>
+            <a:pPr lvl="3"/>
+            <a:r>
+              <a:rPr lang="en-US"/>
+              <a:t>Fourth level</a:t>
+            </a:r>
+          </a:p>
+          <a:p>
+            <a:pPr lvl="4"/>
+            <a:r>
+              <a:rPr lang="en-US"/>
+              <a:t>Fifth level</a:t>
+            </a:r>
+            <a:endParaRPr lang="en-US" dirty="0"/>
+          </a:p>
+        </p:txBody>
+      </p:sp>
+      <p:sp>
+        <p:nvSpPr>
+          <p:cNvPr id="4" name="Date Placeholder 3"/>
+          <p:cNvSpPr>
+            <a:spLocks noGrp="1"/>
+          </p:cNvSpPr>
+          <p:nvPr>
+            <p:ph type="dt" sz="half" idx="10"/>
+          </p:nvPr>
+        </p:nvSpPr>
+        <p:spPr/>
+        <p:txBody>
+          <a:bodyPr/>
+          <a:lstStyle/>
+          <a:p>
+            <a:fld id="{971C0534-AC82-40C9-9D5F-C772AE9BC3F8}" type="datetimeFigureOut">
               <a:rPr lang="en-US" smtClean="0"/>
-              <a:t>Click to edit Master title style</a:t>
-            </a:r>
-            <a:endParaRPr lang="en-US"/>
-          </a:p>
-        </p:txBody>
-      </p:sp>
-      <p:sp>
-        <p:nvSpPr>
-          <p:cNvPr id="3" name="Vertical Text Placeholder 2"/>
-          <p:cNvSpPr>
-            <a:spLocks noGrp="1"/>
-          </p:cNvSpPr>
-          <p:nvPr>
-            <p:ph type="body" orient="vert" idx="1"/>
-          </p:nvPr>
-        </p:nvSpPr>
-        <p:spPr/>
-        <p:txBody>
-          <a:bodyPr vert="eaVert"/>
-          <a:lstStyle/>
-          <a:p>
-            <a:pPr lvl="0"/>
-            <a:r>
-              <a:rPr lang="en-US" smtClean="0"/>
-              <a:t>Click to edit Master text styles</a:t>
-            </a:r>
-          </a:p>
-          <a:p>
-            <a:pPr lvl="1"/>
-            <a:r>
-              <a:rPr lang="en-US" smtClean="0"/>
-              <a:t>Second level</a:t>
-            </a:r>
-          </a:p>
-          <a:p>
-            <a:pPr lvl="2"/>
-            <a:r>
-              <a:rPr lang="en-US" smtClean="0"/>
-              <a:t>Third level</a:t>
-            </a:r>
-          </a:p>
-          <a:p>
-            <a:pPr lvl="3"/>
-            <a:r>
-              <a:rPr lang="en-US" smtClean="0"/>
-              <a:t>Fourth level</a:t>
-            </a:r>
-          </a:p>
-          <a:p>
-            <a:pPr lvl="4"/>
-            <a:r>
-              <a:rPr lang="en-US" smtClean="0"/>
-              <a:t>Fifth level</a:t>
-            </a:r>
-            <a:endParaRPr lang="en-US"/>
-          </a:p>
-        </p:txBody>
-      </p:sp>
-      <p:sp>
-        <p:nvSpPr>
-          <p:cNvPr id="4" name="Date Placeholder 3"/>
-          <p:cNvSpPr>
-            <a:spLocks noGrp="1"/>
-          </p:cNvSpPr>
-          <p:nvPr>
-            <p:ph type="dt" sz="half" idx="10"/>
-          </p:nvPr>
-        </p:nvSpPr>
-        <p:spPr/>
-        <p:txBody>
-          <a:bodyPr/>
-          <a:lstStyle/>
-          <a:p>
-            <a:fld id="{5BCAD085-E8A6-8845-BD4E-CB4CCA059FC4}" type="datetimeFigureOut">
-              <a:rPr lang="en-US" smtClean="0"/>
-              <a:t>1/27/13</a:t>
+              <a:t>2/8/2022</a:t>
             </a:fld>
             <a:endParaRPr lang="en-US"/>
           </a:p>
@@ -503,7 +983,7 @@
           <a:bodyPr/>
           <a:lstStyle/>
           <a:p>
-            <a:fld id="{C1FF6DA9-008F-8B48-92A6-B652298478BF}" type="slidenum">
+            <a:fld id="{A58BF1B2-8942-48EC-B5EF-B915FB58F230}" type="slidenum">
               <a:rPr lang="en-US" smtClean="0"/>
               <a:t>‹#›</a:t>
             </a:fld>
@@ -514,7 +994,7 @@
     </p:spTree>
     <p:extLst>
       <p:ext uri="{BB962C8B-B14F-4D97-AF65-F5344CB8AC3E}">
-        <p14:creationId xmlns:p14="http://schemas.microsoft.com/office/powerpoint/2010/main" val="2910927964"/>
+        <p14:creationId xmlns:p14="http://schemas.microsoft.com/office/powerpoint/2010/main" val="1879894713"/>
       </p:ext>
     </p:extLst>
   </p:cSld>
@@ -553,8 +1033,8 @@
         </p:nvSpPr>
         <p:spPr>
           <a:xfrm>
-            <a:off x="6629400" y="274638"/>
-            <a:ext cx="2057400" cy="5851525"/>
+            <a:off x="8724900" y="365125"/>
+            <a:ext cx="2628900" cy="5811838"/>
           </a:xfrm>
         </p:spPr>
         <p:txBody>
@@ -562,10 +1042,10 @@
           <a:lstStyle/>
           <a:p>
             <a:r>
-              <a:rPr lang="en-US" smtClean="0"/>
+              <a:rPr lang="en-US"/>
               <a:t>Click to edit Master title style</a:t>
             </a:r>
-            <a:endParaRPr lang="en-US"/>
+            <a:endParaRPr lang="en-US" dirty="0"/>
           </a:p>
         </p:txBody>
       </p:sp>
@@ -581,8 +1061,8 @@
         </p:nvSpPr>
         <p:spPr>
           <a:xfrm>
-            <a:off x="457200" y="274638"/>
-            <a:ext cx="6019800" cy="5851525"/>
+            <a:off x="838200" y="365125"/>
+            <a:ext cx="7734300" cy="5811838"/>
           </a:xfrm>
         </p:spPr>
         <p:txBody>
@@ -591,59 +1071,59 @@
           <a:p>
             <a:pPr lvl="0"/>
             <a:r>
+              <a:rPr lang="en-US"/>
+              <a:t>Edit Master text styles</a:t>
+            </a:r>
+          </a:p>
+          <a:p>
+            <a:pPr lvl="1"/>
+            <a:r>
+              <a:rPr lang="en-US"/>
+              <a:t>Second level</a:t>
+            </a:r>
+          </a:p>
+          <a:p>
+            <a:pPr lvl="2"/>
+            <a:r>
+              <a:rPr lang="en-US"/>
+              <a:t>Third level</a:t>
+            </a:r>
+          </a:p>
+          <a:p>
+            <a:pPr lvl="3"/>
+            <a:r>
+              <a:rPr lang="en-US"/>
+              <a:t>Fourth level</a:t>
+            </a:r>
+          </a:p>
+          <a:p>
+            <a:pPr lvl="4"/>
+            <a:r>
+              <a:rPr lang="en-US"/>
+              <a:t>Fifth level</a:t>
+            </a:r>
+            <a:endParaRPr lang="en-US" dirty="0"/>
+          </a:p>
+        </p:txBody>
+      </p:sp>
+      <p:sp>
+        <p:nvSpPr>
+          <p:cNvPr id="4" name="Date Placeholder 3"/>
+          <p:cNvSpPr>
+            <a:spLocks noGrp="1"/>
+          </p:cNvSpPr>
+          <p:nvPr>
+            <p:ph type="dt" sz="half" idx="10"/>
+          </p:nvPr>
+        </p:nvSpPr>
+        <p:spPr/>
+        <p:txBody>
+          <a:bodyPr/>
+          <a:lstStyle/>
+          <a:p>
+            <a:fld id="{971C0534-AC82-40C9-9D5F-C772AE9BC3F8}" type="datetimeFigureOut">
               <a:rPr lang="en-US" smtClean="0"/>
-              <a:t>Click to edit Master text styles</a:t>
-            </a:r>
-          </a:p>
-          <a:p>
-            <a:pPr lvl="1"/>
-            <a:r>
-              <a:rPr lang="en-US" smtClean="0"/>
-              <a:t>Second level</a:t>
-            </a:r>
-          </a:p>
-          <a:p>
-            <a:pPr lvl="2"/>
-            <a:r>
-              <a:rPr lang="en-US" smtClean="0"/>
-              <a:t>Third level</a:t>
-            </a:r>
-          </a:p>
-          <a:p>
-            <a:pPr lvl="3"/>
-            <a:r>
-              <a:rPr lang="en-US" smtClean="0"/>
-              <a:t>Fourth level</a:t>
-            </a:r>
-          </a:p>
-          <a:p>
-            <a:pPr lvl="4"/>
-            <a:r>
-              <a:rPr lang="en-US" smtClean="0"/>
-              <a:t>Fifth level</a:t>
-            </a:r>
-            <a:endParaRPr lang="en-US"/>
-          </a:p>
-        </p:txBody>
-      </p:sp>
-      <p:sp>
-        <p:nvSpPr>
-          <p:cNvPr id="4" name="Date Placeholder 3"/>
-          <p:cNvSpPr>
-            <a:spLocks noGrp="1"/>
-          </p:cNvSpPr>
-          <p:nvPr>
-            <p:ph type="dt" sz="half" idx="10"/>
-          </p:nvPr>
-        </p:nvSpPr>
-        <p:spPr/>
-        <p:txBody>
-          <a:bodyPr/>
-          <a:lstStyle/>
-          <a:p>
-            <a:fld id="{5BCAD085-E8A6-8845-BD4E-CB4CCA059FC4}" type="datetimeFigureOut">
-              <a:rPr lang="en-US" smtClean="0"/>
-              <a:t>1/27/13</a:t>
+              <a:t>2/8/2022</a:t>
             </a:fld>
             <a:endParaRPr lang="en-US"/>
           </a:p>
@@ -683,7 +1163,7 @@
           <a:bodyPr/>
           <a:lstStyle/>
           <a:p>
-            <a:fld id="{C1FF6DA9-008F-8B48-92A6-B652298478BF}" type="slidenum">
+            <a:fld id="{A58BF1B2-8942-48EC-B5EF-B915FB58F230}" type="slidenum">
               <a:rPr lang="en-US" smtClean="0"/>
               <a:t>‹#›</a:t>
             </a:fld>
@@ -694,7 +1174,7 @@
     </p:spTree>
     <p:extLst>
       <p:ext uri="{BB962C8B-B14F-4D97-AF65-F5344CB8AC3E}">
-        <p14:creationId xmlns:p14="http://schemas.microsoft.com/office/powerpoint/2010/main" val="3612223792"/>
+        <p14:creationId xmlns:p14="http://schemas.microsoft.com/office/powerpoint/2010/main" val="3536767186"/>
       </p:ext>
     </p:extLst>
   </p:cSld>
@@ -731,27 +1211,136 @@
             <p:ph type="title"/>
           </p:nvPr>
         </p:nvSpPr>
+        <p:spPr>
+          <a:xfrm>
+            <a:off x="493095" y="1227"/>
+            <a:ext cx="10515600" cy="1067080"/>
+          </a:xfrm>
+        </p:spPr>
+        <p:txBody>
+          <a:bodyPr/>
+          <a:lstStyle/>
+          <a:p>
+            <a:r>
+              <a:rPr lang="en-US"/>
+              <a:t>Click to edit Master title style</a:t>
+            </a:r>
+            <a:endParaRPr lang="en-US" dirty="0"/>
+          </a:p>
+        </p:txBody>
+      </p:sp>
+      <p:sp>
+        <p:nvSpPr>
+          <p:cNvPr id="3" name="Content Placeholder 2"/>
+          <p:cNvSpPr>
+            <a:spLocks noGrp="1"/>
+          </p:cNvSpPr>
+          <p:nvPr>
+            <p:ph idx="1"/>
+          </p:nvPr>
+        </p:nvSpPr>
+        <p:spPr>
+          <a:xfrm>
+            <a:off x="493095" y="1190542"/>
+            <a:ext cx="11243092" cy="4848274"/>
+          </a:xfrm>
+        </p:spPr>
+        <p:txBody>
+          <a:bodyPr/>
+          <a:lstStyle/>
+          <a:p>
+            <a:pPr lvl="0"/>
+            <a:r>
+              <a:rPr lang="en-US"/>
+              <a:t>Edit Master text styles</a:t>
+            </a:r>
+          </a:p>
+          <a:p>
+            <a:pPr lvl="1"/>
+            <a:r>
+              <a:rPr lang="en-US"/>
+              <a:t>Second level</a:t>
+            </a:r>
+          </a:p>
+          <a:p>
+            <a:pPr lvl="2"/>
+            <a:r>
+              <a:rPr lang="en-US"/>
+              <a:t>Third level</a:t>
+            </a:r>
+          </a:p>
+          <a:p>
+            <a:pPr lvl="3"/>
+            <a:r>
+              <a:rPr lang="en-US"/>
+              <a:t>Fourth level</a:t>
+            </a:r>
+          </a:p>
+          <a:p>
+            <a:pPr lvl="4"/>
+            <a:r>
+              <a:rPr lang="en-US"/>
+              <a:t>Fifth level</a:t>
+            </a:r>
+            <a:endParaRPr lang="en-US" dirty="0"/>
+          </a:p>
+        </p:txBody>
+      </p:sp>
+      <p:sp>
+        <p:nvSpPr>
+          <p:cNvPr id="4" name="Date Placeholder 3"/>
+          <p:cNvSpPr>
+            <a:spLocks noGrp="1"/>
+          </p:cNvSpPr>
+          <p:nvPr>
+            <p:ph type="dt" sz="half" idx="10"/>
+          </p:nvPr>
+        </p:nvSpPr>
+        <p:spPr>
+          <a:xfrm>
+            <a:off x="1066800" y="6356350"/>
+            <a:ext cx="2743200" cy="365125"/>
+          </a:xfrm>
+        </p:spPr>
+        <p:txBody>
+          <a:bodyPr/>
+          <a:lstStyle/>
+          <a:p>
+            <a:fld id="{C764DE79-268F-4C1A-8933-263129D2AF90}" type="datetimeFigureOut">
+              <a:rPr lang="en-US" smtClean="0"/>
+              <a:t>2/8/2022</a:t>
+            </a:fld>
+            <a:endParaRPr lang="en-US" dirty="0"/>
+          </a:p>
+        </p:txBody>
+      </p:sp>
+      <p:sp>
+        <p:nvSpPr>
+          <p:cNvPr id="5" name="Footer Placeholder 4"/>
+          <p:cNvSpPr>
+            <a:spLocks noGrp="1"/>
+          </p:cNvSpPr>
+          <p:nvPr>
+            <p:ph type="ftr" sz="quarter" idx="11"/>
+          </p:nvPr>
+        </p:nvSpPr>
         <p:spPr/>
         <p:txBody>
           <a:bodyPr/>
           <a:lstStyle/>
           <a:p>
-            <a:r>
-              <a:rPr lang="en-US" smtClean="0"/>
-              <a:t>Click to edit Master title style</a:t>
-            </a:r>
-            <a:endParaRPr lang="en-US"/>
-          </a:p>
-        </p:txBody>
-      </p:sp>
-      <p:sp>
-        <p:nvSpPr>
-          <p:cNvPr id="3" name="Content Placeholder 2"/>
-          <p:cNvSpPr>
-            <a:spLocks noGrp="1"/>
-          </p:cNvSpPr>
-          <p:nvPr>
-            <p:ph idx="1"/>
+            <a:endParaRPr lang="en-US" dirty="0"/>
+          </a:p>
+        </p:txBody>
+      </p:sp>
+      <p:sp>
+        <p:nvSpPr>
+          <p:cNvPr id="6" name="Slide Number Placeholder 5"/>
+          <p:cNvSpPr>
+            <a:spLocks noGrp="1"/>
+          </p:cNvSpPr>
+          <p:nvPr>
+            <p:ph type="sldNum" sz="quarter" idx="12"/>
           </p:nvPr>
         </p:nvSpPr>
         <p:spPr/>
@@ -759,112 +1348,235 @@
           <a:bodyPr/>
           <a:lstStyle/>
           <a:p>
-            <a:pPr lvl="0"/>
-            <a:r>
-              <a:rPr lang="en-US" smtClean="0"/>
-              <a:t>Click to edit Master text styles</a:t>
-            </a:r>
-          </a:p>
-          <a:p>
-            <a:pPr lvl="1"/>
-            <a:r>
-              <a:rPr lang="en-US" smtClean="0"/>
-              <a:t>Second level</a:t>
-            </a:r>
-          </a:p>
-          <a:p>
-            <a:pPr lvl="2"/>
-            <a:r>
-              <a:rPr lang="en-US" smtClean="0"/>
-              <a:t>Third level</a:t>
-            </a:r>
-          </a:p>
-          <a:p>
-            <a:pPr lvl="3"/>
-            <a:r>
-              <a:rPr lang="en-US" smtClean="0"/>
-              <a:t>Fourth level</a:t>
-            </a:r>
-          </a:p>
-          <a:p>
-            <a:pPr lvl="4"/>
-            <a:r>
-              <a:rPr lang="en-US" smtClean="0"/>
-              <a:t>Fifth level</a:t>
-            </a:r>
-            <a:endParaRPr lang="en-US"/>
-          </a:p>
-        </p:txBody>
-      </p:sp>
-      <p:sp>
-        <p:nvSpPr>
-          <p:cNvPr id="4" name="Date Placeholder 3"/>
-          <p:cNvSpPr>
-            <a:spLocks noGrp="1"/>
-          </p:cNvSpPr>
-          <p:nvPr>
-            <p:ph type="dt" sz="half" idx="10"/>
-          </p:nvPr>
-        </p:nvSpPr>
-        <p:spPr/>
-        <p:txBody>
-          <a:bodyPr/>
-          <a:lstStyle/>
-          <a:p>
-            <a:fld id="{5BCAD085-E8A6-8845-BD4E-CB4CCA059FC4}" type="datetimeFigureOut">
-              <a:rPr lang="en-US" smtClean="0"/>
-              <a:t>1/27/13</a:t>
-            </a:fld>
-            <a:endParaRPr lang="en-US"/>
-          </a:p>
-        </p:txBody>
-      </p:sp>
-      <p:sp>
-        <p:nvSpPr>
-          <p:cNvPr id="5" name="Footer Placeholder 4"/>
-          <p:cNvSpPr>
-            <a:spLocks noGrp="1"/>
-          </p:cNvSpPr>
-          <p:nvPr>
-            <p:ph type="ftr" sz="quarter" idx="11"/>
-          </p:nvPr>
-        </p:nvSpPr>
-        <p:spPr/>
-        <p:txBody>
-          <a:bodyPr/>
-          <a:lstStyle/>
-          <a:p>
-            <a:endParaRPr lang="en-US"/>
-          </a:p>
-        </p:txBody>
-      </p:sp>
-      <p:sp>
-        <p:nvSpPr>
-          <p:cNvPr id="6" name="Slide Number Placeholder 5"/>
-          <p:cNvSpPr>
-            <a:spLocks noGrp="1"/>
-          </p:cNvSpPr>
-          <p:nvPr>
-            <p:ph type="sldNum" sz="quarter" idx="12"/>
-          </p:nvPr>
-        </p:nvSpPr>
-        <p:spPr/>
-        <p:txBody>
-          <a:bodyPr/>
-          <a:lstStyle/>
-          <a:p>
-            <a:fld id="{C1FF6DA9-008F-8B48-92A6-B652298478BF}" type="slidenum">
+            <a:fld id="{48F63A3B-78C7-47BE-AE5E-E10140E04643}" type="slidenum">
               <a:rPr lang="en-US" smtClean="0"/>
               <a:t>‹#›</a:t>
             </a:fld>
-            <a:endParaRPr lang="en-US"/>
-          </a:p>
-        </p:txBody>
-      </p:sp>
+            <a:endParaRPr lang="en-US" dirty="0"/>
+          </a:p>
+        </p:txBody>
+      </p:sp>
+      <p:pic>
+        <p:nvPicPr>
+          <p:cNvPr id="7" name="Picture 6" descr="http://holychildcatholicschool.org/images/AMDG.jpg">
+            <a:extLst>
+              <a:ext uri="{FF2B5EF4-FFF2-40B4-BE49-F238E27FC236}">
+                <a16:creationId xmlns:a16="http://schemas.microsoft.com/office/drawing/2014/main" id="{1A075D24-58FB-45E0-97FB-D110E42AAD23}"/>
+              </a:ext>
+            </a:extLst>
+          </p:cNvPr>
+          <p:cNvPicPr>
+            <a:picLocks noChangeAspect="1" noChangeArrowheads="1"/>
+          </p:cNvPicPr>
+          <p:nvPr userDrawn="1"/>
+        </p:nvPicPr>
+        <p:blipFill>
+          <a:blip r:embed="rId2">
+            <a:extLst>
+              <a:ext uri="{28A0092B-C50C-407E-A947-70E740481C1C}">
+                <a14:useLocalDpi xmlns:a14="http://schemas.microsoft.com/office/drawing/2010/main" val="0"/>
+              </a:ext>
+            </a:extLst>
+          </a:blip>
+          <a:srcRect/>
+          <a:stretch>
+            <a:fillRect/>
+          </a:stretch>
+        </p:blipFill>
+        <p:spPr bwMode="auto">
+          <a:xfrm>
+            <a:off x="73820" y="6096269"/>
+            <a:ext cx="648692" cy="694793"/>
+          </a:xfrm>
+          <a:prstGeom prst="rect">
+            <a:avLst/>
+          </a:prstGeom>
+          <a:noFill/>
+          <a:extLst>
+            <a:ext uri="{909E8E84-426E-40DD-AFC4-6F175D3DCCD1}">
+              <a14:hiddenFill xmlns:a14="http://schemas.microsoft.com/office/drawing/2010/main">
+                <a:solidFill>
+                  <a:srgbClr val="FFFFFF"/>
+                </a:solidFill>
+              </a14:hiddenFill>
+            </a:ext>
+          </a:extLst>
+        </p:spPr>
+      </p:pic>
+      <p:pic>
+        <p:nvPicPr>
+          <p:cNvPr id="8" name="Content Placeholder 5">
+            <a:extLst>
+              <a:ext uri="{FF2B5EF4-FFF2-40B4-BE49-F238E27FC236}">
+                <a16:creationId xmlns:a16="http://schemas.microsoft.com/office/drawing/2014/main" id="{FB4AF569-35E8-469F-B966-1D4991D7CAC2}"/>
+              </a:ext>
+            </a:extLst>
+          </p:cNvPr>
+          <p:cNvPicPr>
+            <a:picLocks noChangeAspect="1"/>
+          </p:cNvPicPr>
+          <p:nvPr userDrawn="1"/>
+        </p:nvPicPr>
+        <p:blipFill>
+          <a:blip r:embed="rId3">
+            <a:extLst>
+              <a:ext uri="{28A0092B-C50C-407E-A947-70E740481C1C}">
+                <a14:useLocalDpi xmlns:a14="http://schemas.microsoft.com/office/drawing/2010/main" val="0"/>
+              </a:ext>
+            </a:extLst>
+          </a:blip>
+          <a:stretch>
+            <a:fillRect/>
+          </a:stretch>
+        </p:blipFill>
+        <p:spPr>
+          <a:xfrm>
+            <a:off x="11000831" y="82217"/>
+            <a:ext cx="1097280" cy="1067079"/>
+          </a:xfrm>
+          <a:prstGeom prst="rect">
+            <a:avLst/>
+          </a:prstGeom>
+        </p:spPr>
+      </p:pic>
+      <p:sp>
+        <p:nvSpPr>
+          <p:cNvPr id="9" name="TextBox 8">
+            <a:extLst>
+              <a:ext uri="{FF2B5EF4-FFF2-40B4-BE49-F238E27FC236}">
+                <a16:creationId xmlns:a16="http://schemas.microsoft.com/office/drawing/2014/main" id="{B84A9ABD-6110-4F9E-A27C-F9036C891C1E}"/>
+              </a:ext>
+            </a:extLst>
+          </p:cNvPr>
+          <p:cNvSpPr txBox="1"/>
+          <p:nvPr userDrawn="1"/>
+        </p:nvSpPr>
+        <p:spPr>
+          <a:xfrm>
+            <a:off x="3201787" y="6315104"/>
+            <a:ext cx="8534400" cy="369332"/>
+          </a:xfrm>
+          <a:prstGeom prst="rect">
+            <a:avLst/>
+          </a:prstGeom>
+          <a:noFill/>
+        </p:spPr>
+        <p:txBody>
+          <a:bodyPr wrap="square" rtlCol="0">
+            <a:spAutoFit/>
+          </a:bodyPr>
+          <a:lstStyle/>
+          <a:p>
+            <a:pPr algn="r"/>
+            <a:r>
+              <a:rPr lang="en-US" sz="1800" b="1" dirty="0">
+                <a:solidFill>
+                  <a:schemeClr val="accent1">
+                    <a:lumMod val="50000"/>
+                  </a:schemeClr>
+                </a:solidFill>
+                <a:latin typeface="Times New Roman" panose="02020603050405020304" pitchFamily="18" charset="0"/>
+                <a:cs typeface="Times New Roman" panose="02020603050405020304" pitchFamily="18" charset="0"/>
+              </a:rPr>
+              <a:t>HOLY CHILD CATHOLIC SCHOOL: RAISING SAINTS, FORMING SCHOLARS</a:t>
+            </a:r>
+          </a:p>
+        </p:txBody>
+      </p:sp>
+      <p:cxnSp>
+        <p:nvCxnSpPr>
+          <p:cNvPr id="10" name="Straight Connector 9">
+            <a:extLst>
+              <a:ext uri="{FF2B5EF4-FFF2-40B4-BE49-F238E27FC236}">
+                <a16:creationId xmlns:a16="http://schemas.microsoft.com/office/drawing/2014/main" id="{388B6997-9B4F-4EE7-914A-92A8BA753781}"/>
+              </a:ext>
+            </a:extLst>
+          </p:cNvPr>
+          <p:cNvCxnSpPr>
+            <a:cxnSpLocks/>
+          </p:cNvCxnSpPr>
+          <p:nvPr userDrawn="1"/>
+        </p:nvCxnSpPr>
+        <p:spPr>
+          <a:xfrm>
+            <a:off x="783771" y="6176963"/>
+            <a:ext cx="11019608" cy="0"/>
+          </a:xfrm>
+          <a:prstGeom prst="line">
+            <a:avLst/>
+          </a:prstGeom>
+          <a:ln w="76200">
+            <a:solidFill>
+              <a:schemeClr val="accent1">
+                <a:lumMod val="50000"/>
+              </a:schemeClr>
+            </a:solidFill>
+          </a:ln>
+        </p:spPr>
+        <p:style>
+          <a:lnRef idx="1">
+            <a:schemeClr val="accent1"/>
+          </a:lnRef>
+          <a:fillRef idx="0">
+            <a:schemeClr val="accent1"/>
+          </a:fillRef>
+          <a:effectRef idx="0">
+            <a:schemeClr val="accent1"/>
+          </a:effectRef>
+          <a:fontRef idx="minor">
+            <a:schemeClr val="tx1"/>
+          </a:fontRef>
+        </p:style>
+      </p:cxnSp>
+      <p:cxnSp>
+        <p:nvCxnSpPr>
+          <p:cNvPr id="11" name="Straight Connector 10">
+            <a:extLst>
+              <a:ext uri="{FF2B5EF4-FFF2-40B4-BE49-F238E27FC236}">
+                <a16:creationId xmlns:a16="http://schemas.microsoft.com/office/drawing/2014/main" id="{03000B35-988C-48A1-ADC2-1647C99D651C}"/>
+              </a:ext>
+            </a:extLst>
+          </p:cNvPr>
+          <p:cNvCxnSpPr>
+            <a:cxnSpLocks/>
+          </p:cNvCxnSpPr>
+          <p:nvPr userDrawn="1"/>
+        </p:nvCxnSpPr>
+        <p:spPr>
+          <a:xfrm>
+            <a:off x="535021" y="1083971"/>
+            <a:ext cx="10332720" cy="0"/>
+          </a:xfrm>
+          <a:prstGeom prst="line">
+            <a:avLst/>
+          </a:prstGeom>
+          <a:ln w="76200">
+            <a:solidFill>
+              <a:schemeClr val="accent1">
+                <a:lumMod val="50000"/>
+              </a:schemeClr>
+            </a:solidFill>
+          </a:ln>
+        </p:spPr>
+        <p:style>
+          <a:lnRef idx="1">
+            <a:schemeClr val="accent1"/>
+          </a:lnRef>
+          <a:fillRef idx="0">
+            <a:schemeClr val="accent1"/>
+          </a:fillRef>
+          <a:effectRef idx="0">
+            <a:schemeClr val="accent1"/>
+          </a:effectRef>
+          <a:fontRef idx="minor">
+            <a:schemeClr val="tx1"/>
+          </a:fontRef>
+        </p:style>
+      </p:cxnSp>
     </p:spTree>
     <p:extLst>
       <p:ext uri="{BB962C8B-B14F-4D97-AF65-F5344CB8AC3E}">
-        <p14:creationId xmlns:p14="http://schemas.microsoft.com/office/powerpoint/2010/main" val="2614314258"/>
+        <p14:creationId xmlns:p14="http://schemas.microsoft.com/office/powerpoint/2010/main" val="2625680947"/>
       </p:ext>
     </p:extLst>
   </p:cSld>
@@ -903,23 +1615,23 @@
         </p:nvSpPr>
         <p:spPr>
           <a:xfrm>
-            <a:off x="722313" y="4406900"/>
-            <a:ext cx="7772400" cy="1362075"/>
+            <a:off x="831850" y="1709738"/>
+            <a:ext cx="10515600" cy="2852737"/>
           </a:xfrm>
         </p:spPr>
         <p:txBody>
-          <a:bodyPr anchor="t"/>
+          <a:bodyPr anchor="b"/>
           <a:lstStyle>
-            <a:lvl1pPr algn="l">
-              <a:defRPr sz="4000" b="1" cap="all"/>
+            <a:lvl1pPr>
+              <a:defRPr sz="6000"/>
             </a:lvl1pPr>
           </a:lstStyle>
           <a:p>
             <a:r>
-              <a:rPr lang="en-US" smtClean="0"/>
+              <a:rPr lang="en-US"/>
               <a:t>Click to edit Master title style</a:t>
             </a:r>
-            <a:endParaRPr lang="en-US"/>
+            <a:endParaRPr lang="en-US" dirty="0"/>
           </a:p>
         </p:txBody>
       </p:sp>
@@ -935,16 +1647,16 @@
         </p:nvSpPr>
         <p:spPr>
           <a:xfrm>
-            <a:off x="722313" y="2906713"/>
-            <a:ext cx="7772400" cy="1500187"/>
+            <a:off x="831850" y="4589463"/>
+            <a:ext cx="10515600" cy="1500187"/>
           </a:xfrm>
         </p:spPr>
         <p:txBody>
-          <a:bodyPr anchor="b"/>
+          <a:bodyPr/>
           <a:lstStyle>
             <a:lvl1pPr marL="0" indent="0">
               <a:buNone/>
-              <a:defRPr sz="2000">
+              <a:defRPr sz="2400">
                 <a:solidFill>
                   <a:schemeClr val="tx1">
                     <a:tint val="75000"/>
@@ -954,7 +1666,7 @@
             </a:lvl1pPr>
             <a:lvl2pPr marL="457200" indent="0">
               <a:buNone/>
-              <a:defRPr sz="1800">
+              <a:defRPr sz="2000">
                 <a:solidFill>
                   <a:schemeClr val="tx1">
                     <a:tint val="75000"/>
@@ -964,7 +1676,7 @@
             </a:lvl2pPr>
             <a:lvl3pPr marL="914400" indent="0">
               <a:buNone/>
-              <a:defRPr sz="1600">
+              <a:defRPr sz="1800">
                 <a:solidFill>
                   <a:schemeClr val="tx1">
                     <a:tint val="75000"/>
@@ -974,7 +1686,7 @@
             </a:lvl3pPr>
             <a:lvl4pPr marL="1371600" indent="0">
               <a:buNone/>
-              <a:defRPr sz="1400">
+              <a:defRPr sz="1600">
                 <a:solidFill>
                   <a:schemeClr val="tx1">
                     <a:tint val="75000"/>
@@ -984,7 +1696,7 @@
             </a:lvl4pPr>
             <a:lvl5pPr marL="1828800" indent="0">
               <a:buNone/>
-              <a:defRPr sz="1400">
+              <a:defRPr sz="1600">
                 <a:solidFill>
                   <a:schemeClr val="tx1">
                     <a:tint val="75000"/>
@@ -994,7 +1706,7 @@
             </a:lvl5pPr>
             <a:lvl6pPr marL="2286000" indent="0">
               <a:buNone/>
-              <a:defRPr sz="1400">
+              <a:defRPr sz="1600">
                 <a:solidFill>
                   <a:schemeClr val="tx1">
                     <a:tint val="75000"/>
@@ -1004,7 +1716,7 @@
             </a:lvl6pPr>
             <a:lvl7pPr marL="2743200" indent="0">
               <a:buNone/>
-              <a:defRPr sz="1400">
+              <a:defRPr sz="1600">
                 <a:solidFill>
                   <a:schemeClr val="tx1">
                     <a:tint val="75000"/>
@@ -1014,7 +1726,7 @@
             </a:lvl7pPr>
             <a:lvl8pPr marL="3200400" indent="0">
               <a:buNone/>
-              <a:defRPr sz="1400">
+              <a:defRPr sz="1600">
                 <a:solidFill>
                   <a:schemeClr val="tx1">
                     <a:tint val="75000"/>
@@ -1024,7 +1736,7 @@
             </a:lvl8pPr>
             <a:lvl9pPr marL="3657600" indent="0">
               <a:buNone/>
-              <a:defRPr sz="1400">
+              <a:defRPr sz="1600">
                 <a:solidFill>
                   <a:schemeClr val="tx1">
                     <a:tint val="75000"/>
@@ -1036,30 +1748,30 @@
           <a:p>
             <a:pPr lvl="0"/>
             <a:r>
+              <a:rPr lang="en-US"/>
+              <a:t>Edit Master text styles</a:t>
+            </a:r>
+          </a:p>
+        </p:txBody>
+      </p:sp>
+      <p:sp>
+        <p:nvSpPr>
+          <p:cNvPr id="4" name="Date Placeholder 3"/>
+          <p:cNvSpPr>
+            <a:spLocks noGrp="1"/>
+          </p:cNvSpPr>
+          <p:nvPr>
+            <p:ph type="dt" sz="half" idx="10"/>
+          </p:nvPr>
+        </p:nvSpPr>
+        <p:spPr/>
+        <p:txBody>
+          <a:bodyPr/>
+          <a:lstStyle/>
+          <a:p>
+            <a:fld id="{971C0534-AC82-40C9-9D5F-C772AE9BC3F8}" type="datetimeFigureOut">
               <a:rPr lang="en-US" smtClean="0"/>
-              <a:t>Click to edit Master text styles</a:t>
-            </a:r>
-          </a:p>
-        </p:txBody>
-      </p:sp>
-      <p:sp>
-        <p:nvSpPr>
-          <p:cNvPr id="4" name="Date Placeholder 3"/>
-          <p:cNvSpPr>
-            <a:spLocks noGrp="1"/>
-          </p:cNvSpPr>
-          <p:nvPr>
-            <p:ph type="dt" sz="half" idx="10"/>
-          </p:nvPr>
-        </p:nvSpPr>
-        <p:spPr/>
-        <p:txBody>
-          <a:bodyPr/>
-          <a:lstStyle/>
-          <a:p>
-            <a:fld id="{5BCAD085-E8A6-8845-BD4E-CB4CCA059FC4}" type="datetimeFigureOut">
-              <a:rPr lang="en-US" smtClean="0"/>
-              <a:t>1/27/13</a:t>
+              <a:t>2/8/2022</a:t>
             </a:fld>
             <a:endParaRPr lang="en-US"/>
           </a:p>
@@ -1099,7 +1811,7 @@
           <a:bodyPr/>
           <a:lstStyle/>
           <a:p>
-            <a:fld id="{C1FF6DA9-008F-8B48-92A6-B652298478BF}" type="slidenum">
+            <a:fld id="{A58BF1B2-8942-48EC-B5EF-B915FB58F230}" type="slidenum">
               <a:rPr lang="en-US" smtClean="0"/>
               <a:t>‹#›</a:t>
             </a:fld>
@@ -1110,7 +1822,7 @@
     </p:spTree>
     <p:extLst>
       <p:ext uri="{BB962C8B-B14F-4D97-AF65-F5344CB8AC3E}">
-        <p14:creationId xmlns:p14="http://schemas.microsoft.com/office/powerpoint/2010/main" val="960648375"/>
+        <p14:creationId xmlns:p14="http://schemas.microsoft.com/office/powerpoint/2010/main" val="3458680407"/>
       </p:ext>
     </p:extLst>
   </p:cSld>
@@ -1153,10 +1865,10 @@
           <a:lstStyle/>
           <a:p>
             <a:r>
-              <a:rPr lang="en-US" smtClean="0"/>
+              <a:rPr lang="en-US"/>
               <a:t>Click to edit Master title style</a:t>
             </a:r>
-            <a:endParaRPr lang="en-US"/>
+            <a:endParaRPr lang="en-US" dirty="0"/>
           </a:p>
         </p:txBody>
       </p:sp>
@@ -1172,76 +1884,48 @@
         </p:nvSpPr>
         <p:spPr>
           <a:xfrm>
-            <a:off x="457200" y="1600200"/>
-            <a:ext cx="4038600" cy="4525963"/>
+            <a:off x="838200" y="1825625"/>
+            <a:ext cx="5181600" cy="4351338"/>
           </a:xfrm>
         </p:spPr>
         <p:txBody>
           <a:bodyPr/>
-          <a:lstStyle>
-            <a:lvl1pPr>
-              <a:defRPr sz="2800"/>
-            </a:lvl1pPr>
-            <a:lvl2pPr>
-              <a:defRPr sz="2400"/>
-            </a:lvl2pPr>
-            <a:lvl3pPr>
-              <a:defRPr sz="2000"/>
-            </a:lvl3pPr>
-            <a:lvl4pPr>
-              <a:defRPr sz="1800"/>
-            </a:lvl4pPr>
-            <a:lvl5pPr>
-              <a:defRPr sz="1800"/>
-            </a:lvl5pPr>
-            <a:lvl6pPr>
-              <a:defRPr sz="1800"/>
-            </a:lvl6pPr>
-            <a:lvl7pPr>
-              <a:defRPr sz="1800"/>
-            </a:lvl7pPr>
-            <a:lvl8pPr>
-              <a:defRPr sz="1800"/>
-            </a:lvl8pPr>
-            <a:lvl9pPr>
-              <a:defRPr sz="1800"/>
-            </a:lvl9pPr>
-          </a:lstStyle>
+          <a:lstStyle/>
           <a:p>
             <a:pPr lvl="0"/>
             <a:r>
-              <a:rPr lang="en-US" smtClean="0"/>
-              <a:t>Click to edit Master text styles</a:t>
+              <a:rPr lang="en-US"/>
+              <a:t>Edit Master text styles</a:t>
             </a:r>
           </a:p>
           <a:p>
             <a:pPr lvl="1"/>
             <a:r>
-              <a:rPr lang="en-US" smtClean="0"/>
+              <a:rPr lang="en-US"/>
               <a:t>Second level</a:t>
             </a:r>
           </a:p>
           <a:p>
             <a:pPr lvl="2"/>
             <a:r>
-              <a:rPr lang="en-US" smtClean="0"/>
+              <a:rPr lang="en-US"/>
               <a:t>Third level</a:t>
             </a:r>
           </a:p>
           <a:p>
             <a:pPr lvl="3"/>
             <a:r>
-              <a:rPr lang="en-US" smtClean="0"/>
+              <a:rPr lang="en-US"/>
               <a:t>Fourth level</a:t>
             </a:r>
           </a:p>
           <a:p>
             <a:pPr lvl="4"/>
             <a:r>
-              <a:rPr lang="en-US" smtClean="0"/>
+              <a:rPr lang="en-US"/>
               <a:t>Fifth level</a:t>
             </a:r>
-            <a:endParaRPr lang="en-US"/>
+            <a:endParaRPr lang="en-US" dirty="0"/>
           </a:p>
         </p:txBody>
       </p:sp>
@@ -1257,97 +1941,69 @@
         </p:nvSpPr>
         <p:spPr>
           <a:xfrm>
-            <a:off x="4648200" y="1600200"/>
-            <a:ext cx="4038600" cy="4525963"/>
+            <a:off x="6172200" y="1825625"/>
+            <a:ext cx="5181600" cy="4351338"/>
           </a:xfrm>
         </p:spPr>
         <p:txBody>
           <a:bodyPr/>
-          <a:lstStyle>
-            <a:lvl1pPr>
-              <a:defRPr sz="2800"/>
-            </a:lvl1pPr>
-            <a:lvl2pPr>
-              <a:defRPr sz="2400"/>
-            </a:lvl2pPr>
-            <a:lvl3pPr>
-              <a:defRPr sz="2000"/>
-            </a:lvl3pPr>
-            <a:lvl4pPr>
-              <a:defRPr sz="1800"/>
-            </a:lvl4pPr>
-            <a:lvl5pPr>
-              <a:defRPr sz="1800"/>
-            </a:lvl5pPr>
-            <a:lvl6pPr>
-              <a:defRPr sz="1800"/>
-            </a:lvl6pPr>
-            <a:lvl7pPr>
-              <a:defRPr sz="1800"/>
-            </a:lvl7pPr>
-            <a:lvl8pPr>
-              <a:defRPr sz="1800"/>
-            </a:lvl8pPr>
-            <a:lvl9pPr>
-              <a:defRPr sz="1800"/>
-            </a:lvl9pPr>
-          </a:lstStyle>
+          <a:lstStyle/>
           <a:p>
             <a:pPr lvl="0"/>
             <a:r>
+              <a:rPr lang="en-US"/>
+              <a:t>Edit Master text styles</a:t>
+            </a:r>
+          </a:p>
+          <a:p>
+            <a:pPr lvl="1"/>
+            <a:r>
+              <a:rPr lang="en-US"/>
+              <a:t>Second level</a:t>
+            </a:r>
+          </a:p>
+          <a:p>
+            <a:pPr lvl="2"/>
+            <a:r>
+              <a:rPr lang="en-US"/>
+              <a:t>Third level</a:t>
+            </a:r>
+          </a:p>
+          <a:p>
+            <a:pPr lvl="3"/>
+            <a:r>
+              <a:rPr lang="en-US"/>
+              <a:t>Fourth level</a:t>
+            </a:r>
+          </a:p>
+          <a:p>
+            <a:pPr lvl="4"/>
+            <a:r>
+              <a:rPr lang="en-US"/>
+              <a:t>Fifth level</a:t>
+            </a:r>
+            <a:endParaRPr lang="en-US" dirty="0"/>
+          </a:p>
+        </p:txBody>
+      </p:sp>
+      <p:sp>
+        <p:nvSpPr>
+          <p:cNvPr id="5" name="Date Placeholder 4"/>
+          <p:cNvSpPr>
+            <a:spLocks noGrp="1"/>
+          </p:cNvSpPr>
+          <p:nvPr>
+            <p:ph type="dt" sz="half" idx="10"/>
+          </p:nvPr>
+        </p:nvSpPr>
+        <p:spPr/>
+        <p:txBody>
+          <a:bodyPr/>
+          <a:lstStyle/>
+          <a:p>
+            <a:fld id="{971C0534-AC82-40C9-9D5F-C772AE9BC3F8}" type="datetimeFigureOut">
               <a:rPr lang="en-US" smtClean="0"/>
-              <a:t>Click to edit Master text styles</a:t>
-            </a:r>
-          </a:p>
-          <a:p>
-            <a:pPr lvl="1"/>
-            <a:r>
-              <a:rPr lang="en-US" smtClean="0"/>
-              <a:t>Second level</a:t>
-            </a:r>
-          </a:p>
-          <a:p>
-            <a:pPr lvl="2"/>
-            <a:r>
-              <a:rPr lang="en-US" smtClean="0"/>
-              <a:t>Third level</a:t>
-            </a:r>
-          </a:p>
-          <a:p>
-            <a:pPr lvl="3"/>
-            <a:r>
-              <a:rPr lang="en-US" smtClean="0"/>
-              <a:t>Fourth level</a:t>
-            </a:r>
-          </a:p>
-          <a:p>
-            <a:pPr lvl="4"/>
-            <a:r>
-              <a:rPr lang="en-US" smtClean="0"/>
-              <a:t>Fifth level</a:t>
-            </a:r>
-            <a:endParaRPr lang="en-US"/>
-          </a:p>
-        </p:txBody>
-      </p:sp>
-      <p:sp>
-        <p:nvSpPr>
-          <p:cNvPr id="5" name="Date Placeholder 4"/>
-          <p:cNvSpPr>
-            <a:spLocks noGrp="1"/>
-          </p:cNvSpPr>
-          <p:nvPr>
-            <p:ph type="dt" sz="half" idx="10"/>
-          </p:nvPr>
-        </p:nvSpPr>
-        <p:spPr/>
-        <p:txBody>
-          <a:bodyPr/>
-          <a:lstStyle/>
-          <a:p>
-            <a:fld id="{5BCAD085-E8A6-8845-BD4E-CB4CCA059FC4}" type="datetimeFigureOut">
-              <a:rPr lang="en-US" smtClean="0"/>
-              <a:t>1/27/13</a:t>
+              <a:t>2/8/2022</a:t>
             </a:fld>
             <a:endParaRPr lang="en-US"/>
           </a:p>
@@ -1387,7 +2043,7 @@
           <a:bodyPr/>
           <a:lstStyle/>
           <a:p>
-            <a:fld id="{C1FF6DA9-008F-8B48-92A6-B652298478BF}" type="slidenum">
+            <a:fld id="{A58BF1B2-8942-48EC-B5EF-B915FB58F230}" type="slidenum">
               <a:rPr lang="en-US" smtClean="0"/>
               <a:t>‹#›</a:t>
             </a:fld>
@@ -1398,7 +2054,7 @@
     </p:spTree>
     <p:extLst>
       <p:ext uri="{BB962C8B-B14F-4D97-AF65-F5344CB8AC3E}">
-        <p14:creationId xmlns:p14="http://schemas.microsoft.com/office/powerpoint/2010/main" val="2782244947"/>
+        <p14:creationId xmlns:p14="http://schemas.microsoft.com/office/powerpoint/2010/main" val="4051028432"/>
       </p:ext>
     </p:extLst>
   </p:cSld>
@@ -1435,37 +2091,38 @@
             <p:ph type="title"/>
           </p:nvPr>
         </p:nvSpPr>
-        <p:spPr/>
-        <p:txBody>
-          <a:bodyPr/>
-          <a:lstStyle>
-            <a:lvl1pPr>
-              <a:defRPr/>
-            </a:lvl1pPr>
-          </a:lstStyle>
-          <a:p>
-            <a:r>
-              <a:rPr lang="en-US" smtClean="0"/>
-              <a:t>Click to edit Master title style</a:t>
-            </a:r>
-            <a:endParaRPr lang="en-US"/>
-          </a:p>
-        </p:txBody>
-      </p:sp>
-      <p:sp>
-        <p:nvSpPr>
-          <p:cNvPr id="3" name="Text Placeholder 2"/>
-          <p:cNvSpPr>
-            <a:spLocks noGrp="1"/>
-          </p:cNvSpPr>
-          <p:nvPr>
-            <p:ph type="body" idx="1"/>
-          </p:nvPr>
-        </p:nvSpPr>
         <p:spPr>
           <a:xfrm>
-            <a:off x="457200" y="1535113"/>
-            <a:ext cx="4040188" cy="639762"/>
+            <a:off x="839788" y="365125"/>
+            <a:ext cx="10515600" cy="1325563"/>
+          </a:xfrm>
+        </p:spPr>
+        <p:txBody>
+          <a:bodyPr/>
+          <a:lstStyle/>
+          <a:p>
+            <a:r>
+              <a:rPr lang="en-US"/>
+              <a:t>Click to edit Master title style</a:t>
+            </a:r>
+            <a:endParaRPr lang="en-US" dirty="0"/>
+          </a:p>
+        </p:txBody>
+      </p:sp>
+      <p:sp>
+        <p:nvSpPr>
+          <p:cNvPr id="3" name="Text Placeholder 2"/>
+          <p:cNvSpPr>
+            <a:spLocks noGrp="1"/>
+          </p:cNvSpPr>
+          <p:nvPr>
+            <p:ph type="body" idx="1"/>
+          </p:nvPr>
+        </p:nvSpPr>
+        <p:spPr>
+          <a:xfrm>
+            <a:off x="839788" y="1681163"/>
+            <a:ext cx="5157787" cy="823912"/>
           </a:xfrm>
         </p:spPr>
         <p:txBody>
@@ -1511,8 +2168,8 @@
           <a:p>
             <a:pPr lvl="0"/>
             <a:r>
-              <a:rPr lang="en-US" smtClean="0"/>
-              <a:t>Click to edit Master text styles</a:t>
+              <a:rPr lang="en-US"/>
+              <a:t>Edit Master text styles</a:t>
             </a:r>
           </a:p>
         </p:txBody>
@@ -1529,76 +2186,48 @@
         </p:nvSpPr>
         <p:spPr>
           <a:xfrm>
-            <a:off x="457200" y="2174875"/>
-            <a:ext cx="4040188" cy="3951288"/>
+            <a:off x="839788" y="2505075"/>
+            <a:ext cx="5157787" cy="3684588"/>
           </a:xfrm>
         </p:spPr>
         <p:txBody>
           <a:bodyPr/>
-          <a:lstStyle>
-            <a:lvl1pPr>
-              <a:defRPr sz="2400"/>
-            </a:lvl1pPr>
-            <a:lvl2pPr>
-              <a:defRPr sz="2000"/>
-            </a:lvl2pPr>
-            <a:lvl3pPr>
-              <a:defRPr sz="1800"/>
-            </a:lvl3pPr>
-            <a:lvl4pPr>
-              <a:defRPr sz="1600"/>
-            </a:lvl4pPr>
-            <a:lvl5pPr>
-              <a:defRPr sz="1600"/>
-            </a:lvl5pPr>
-            <a:lvl6pPr>
-              <a:defRPr sz="1600"/>
-            </a:lvl6pPr>
-            <a:lvl7pPr>
-              <a:defRPr sz="1600"/>
-            </a:lvl7pPr>
-            <a:lvl8pPr>
-              <a:defRPr sz="1600"/>
-            </a:lvl8pPr>
-            <a:lvl9pPr>
-              <a:defRPr sz="1600"/>
-            </a:lvl9pPr>
-          </a:lstStyle>
+          <a:lstStyle/>
           <a:p>
             <a:pPr lvl="0"/>
             <a:r>
-              <a:rPr lang="en-US" smtClean="0"/>
-              <a:t>Click to edit Master text styles</a:t>
+              <a:rPr lang="en-US"/>
+              <a:t>Edit Master text styles</a:t>
             </a:r>
           </a:p>
           <a:p>
             <a:pPr lvl="1"/>
             <a:r>
-              <a:rPr lang="en-US" smtClean="0"/>
+              <a:rPr lang="en-US"/>
               <a:t>Second level</a:t>
             </a:r>
           </a:p>
           <a:p>
             <a:pPr lvl="2"/>
             <a:r>
-              <a:rPr lang="en-US" smtClean="0"/>
+              <a:rPr lang="en-US"/>
               <a:t>Third level</a:t>
             </a:r>
           </a:p>
           <a:p>
             <a:pPr lvl="3"/>
             <a:r>
-              <a:rPr lang="en-US" smtClean="0"/>
+              <a:rPr lang="en-US"/>
               <a:t>Fourth level</a:t>
             </a:r>
           </a:p>
           <a:p>
             <a:pPr lvl="4"/>
             <a:r>
-              <a:rPr lang="en-US" smtClean="0"/>
+              <a:rPr lang="en-US"/>
               <a:t>Fifth level</a:t>
             </a:r>
-            <a:endParaRPr lang="en-US"/>
+            <a:endParaRPr lang="en-US" dirty="0"/>
           </a:p>
         </p:txBody>
       </p:sp>
@@ -1614,8 +2243,8 @@
         </p:nvSpPr>
         <p:spPr>
           <a:xfrm>
-            <a:off x="4645025" y="1535113"/>
-            <a:ext cx="4041775" cy="639762"/>
+            <a:off x="6172200" y="1681163"/>
+            <a:ext cx="5183188" cy="823912"/>
           </a:xfrm>
         </p:spPr>
         <p:txBody>
@@ -1661,8 +2290,8 @@
           <a:p>
             <a:pPr lvl="0"/>
             <a:r>
-              <a:rPr lang="en-US" smtClean="0"/>
-              <a:t>Click to edit Master text styles</a:t>
+              <a:rPr lang="en-US"/>
+              <a:t>Edit Master text styles</a:t>
             </a:r>
           </a:p>
         </p:txBody>
@@ -1679,97 +2308,69 @@
         </p:nvSpPr>
         <p:spPr>
           <a:xfrm>
-            <a:off x="4645025" y="2174875"/>
-            <a:ext cx="4041775" cy="3951288"/>
+            <a:off x="6172200" y="2505075"/>
+            <a:ext cx="5183188" cy="3684588"/>
           </a:xfrm>
         </p:spPr>
         <p:txBody>
           <a:bodyPr/>
-          <a:lstStyle>
-            <a:lvl1pPr>
-              <a:defRPr sz="2400"/>
-            </a:lvl1pPr>
-            <a:lvl2pPr>
-              <a:defRPr sz="2000"/>
-            </a:lvl2pPr>
-            <a:lvl3pPr>
-              <a:defRPr sz="1800"/>
-            </a:lvl3pPr>
-            <a:lvl4pPr>
-              <a:defRPr sz="1600"/>
-            </a:lvl4pPr>
-            <a:lvl5pPr>
-              <a:defRPr sz="1600"/>
-            </a:lvl5pPr>
-            <a:lvl6pPr>
-              <a:defRPr sz="1600"/>
-            </a:lvl6pPr>
-            <a:lvl7pPr>
-              <a:defRPr sz="1600"/>
-            </a:lvl7pPr>
-            <a:lvl8pPr>
-              <a:defRPr sz="1600"/>
-            </a:lvl8pPr>
-            <a:lvl9pPr>
-              <a:defRPr sz="1600"/>
-            </a:lvl9pPr>
-          </a:lstStyle>
+          <a:lstStyle/>
           <a:p>
             <a:pPr lvl="0"/>
             <a:r>
+              <a:rPr lang="en-US"/>
+              <a:t>Edit Master text styles</a:t>
+            </a:r>
+          </a:p>
+          <a:p>
+            <a:pPr lvl="1"/>
+            <a:r>
+              <a:rPr lang="en-US"/>
+              <a:t>Second level</a:t>
+            </a:r>
+          </a:p>
+          <a:p>
+            <a:pPr lvl="2"/>
+            <a:r>
+              <a:rPr lang="en-US"/>
+              <a:t>Third level</a:t>
+            </a:r>
+          </a:p>
+          <a:p>
+            <a:pPr lvl="3"/>
+            <a:r>
+              <a:rPr lang="en-US"/>
+              <a:t>Fourth level</a:t>
+            </a:r>
+          </a:p>
+          <a:p>
+            <a:pPr lvl="4"/>
+            <a:r>
+              <a:rPr lang="en-US"/>
+              <a:t>Fifth level</a:t>
+            </a:r>
+            <a:endParaRPr lang="en-US" dirty="0"/>
+          </a:p>
+        </p:txBody>
+      </p:sp>
+      <p:sp>
+        <p:nvSpPr>
+          <p:cNvPr id="7" name="Date Placeholder 6"/>
+          <p:cNvSpPr>
+            <a:spLocks noGrp="1"/>
+          </p:cNvSpPr>
+          <p:nvPr>
+            <p:ph type="dt" sz="half" idx="10"/>
+          </p:nvPr>
+        </p:nvSpPr>
+        <p:spPr/>
+        <p:txBody>
+          <a:bodyPr/>
+          <a:lstStyle/>
+          <a:p>
+            <a:fld id="{971C0534-AC82-40C9-9D5F-C772AE9BC3F8}" type="datetimeFigureOut">
               <a:rPr lang="en-US" smtClean="0"/>
-              <a:t>Click to edit Master text styles</a:t>
-            </a:r>
-          </a:p>
-          <a:p>
-            <a:pPr lvl="1"/>
-            <a:r>
-              <a:rPr lang="en-US" smtClean="0"/>
-              <a:t>Second level</a:t>
-            </a:r>
-          </a:p>
-          <a:p>
-            <a:pPr lvl="2"/>
-            <a:r>
-              <a:rPr lang="en-US" smtClean="0"/>
-              <a:t>Third level</a:t>
-            </a:r>
-          </a:p>
-          <a:p>
-            <a:pPr lvl="3"/>
-            <a:r>
-              <a:rPr lang="en-US" smtClean="0"/>
-              <a:t>Fourth level</a:t>
-            </a:r>
-          </a:p>
-          <a:p>
-            <a:pPr lvl="4"/>
-            <a:r>
-              <a:rPr lang="en-US" smtClean="0"/>
-              <a:t>Fifth level</a:t>
-            </a:r>
-            <a:endParaRPr lang="en-US"/>
-          </a:p>
-        </p:txBody>
-      </p:sp>
-      <p:sp>
-        <p:nvSpPr>
-          <p:cNvPr id="7" name="Date Placeholder 6"/>
-          <p:cNvSpPr>
-            <a:spLocks noGrp="1"/>
-          </p:cNvSpPr>
-          <p:nvPr>
-            <p:ph type="dt" sz="half" idx="10"/>
-          </p:nvPr>
-        </p:nvSpPr>
-        <p:spPr/>
-        <p:txBody>
-          <a:bodyPr/>
-          <a:lstStyle/>
-          <a:p>
-            <a:fld id="{5BCAD085-E8A6-8845-BD4E-CB4CCA059FC4}" type="datetimeFigureOut">
-              <a:rPr lang="en-US" smtClean="0"/>
-              <a:t>1/27/13</a:t>
+              <a:t>2/8/2022</a:t>
             </a:fld>
             <a:endParaRPr lang="en-US"/>
           </a:p>
@@ -1809,7 +2410,7 @@
           <a:bodyPr/>
           <a:lstStyle/>
           <a:p>
-            <a:fld id="{C1FF6DA9-008F-8B48-92A6-B652298478BF}" type="slidenum">
+            <a:fld id="{A58BF1B2-8942-48EC-B5EF-B915FB58F230}" type="slidenum">
               <a:rPr lang="en-US" smtClean="0"/>
               <a:t>‹#›</a:t>
             </a:fld>
@@ -1820,7 +2421,7 @@
     </p:spTree>
     <p:extLst>
       <p:ext uri="{BB962C8B-B14F-4D97-AF65-F5344CB8AC3E}">
-        <p14:creationId xmlns:p14="http://schemas.microsoft.com/office/powerpoint/2010/main" val="990158736"/>
+        <p14:creationId xmlns:p14="http://schemas.microsoft.com/office/powerpoint/2010/main" val="923677476"/>
       </p:ext>
     </p:extLst>
   </p:cSld>
@@ -1863,31 +2464,31 @@
           <a:lstStyle/>
           <a:p>
             <a:r>
+              <a:rPr lang="en-US"/>
+              <a:t>Click to edit Master title style</a:t>
+            </a:r>
+            <a:endParaRPr lang="en-US" dirty="0"/>
+          </a:p>
+        </p:txBody>
+      </p:sp>
+      <p:sp>
+        <p:nvSpPr>
+          <p:cNvPr id="3" name="Date Placeholder 2"/>
+          <p:cNvSpPr>
+            <a:spLocks noGrp="1"/>
+          </p:cNvSpPr>
+          <p:nvPr>
+            <p:ph type="dt" sz="half" idx="10"/>
+          </p:nvPr>
+        </p:nvSpPr>
+        <p:spPr/>
+        <p:txBody>
+          <a:bodyPr/>
+          <a:lstStyle/>
+          <a:p>
+            <a:fld id="{971C0534-AC82-40C9-9D5F-C772AE9BC3F8}" type="datetimeFigureOut">
               <a:rPr lang="en-US" smtClean="0"/>
-              <a:t>Click to edit Master title style</a:t>
-            </a:r>
-            <a:endParaRPr lang="en-US"/>
-          </a:p>
-        </p:txBody>
-      </p:sp>
-      <p:sp>
-        <p:nvSpPr>
-          <p:cNvPr id="3" name="Date Placeholder 2"/>
-          <p:cNvSpPr>
-            <a:spLocks noGrp="1"/>
-          </p:cNvSpPr>
-          <p:nvPr>
-            <p:ph type="dt" sz="half" idx="10"/>
-          </p:nvPr>
-        </p:nvSpPr>
-        <p:spPr/>
-        <p:txBody>
-          <a:bodyPr/>
-          <a:lstStyle/>
-          <a:p>
-            <a:fld id="{5BCAD085-E8A6-8845-BD4E-CB4CCA059FC4}" type="datetimeFigureOut">
-              <a:rPr lang="en-US" smtClean="0"/>
-              <a:t>1/27/13</a:t>
+              <a:t>2/8/2022</a:t>
             </a:fld>
             <a:endParaRPr lang="en-US"/>
           </a:p>
@@ -1927,7 +2528,7 @@
           <a:bodyPr/>
           <a:lstStyle/>
           <a:p>
-            <a:fld id="{C1FF6DA9-008F-8B48-92A6-B652298478BF}" type="slidenum">
+            <a:fld id="{A58BF1B2-8942-48EC-B5EF-B915FB58F230}" type="slidenum">
               <a:rPr lang="en-US" smtClean="0"/>
               <a:t>‹#›</a:t>
             </a:fld>
@@ -1938,7 +2539,7 @@
     </p:spTree>
     <p:extLst>
       <p:ext uri="{BB962C8B-B14F-4D97-AF65-F5344CB8AC3E}">
-        <p14:creationId xmlns:p14="http://schemas.microsoft.com/office/powerpoint/2010/main" val="727027711"/>
+        <p14:creationId xmlns:p14="http://schemas.microsoft.com/office/powerpoint/2010/main" val="2208441489"/>
       </p:ext>
     </p:extLst>
   </p:cSld>
@@ -1980,9 +2581,9 @@
           <a:bodyPr/>
           <a:lstStyle/>
           <a:p>
-            <a:fld id="{5BCAD085-E8A6-8845-BD4E-CB4CCA059FC4}" type="datetimeFigureOut">
+            <a:fld id="{971C0534-AC82-40C9-9D5F-C772AE9BC3F8}" type="datetimeFigureOut">
               <a:rPr lang="en-US" smtClean="0"/>
-              <a:t>1/27/13</a:t>
+              <a:t>2/8/2022</a:t>
             </a:fld>
             <a:endParaRPr lang="en-US"/>
           </a:p>
@@ -2022,7 +2623,7 @@
           <a:bodyPr/>
           <a:lstStyle/>
           <a:p>
-            <a:fld id="{C1FF6DA9-008F-8B48-92A6-B652298478BF}" type="slidenum">
+            <a:fld id="{A58BF1B2-8942-48EC-B5EF-B915FB58F230}" type="slidenum">
               <a:rPr lang="en-US" smtClean="0"/>
               <a:t>‹#›</a:t>
             </a:fld>
@@ -2033,7 +2634,7 @@
     </p:spTree>
     <p:extLst>
       <p:ext uri="{BB962C8B-B14F-4D97-AF65-F5344CB8AC3E}">
-        <p14:creationId xmlns:p14="http://schemas.microsoft.com/office/powerpoint/2010/main" val="1212999818"/>
+        <p14:creationId xmlns:p14="http://schemas.microsoft.com/office/powerpoint/2010/main" val="1865105782"/>
       </p:ext>
     </p:extLst>
   </p:cSld>
@@ -2072,23 +2673,23 @@
         </p:nvSpPr>
         <p:spPr>
           <a:xfrm>
-            <a:off x="457200" y="273050"/>
-            <a:ext cx="3008313" cy="1162050"/>
+            <a:off x="839788" y="457200"/>
+            <a:ext cx="3932237" cy="1600200"/>
           </a:xfrm>
         </p:spPr>
         <p:txBody>
           <a:bodyPr anchor="b"/>
           <a:lstStyle>
-            <a:lvl1pPr algn="l">
-              <a:defRPr sz="2000" b="1"/>
+            <a:lvl1pPr>
+              <a:defRPr sz="3200"/>
             </a:lvl1pPr>
           </a:lstStyle>
           <a:p>
             <a:r>
-              <a:rPr lang="en-US" smtClean="0"/>
+              <a:rPr lang="en-US"/>
               <a:t>Click to edit Master title style</a:t>
             </a:r>
-            <a:endParaRPr lang="en-US"/>
+            <a:endParaRPr lang="en-US" dirty="0"/>
           </a:p>
         </p:txBody>
       </p:sp>
@@ -2104,8 +2705,8 @@
         </p:nvSpPr>
         <p:spPr>
           <a:xfrm>
-            <a:off x="3575050" y="273050"/>
-            <a:ext cx="5111750" cy="5853113"/>
+            <a:off x="5183188" y="987425"/>
+            <a:ext cx="6172200" cy="4873625"/>
           </a:xfrm>
         </p:spPr>
         <p:txBody>
@@ -2142,38 +2743,38 @@
           <a:p>
             <a:pPr lvl="0"/>
             <a:r>
-              <a:rPr lang="en-US" smtClean="0"/>
-              <a:t>Click to edit Master text styles</a:t>
+              <a:rPr lang="en-US"/>
+              <a:t>Edit Master text styles</a:t>
             </a:r>
           </a:p>
           <a:p>
             <a:pPr lvl="1"/>
             <a:r>
-              <a:rPr lang="en-US" smtClean="0"/>
+              <a:rPr lang="en-US"/>
               <a:t>Second level</a:t>
             </a:r>
           </a:p>
           <a:p>
             <a:pPr lvl="2"/>
             <a:r>
-              <a:rPr lang="en-US" smtClean="0"/>
+              <a:rPr lang="en-US"/>
               <a:t>Third level</a:t>
             </a:r>
           </a:p>
           <a:p>
             <a:pPr lvl="3"/>
             <a:r>
-              <a:rPr lang="en-US" smtClean="0"/>
+              <a:rPr lang="en-US"/>
               <a:t>Fourth level</a:t>
             </a:r>
           </a:p>
           <a:p>
             <a:pPr lvl="4"/>
             <a:r>
-              <a:rPr lang="en-US" smtClean="0"/>
+              <a:rPr lang="en-US"/>
               <a:t>Fifth level</a:t>
             </a:r>
-            <a:endParaRPr lang="en-US"/>
+            <a:endParaRPr lang="en-US" dirty="0"/>
           </a:p>
         </p:txBody>
       </p:sp>
@@ -2189,8 +2790,8 @@
         </p:nvSpPr>
         <p:spPr>
           <a:xfrm>
-            <a:off x="457200" y="1435100"/>
-            <a:ext cx="3008313" cy="4691063"/>
+            <a:off x="839788" y="2057400"/>
+            <a:ext cx="3932237" cy="3811588"/>
           </a:xfrm>
         </p:spPr>
         <p:txBody>
@@ -2198,68 +2799,68 @@
           <a:lstStyle>
             <a:lvl1pPr marL="0" indent="0">
               <a:buNone/>
-              <a:defRPr sz="1400"/>
+              <a:defRPr sz="1600"/>
             </a:lvl1pPr>
             <a:lvl2pPr marL="457200" indent="0">
               <a:buNone/>
-              <a:defRPr sz="1200"/>
+              <a:defRPr sz="1400"/>
             </a:lvl2pPr>
             <a:lvl3pPr marL="914400" indent="0">
               <a:buNone/>
-              <a:defRPr sz="1000"/>
+              <a:defRPr sz="1200"/>
             </a:lvl3pPr>
             <a:lvl4pPr marL="1371600" indent="0">
               <a:buNone/>
-              <a:defRPr sz="900"/>
+              <a:defRPr sz="1000"/>
             </a:lvl4pPr>
             <a:lvl5pPr marL="1828800" indent="0">
               <a:buNone/>
-              <a:defRPr sz="900"/>
+              <a:defRPr sz="1000"/>
             </a:lvl5pPr>
             <a:lvl6pPr marL="2286000" indent="0">
               <a:buNone/>
-              <a:defRPr sz="900"/>
+              <a:defRPr sz="1000"/>
             </a:lvl6pPr>
             <a:lvl7pPr marL="2743200" indent="0">
               <a:buNone/>
-              <a:defRPr sz="900"/>
+              <a:defRPr sz="1000"/>
             </a:lvl7pPr>
             <a:lvl8pPr marL="3200400" indent="0">
               <a:buNone/>
-              <a:defRPr sz="900"/>
+              <a:defRPr sz="1000"/>
             </a:lvl8pPr>
             <a:lvl9pPr marL="3657600" indent="0">
               <a:buNone/>
-              <a:defRPr sz="900"/>
+              <a:defRPr sz="1000"/>
             </a:lvl9pPr>
           </a:lstStyle>
           <a:p>
             <a:pPr lvl="0"/>
             <a:r>
+              <a:rPr lang="en-US"/>
+              <a:t>Edit Master text styles</a:t>
+            </a:r>
+          </a:p>
+        </p:txBody>
+      </p:sp>
+      <p:sp>
+        <p:nvSpPr>
+          <p:cNvPr id="5" name="Date Placeholder 4"/>
+          <p:cNvSpPr>
+            <a:spLocks noGrp="1"/>
+          </p:cNvSpPr>
+          <p:nvPr>
+            <p:ph type="dt" sz="half" idx="10"/>
+          </p:nvPr>
+        </p:nvSpPr>
+        <p:spPr/>
+        <p:txBody>
+          <a:bodyPr/>
+          <a:lstStyle/>
+          <a:p>
+            <a:fld id="{971C0534-AC82-40C9-9D5F-C772AE9BC3F8}" type="datetimeFigureOut">
               <a:rPr lang="en-US" smtClean="0"/>
-              <a:t>Click to edit Master text styles</a:t>
-            </a:r>
-          </a:p>
-        </p:txBody>
-      </p:sp>
-      <p:sp>
-        <p:nvSpPr>
-          <p:cNvPr id="5" name="Date Placeholder 4"/>
-          <p:cNvSpPr>
-            <a:spLocks noGrp="1"/>
-          </p:cNvSpPr>
-          <p:nvPr>
-            <p:ph type="dt" sz="half" idx="10"/>
-          </p:nvPr>
-        </p:nvSpPr>
-        <p:spPr/>
-        <p:txBody>
-          <a:bodyPr/>
-          <a:lstStyle/>
-          <a:p>
-            <a:fld id="{5BCAD085-E8A6-8845-BD4E-CB4CCA059FC4}" type="datetimeFigureOut">
-              <a:rPr lang="en-US" smtClean="0"/>
-              <a:t>1/27/13</a:t>
+              <a:t>2/8/2022</a:t>
             </a:fld>
             <a:endParaRPr lang="en-US"/>
           </a:p>
@@ -2299,7 +2900,7 @@
           <a:bodyPr/>
           <a:lstStyle/>
           <a:p>
-            <a:fld id="{C1FF6DA9-008F-8B48-92A6-B652298478BF}" type="slidenum">
+            <a:fld id="{A58BF1B2-8942-48EC-B5EF-B915FB58F230}" type="slidenum">
               <a:rPr lang="en-US" smtClean="0"/>
               <a:t>‹#›</a:t>
             </a:fld>
@@ -2310,7 +2911,7 @@
     </p:spTree>
     <p:extLst>
       <p:ext uri="{BB962C8B-B14F-4D97-AF65-F5344CB8AC3E}">
-        <p14:creationId xmlns:p14="http://schemas.microsoft.com/office/powerpoint/2010/main" val="1840726560"/>
+        <p14:creationId xmlns:p14="http://schemas.microsoft.com/office/powerpoint/2010/main" val="4056715949"/>
       </p:ext>
     </p:extLst>
   </p:cSld>
@@ -2349,23 +2950,23 @@
         </p:nvSpPr>
         <p:spPr>
           <a:xfrm>
-            <a:off x="1792288" y="4800600"/>
-            <a:ext cx="5486400" cy="566738"/>
+            <a:off x="839788" y="457200"/>
+            <a:ext cx="3932237" cy="1600200"/>
           </a:xfrm>
         </p:spPr>
         <p:txBody>
           <a:bodyPr anchor="b"/>
           <a:lstStyle>
-            <a:lvl1pPr algn="l">
-              <a:defRPr sz="2000" b="1"/>
+            <a:lvl1pPr>
+              <a:defRPr sz="3200"/>
             </a:lvl1pPr>
           </a:lstStyle>
           <a:p>
             <a:r>
-              <a:rPr lang="en-US" smtClean="0"/>
+              <a:rPr lang="en-US"/>
               <a:t>Click to edit Master title style</a:t>
             </a:r>
-            <a:endParaRPr lang="en-US"/>
+            <a:endParaRPr lang="en-US" dirty="0"/>
           </a:p>
         </p:txBody>
       </p:sp>
@@ -2373,7 +2974,7 @@
         <p:nvSpPr>
           <p:cNvPr id="3" name="Picture Placeholder 2"/>
           <p:cNvSpPr>
-            <a:spLocks noGrp="1"/>
+            <a:spLocks noGrp="1" noChangeAspect="1"/>
           </p:cNvSpPr>
           <p:nvPr>
             <p:ph type="pic" idx="1"/>
@@ -2381,12 +2982,12 @@
         </p:nvSpPr>
         <p:spPr>
           <a:xfrm>
-            <a:off x="1792288" y="612775"/>
-            <a:ext cx="5486400" cy="4114800"/>
+            <a:off x="5183188" y="987425"/>
+            <a:ext cx="6172200" cy="4873625"/>
           </a:xfrm>
         </p:spPr>
         <p:txBody>
-          <a:bodyPr/>
+          <a:bodyPr anchor="t"/>
           <a:lstStyle>
             <a:lvl1pPr marL="0" indent="0">
               <a:buNone/>
@@ -2426,7 +3027,11 @@
             </a:lvl9pPr>
           </a:lstStyle>
           <a:p>
-            <a:endParaRPr lang="en-US"/>
+            <a:r>
+              <a:rPr lang="en-US"/>
+              <a:t>Click icon to add picture</a:t>
+            </a:r>
+            <a:endParaRPr lang="en-US" dirty="0"/>
           </a:p>
         </p:txBody>
       </p:sp>
@@ -2442,8 +3047,8 @@
         </p:nvSpPr>
         <p:spPr>
           <a:xfrm>
-            <a:off x="1792288" y="5367338"/>
-            <a:ext cx="5486400" cy="804862"/>
+            <a:off x="839788" y="2057400"/>
+            <a:ext cx="3932237" cy="3811588"/>
           </a:xfrm>
         </p:spPr>
         <p:txBody>
@@ -2451,68 +3056,68 @@
           <a:lstStyle>
             <a:lvl1pPr marL="0" indent="0">
               <a:buNone/>
-              <a:defRPr sz="1400"/>
+              <a:defRPr sz="1600"/>
             </a:lvl1pPr>
             <a:lvl2pPr marL="457200" indent="0">
               <a:buNone/>
-              <a:defRPr sz="1200"/>
+              <a:defRPr sz="1400"/>
             </a:lvl2pPr>
             <a:lvl3pPr marL="914400" indent="0">
               <a:buNone/>
-              <a:defRPr sz="1000"/>
+              <a:defRPr sz="1200"/>
             </a:lvl3pPr>
             <a:lvl4pPr marL="1371600" indent="0">
               <a:buNone/>
-              <a:defRPr sz="900"/>
+              <a:defRPr sz="1000"/>
             </a:lvl4pPr>
             <a:lvl5pPr marL="1828800" indent="0">
               <a:buNone/>
-              <a:defRPr sz="900"/>
+              <a:defRPr sz="1000"/>
             </a:lvl5pPr>
             <a:lvl6pPr marL="2286000" indent="0">
               <a:buNone/>
-              <a:defRPr sz="900"/>
+              <a:defRPr sz="1000"/>
             </a:lvl6pPr>
             <a:lvl7pPr marL="2743200" indent="0">
               <a:buNone/>
-              <a:defRPr sz="900"/>
+              <a:defRPr sz="1000"/>
             </a:lvl7pPr>
             <a:lvl8pPr marL="3200400" indent="0">
               <a:buNone/>
-              <a:defRPr sz="900"/>
+              <a:defRPr sz="1000"/>
             </a:lvl8pPr>
             <a:lvl9pPr marL="3657600" indent="0">
               <a:buNone/>
-              <a:defRPr sz="900"/>
+              <a:defRPr sz="1000"/>
             </a:lvl9pPr>
           </a:lstStyle>
           <a:p>
             <a:pPr lvl="0"/>
             <a:r>
+              <a:rPr lang="en-US"/>
+              <a:t>Edit Master text styles</a:t>
+            </a:r>
+          </a:p>
+        </p:txBody>
+      </p:sp>
+      <p:sp>
+        <p:nvSpPr>
+          <p:cNvPr id="5" name="Date Placeholder 4"/>
+          <p:cNvSpPr>
+            <a:spLocks noGrp="1"/>
+          </p:cNvSpPr>
+          <p:nvPr>
+            <p:ph type="dt" sz="half" idx="10"/>
+          </p:nvPr>
+        </p:nvSpPr>
+        <p:spPr/>
+        <p:txBody>
+          <a:bodyPr/>
+          <a:lstStyle/>
+          <a:p>
+            <a:fld id="{971C0534-AC82-40C9-9D5F-C772AE9BC3F8}" type="datetimeFigureOut">
               <a:rPr lang="en-US" smtClean="0"/>
-              <a:t>Click to edit Master text styles</a:t>
-            </a:r>
-          </a:p>
-        </p:txBody>
-      </p:sp>
-      <p:sp>
-        <p:nvSpPr>
-          <p:cNvPr id="5" name="Date Placeholder 4"/>
-          <p:cNvSpPr>
-            <a:spLocks noGrp="1"/>
-          </p:cNvSpPr>
-          <p:nvPr>
-            <p:ph type="dt" sz="half" idx="10"/>
-          </p:nvPr>
-        </p:nvSpPr>
-        <p:spPr/>
-        <p:txBody>
-          <a:bodyPr/>
-          <a:lstStyle/>
-          <a:p>
-            <a:fld id="{5BCAD085-E8A6-8845-BD4E-CB4CCA059FC4}" type="datetimeFigureOut">
-              <a:rPr lang="en-US" smtClean="0"/>
-              <a:t>1/27/13</a:t>
+              <a:t>2/8/2022</a:t>
             </a:fld>
             <a:endParaRPr lang="en-US"/>
           </a:p>
@@ -2552,7 +3157,7 @@
           <a:bodyPr/>
           <a:lstStyle/>
           <a:p>
-            <a:fld id="{C1FF6DA9-008F-8B48-92A6-B652298478BF}" type="slidenum">
+            <a:fld id="{A58BF1B2-8942-48EC-B5EF-B915FB58F230}" type="slidenum">
               <a:rPr lang="en-US" smtClean="0"/>
               <a:t>‹#›</a:t>
             </a:fld>
@@ -2563,7 +3168,7 @@
     </p:spTree>
     <p:extLst>
       <p:ext uri="{BB962C8B-B14F-4D97-AF65-F5344CB8AC3E}">
-        <p14:creationId xmlns:p14="http://schemas.microsoft.com/office/powerpoint/2010/main" val="3889236939"/>
+        <p14:creationId xmlns:p14="http://schemas.microsoft.com/office/powerpoint/2010/main" val="1364586832"/>
       </p:ext>
     </p:extLst>
   </p:cSld>
@@ -2607,8 +3212,8 @@
         </p:nvSpPr>
         <p:spPr>
           <a:xfrm>
-            <a:off x="457200" y="274638"/>
-            <a:ext cx="8229600" cy="1143000"/>
+            <a:off x="838200" y="365125"/>
+            <a:ext cx="10515600" cy="1325563"/>
           </a:xfrm>
           <a:prstGeom prst="rect">
             <a:avLst/>
@@ -2621,10 +3226,10 @@
           <a:lstStyle/>
           <a:p>
             <a:r>
-              <a:rPr lang="en-US" smtClean="0"/>
+              <a:rPr lang="en-US"/>
               <a:t>Click to edit Master title style</a:t>
             </a:r>
-            <a:endParaRPr lang="en-US"/>
+            <a:endParaRPr lang="en-US" dirty="0"/>
           </a:p>
         </p:txBody>
       </p:sp>
@@ -2640,8 +3245,8 @@
         </p:nvSpPr>
         <p:spPr>
           <a:xfrm>
-            <a:off x="457200" y="1600200"/>
-            <a:ext cx="8229600" cy="4525963"/>
+            <a:off x="838200" y="1825625"/>
+            <a:ext cx="10515600" cy="4351338"/>
           </a:xfrm>
           <a:prstGeom prst="rect">
             <a:avLst/>
@@ -2655,38 +3260,38 @@
           <a:p>
             <a:pPr lvl="0"/>
             <a:r>
-              <a:rPr lang="en-US" smtClean="0"/>
-              <a:t>Click to edit Master text styles</a:t>
+              <a:rPr lang="en-US"/>
+              <a:t>Edit Master text styles</a:t>
             </a:r>
           </a:p>
           <a:p>
             <a:pPr lvl="1"/>
             <a:r>
-              <a:rPr lang="en-US" smtClean="0"/>
+              <a:rPr lang="en-US"/>
               <a:t>Second level</a:t>
             </a:r>
           </a:p>
           <a:p>
             <a:pPr lvl="2"/>
             <a:r>
-              <a:rPr lang="en-US" smtClean="0"/>
+              <a:rPr lang="en-US"/>
               <a:t>Third level</a:t>
             </a:r>
           </a:p>
           <a:p>
             <a:pPr lvl="3"/>
             <a:r>
-              <a:rPr lang="en-US" smtClean="0"/>
+              <a:rPr lang="en-US"/>
               <a:t>Fourth level</a:t>
             </a:r>
           </a:p>
           <a:p>
             <a:pPr lvl="4"/>
             <a:r>
-              <a:rPr lang="en-US" smtClean="0"/>
+              <a:rPr lang="en-US"/>
               <a:t>Fifth level</a:t>
             </a:r>
-            <a:endParaRPr lang="en-US"/>
+            <a:endParaRPr lang="en-US" dirty="0"/>
           </a:p>
         </p:txBody>
       </p:sp>
@@ -2702,8 +3307,8 @@
         </p:nvSpPr>
         <p:spPr>
           <a:xfrm>
-            <a:off x="457200" y="6356350"/>
-            <a:ext cx="2133600" cy="365125"/>
+            <a:off x="838200" y="6356350"/>
+            <a:ext cx="2743200" cy="365125"/>
           </a:xfrm>
           <a:prstGeom prst="rect">
             <a:avLst/>
@@ -2723,9 +3328,9 @@
             </a:lvl1pPr>
           </a:lstStyle>
           <a:p>
-            <a:fld id="{5BCAD085-E8A6-8845-BD4E-CB4CCA059FC4}" type="datetimeFigureOut">
+            <a:fld id="{971C0534-AC82-40C9-9D5F-C772AE9BC3F8}" type="datetimeFigureOut">
               <a:rPr lang="en-US" smtClean="0"/>
-              <a:t>1/27/13</a:t>
+              <a:t>2/8/2022</a:t>
             </a:fld>
             <a:endParaRPr lang="en-US"/>
           </a:p>
@@ -2743,8 +3348,8 @@
         </p:nvSpPr>
         <p:spPr>
           <a:xfrm>
-            <a:off x="3124200" y="6356350"/>
-            <a:ext cx="2895600" cy="365125"/>
+            <a:off x="4038600" y="6356350"/>
+            <a:ext cx="4114800" cy="365125"/>
           </a:xfrm>
           <a:prstGeom prst="rect">
             <a:avLst/>
@@ -2780,8 +3385,8 @@
         </p:nvSpPr>
         <p:spPr>
           <a:xfrm>
-            <a:off x="6553200" y="6356350"/>
-            <a:ext cx="2133600" cy="365125"/>
+            <a:off x="8610600" y="6356350"/>
+            <a:ext cx="2743200" cy="365125"/>
           </a:xfrm>
           <a:prstGeom prst="rect">
             <a:avLst/>
@@ -2801,7 +3406,7 @@
             </a:lvl1pPr>
           </a:lstStyle>
           <a:p>
-            <a:fld id="{C1FF6DA9-008F-8B48-92A6-B652298478BF}" type="slidenum">
+            <a:fld id="{A58BF1B2-8942-48EC-B5EF-B915FB58F230}" type="slidenum">
               <a:rPr lang="en-US" smtClean="0"/>
               <a:t>‹#›</a:t>
             </a:fld>
@@ -2809,30 +3414,103 @@
           </a:p>
         </p:txBody>
       </p:sp>
+      <p:sp>
+        <p:nvSpPr>
+          <p:cNvPr id="7" name="hc" descr=" "/>
+          <p:cNvSpPr txBox="1"/>
+          <p:nvPr userDrawn="1"/>
+        </p:nvSpPr>
+        <p:spPr>
+          <a:xfrm>
+            <a:off x="0" y="0"/>
+            <a:ext cx="12192000" cy="223138"/>
+          </a:xfrm>
+          <a:prstGeom prst="rect">
+            <a:avLst/>
+          </a:prstGeom>
+          <a:noFill/>
+        </p:spPr>
+        <p:txBody>
+          <a:bodyPr vert="horz" rtlCol="0">
+            <a:spAutoFit/>
+          </a:bodyPr>
+          <a:lstStyle/>
+          <a:p>
+            <a:pPr algn="ctr"/>
+            <a:r>
+              <a:rPr lang="en-US" sz="850" b="0" i="0" u="none" baseline="0">
+                <a:solidFill>
+                  <a:srgbClr val="000000"/>
+                </a:solidFill>
+                <a:latin typeface="Microsoft Sans Serif" panose="020B0604020202020204" pitchFamily="34" charset="0"/>
+              </a:rPr>
+              <a:t> </a:t>
+            </a:r>
+          </a:p>
+        </p:txBody>
+      </p:sp>
+      <p:sp>
+        <p:nvSpPr>
+          <p:cNvPr id="8" name="fc" descr=" "/>
+          <p:cNvSpPr txBox="1"/>
+          <p:nvPr userDrawn="1"/>
+        </p:nvSpPr>
+        <p:spPr>
+          <a:xfrm>
+            <a:off x="0" y="6537960"/>
+            <a:ext cx="12192000" cy="223138"/>
+          </a:xfrm>
+          <a:prstGeom prst="rect">
+            <a:avLst/>
+          </a:prstGeom>
+          <a:noFill/>
+        </p:spPr>
+        <p:txBody>
+          <a:bodyPr vert="horz" rtlCol="0">
+            <a:spAutoFit/>
+          </a:bodyPr>
+          <a:lstStyle/>
+          <a:p>
+            <a:pPr algn="ctr"/>
+            <a:r>
+              <a:rPr lang="en-US" sz="850" b="0" i="0" u="none" baseline="0">
+                <a:solidFill>
+                  <a:srgbClr val="000000"/>
+                </a:solidFill>
+                <a:latin typeface="Microsoft Sans Serif" panose="020B0604020202020204" pitchFamily="34" charset="0"/>
+              </a:rPr>
+              <a:t> </a:t>
+            </a:r>
+          </a:p>
+        </p:txBody>
+      </p:sp>
     </p:spTree>
     <p:extLst>
       <p:ext uri="{BB962C8B-B14F-4D97-AF65-F5344CB8AC3E}">
-        <p14:creationId xmlns:p14="http://schemas.microsoft.com/office/powerpoint/2010/main" val="2209977519"/>
+        <p14:creationId xmlns:p14="http://schemas.microsoft.com/office/powerpoint/2010/main" val="839727141"/>
       </p:ext>
     </p:extLst>
   </p:cSld>
   <p:clrMap bg1="lt1" tx1="dk1" bg2="lt2" tx2="dk2" accent1="accent1" accent2="accent2" accent3="accent3" accent4="accent4" accent5="accent5" accent6="accent6" hlink="hlink" folHlink="folHlink"/>
   <p:sldLayoutIdLst>
-    <p:sldLayoutId id="2147483649" r:id="rId1"/>
-    <p:sldLayoutId id="2147483650" r:id="rId2"/>
-    <p:sldLayoutId id="2147483651" r:id="rId3"/>
-    <p:sldLayoutId id="2147483652" r:id="rId4"/>
-    <p:sldLayoutId id="2147483653" r:id="rId5"/>
-    <p:sldLayoutId id="2147483654" r:id="rId6"/>
-    <p:sldLayoutId id="2147483655" r:id="rId7"/>
-    <p:sldLayoutId id="2147483656" r:id="rId8"/>
-    <p:sldLayoutId id="2147483657" r:id="rId9"/>
-    <p:sldLayoutId id="2147483658" r:id="rId10"/>
-    <p:sldLayoutId id="2147483659" r:id="rId11"/>
+    <p:sldLayoutId id="2147483674" r:id="rId1"/>
+    <p:sldLayoutId id="2147483675" r:id="rId2"/>
+    <p:sldLayoutId id="2147483676" r:id="rId3"/>
+    <p:sldLayoutId id="2147483677" r:id="rId4"/>
+    <p:sldLayoutId id="2147483678" r:id="rId5"/>
+    <p:sldLayoutId id="2147483679" r:id="rId6"/>
+    <p:sldLayoutId id="2147483680" r:id="rId7"/>
+    <p:sldLayoutId id="2147483681" r:id="rId8"/>
+    <p:sldLayoutId id="2147483682" r:id="rId9"/>
+    <p:sldLayoutId id="2147483683" r:id="rId10"/>
+    <p:sldLayoutId id="2147483684" r:id="rId11"/>
   </p:sldLayoutIdLst>
   <p:txStyles>
     <p:titleStyle>
-      <a:lvl1pPr algn="ctr" defTabSz="457200" rtl="0" eaLnBrk="1" latinLnBrk="0" hangingPunct="1">
+      <a:lvl1pPr algn="l" defTabSz="914400" rtl="0" eaLnBrk="1" latinLnBrk="0" hangingPunct="1">
+        <a:lnSpc>
+          <a:spcPct val="90000"/>
+        </a:lnSpc>
         <a:spcBef>
           <a:spcPct val="0"/>
         </a:spcBef>
@@ -2848,13 +3526,16 @@
       </a:lvl1pPr>
     </p:titleStyle>
     <p:bodyStyle>
-      <a:lvl1pPr marL="342900" indent="-342900" algn="l" defTabSz="457200" rtl="0" eaLnBrk="1" latinLnBrk="0" hangingPunct="1">
+      <a:lvl1pPr marL="228600" indent="-228600" algn="l" defTabSz="914400" rtl="0" eaLnBrk="1" latinLnBrk="0" hangingPunct="1">
+        <a:lnSpc>
+          <a:spcPct val="90000"/>
+        </a:lnSpc>
         <a:spcBef>
-          <a:spcPct val="20000"/>
+          <a:spcPts val="1000"/>
         </a:spcBef>
-        <a:buFont typeface="Arial"/>
+        <a:buFont typeface="Arial" panose="020B0604020202020204" pitchFamily="34" charset="0"/>
         <a:buChar char="•"/>
-        <a:defRPr sz="3200" kern="1200">
+        <a:defRPr sz="2800" kern="1200">
           <a:solidFill>
             <a:schemeClr val="tx1"/>
           </a:solidFill>
@@ -2863,26 +3544,14 @@
           <a:cs typeface="+mn-cs"/>
         </a:defRPr>
       </a:lvl1pPr>
-      <a:lvl2pPr marL="742950" indent="-285750" algn="l" defTabSz="457200" rtl="0" eaLnBrk="1" latinLnBrk="0" hangingPunct="1">
+      <a:lvl2pPr marL="685800" indent="-228600" algn="l" defTabSz="914400" rtl="0" eaLnBrk="1" latinLnBrk="0" hangingPunct="1">
+        <a:lnSpc>
+          <a:spcPct val="90000"/>
+        </a:lnSpc>
         <a:spcBef>
-          <a:spcPct val="20000"/>
+          <a:spcPts val="500"/>
         </a:spcBef>
-        <a:buFont typeface="Arial"/>
-        <a:buChar char="–"/>
-        <a:defRPr sz="2800" kern="1200">
-          <a:solidFill>
-            <a:schemeClr val="tx1"/>
-          </a:solidFill>
-          <a:latin typeface="+mn-lt"/>
-          <a:ea typeface="+mn-ea"/>
-          <a:cs typeface="+mn-cs"/>
-        </a:defRPr>
-      </a:lvl2pPr>
-      <a:lvl3pPr marL="1143000" indent="-228600" algn="l" defTabSz="457200" rtl="0" eaLnBrk="1" latinLnBrk="0" hangingPunct="1">
-        <a:spcBef>
-          <a:spcPct val="20000"/>
-        </a:spcBef>
-        <a:buFont typeface="Arial"/>
+        <a:buFont typeface="Arial" panose="020B0604020202020204" pitchFamily="34" charset="0"/>
         <a:buChar char="•"/>
         <a:defRPr sz="2400" kern="1200">
           <a:solidFill>
@@ -2892,42 +3561,15 @@
           <a:ea typeface="+mn-ea"/>
           <a:cs typeface="+mn-cs"/>
         </a:defRPr>
-      </a:lvl3pPr>
-      <a:lvl4pPr marL="1600200" indent="-228600" algn="l" defTabSz="457200" rtl="0" eaLnBrk="1" latinLnBrk="0" hangingPunct="1">
+      </a:lvl2pPr>
+      <a:lvl3pPr marL="1143000" indent="-228600" algn="l" defTabSz="914400" rtl="0" eaLnBrk="1" latinLnBrk="0" hangingPunct="1">
+        <a:lnSpc>
+          <a:spcPct val="90000"/>
+        </a:lnSpc>
         <a:spcBef>
-          <a:spcPct val="20000"/>
+          <a:spcPts val="500"/>
         </a:spcBef>
-        <a:buFont typeface="Arial"/>
-        <a:buChar char="–"/>
-        <a:defRPr sz="2000" kern="1200">
-          <a:solidFill>
-            <a:schemeClr val="tx1"/>
-          </a:solidFill>
-          <a:latin typeface="+mn-lt"/>
-          <a:ea typeface="+mn-ea"/>
-          <a:cs typeface="+mn-cs"/>
-        </a:defRPr>
-      </a:lvl4pPr>
-      <a:lvl5pPr marL="2057400" indent="-228600" algn="l" defTabSz="457200" rtl="0" eaLnBrk="1" latinLnBrk="0" hangingPunct="1">
-        <a:spcBef>
-          <a:spcPct val="20000"/>
-        </a:spcBef>
-        <a:buFont typeface="Arial"/>
-        <a:buChar char="»"/>
-        <a:defRPr sz="2000" kern="1200">
-          <a:solidFill>
-            <a:schemeClr val="tx1"/>
-          </a:solidFill>
-          <a:latin typeface="+mn-lt"/>
-          <a:ea typeface="+mn-ea"/>
-          <a:cs typeface="+mn-cs"/>
-        </a:defRPr>
-      </a:lvl5pPr>
-      <a:lvl6pPr marL="2514600" indent="-228600" algn="l" defTabSz="457200" rtl="0" eaLnBrk="1" latinLnBrk="0" hangingPunct="1">
-        <a:spcBef>
-          <a:spcPct val="20000"/>
-        </a:spcBef>
-        <a:buFont typeface="Arial"/>
+        <a:buFont typeface="Arial" panose="020B0604020202020204" pitchFamily="34" charset="0"/>
         <a:buChar char="•"/>
         <a:defRPr sz="2000" kern="1200">
           <a:solidFill>
@@ -2937,14 +3579,71 @@
           <a:ea typeface="+mn-ea"/>
           <a:cs typeface="+mn-cs"/>
         </a:defRPr>
+      </a:lvl3pPr>
+      <a:lvl4pPr marL="1600200" indent="-228600" algn="l" defTabSz="914400" rtl="0" eaLnBrk="1" latinLnBrk="0" hangingPunct="1">
+        <a:lnSpc>
+          <a:spcPct val="90000"/>
+        </a:lnSpc>
+        <a:spcBef>
+          <a:spcPts val="500"/>
+        </a:spcBef>
+        <a:buFont typeface="Arial" panose="020B0604020202020204" pitchFamily="34" charset="0"/>
+        <a:buChar char="•"/>
+        <a:defRPr sz="1800" kern="1200">
+          <a:solidFill>
+            <a:schemeClr val="tx1"/>
+          </a:solidFill>
+          <a:latin typeface="+mn-lt"/>
+          <a:ea typeface="+mn-ea"/>
+          <a:cs typeface="+mn-cs"/>
+        </a:defRPr>
+      </a:lvl4pPr>
+      <a:lvl5pPr marL="2057400" indent="-228600" algn="l" defTabSz="914400" rtl="0" eaLnBrk="1" latinLnBrk="0" hangingPunct="1">
+        <a:lnSpc>
+          <a:spcPct val="90000"/>
+        </a:lnSpc>
+        <a:spcBef>
+          <a:spcPts val="500"/>
+        </a:spcBef>
+        <a:buFont typeface="Arial" panose="020B0604020202020204" pitchFamily="34" charset="0"/>
+        <a:buChar char="•"/>
+        <a:defRPr sz="1800" kern="1200">
+          <a:solidFill>
+            <a:schemeClr val="tx1"/>
+          </a:solidFill>
+          <a:latin typeface="+mn-lt"/>
+          <a:ea typeface="+mn-ea"/>
+          <a:cs typeface="+mn-cs"/>
+        </a:defRPr>
+      </a:lvl5pPr>
+      <a:lvl6pPr marL="2514600" indent="-228600" algn="l" defTabSz="914400" rtl="0" eaLnBrk="1" latinLnBrk="0" hangingPunct="1">
+        <a:lnSpc>
+          <a:spcPct val="90000"/>
+        </a:lnSpc>
+        <a:spcBef>
+          <a:spcPts val="500"/>
+        </a:spcBef>
+        <a:buFont typeface="Arial" panose="020B0604020202020204" pitchFamily="34" charset="0"/>
+        <a:buChar char="•"/>
+        <a:defRPr sz="1800" kern="1200">
+          <a:solidFill>
+            <a:schemeClr val="tx1"/>
+          </a:solidFill>
+          <a:latin typeface="+mn-lt"/>
+          <a:ea typeface="+mn-ea"/>
+          <a:cs typeface="+mn-cs"/>
+        </a:defRPr>
       </a:lvl6pPr>
-      <a:lvl7pPr marL="2971800" indent="-228600" algn="l" defTabSz="457200" rtl="0" eaLnBrk="1" latinLnBrk="0" hangingPunct="1">
+      <a:lvl7pPr marL="2971800" indent="-228600" algn="l" defTabSz="914400" rtl="0" eaLnBrk="1" latinLnBrk="0" hangingPunct="1">
+        <a:lnSpc>
+          <a:spcPct val="90000"/>
+        </a:lnSpc>
         <a:spcBef>
-          <a:spcPct val="20000"/>
+          <a:spcPts val="500"/>
         </a:spcBef>
-        <a:buFont typeface="Arial"/>
+        <a:buFont typeface="Arial" panose="020B0604020202020204" pitchFamily="34" charset="0"/>
         <a:buChar char="•"/>
-        <a:defRPr sz="2000" kern="1200">
+        <a:defRPr sz="1800" kern="1200">
           <a:solidFill>
             <a:schemeClr val="tx1"/>
           </a:solidFill>
@@ -2953,13 +3652,16 @@
           <a:cs typeface="+mn-cs"/>
         </a:defRPr>
       </a:lvl7pPr>
-      <a:lvl8pPr marL="3429000" indent="-228600" algn="l" defTabSz="457200" rtl="0" eaLnBrk="1" latinLnBrk="0" hangingPunct="1">
+      <a:lvl8pPr marL="3429000" indent="-228600" algn="l" defTabSz="914400" rtl="0" eaLnBrk="1" latinLnBrk="0" hangingPunct="1">
+        <a:lnSpc>
+          <a:spcPct val="90000"/>
+        </a:lnSpc>
         <a:spcBef>
-          <a:spcPct val="20000"/>
+          <a:spcPts val="500"/>
         </a:spcBef>
-        <a:buFont typeface="Arial"/>
+        <a:buFont typeface="Arial" panose="020B0604020202020204" pitchFamily="34" charset="0"/>
         <a:buChar char="•"/>
-        <a:defRPr sz="2000" kern="1200">
+        <a:defRPr sz="1800" kern="1200">
           <a:solidFill>
             <a:schemeClr val="tx1"/>
           </a:solidFill>
@@ -2968,13 +3670,16 @@
           <a:cs typeface="+mn-cs"/>
         </a:defRPr>
       </a:lvl8pPr>
-      <a:lvl9pPr marL="3886200" indent="-228600" algn="l" defTabSz="457200" rtl="0" eaLnBrk="1" latinLnBrk="0" hangingPunct="1">
+      <a:lvl9pPr marL="3886200" indent="-228600" algn="l" defTabSz="914400" rtl="0" eaLnBrk="1" latinLnBrk="0" hangingPunct="1">
+        <a:lnSpc>
+          <a:spcPct val="90000"/>
+        </a:lnSpc>
         <a:spcBef>
-          <a:spcPct val="20000"/>
+          <a:spcPts val="500"/>
         </a:spcBef>
-        <a:buFont typeface="Arial"/>
+        <a:buFont typeface="Arial" panose="020B0604020202020204" pitchFamily="34" charset="0"/>
         <a:buChar char="•"/>
-        <a:defRPr sz="2000" kern="1200">
+        <a:defRPr sz="1800" kern="1200">
           <a:solidFill>
             <a:schemeClr val="tx1"/>
           </a:solidFill>
@@ -2988,7 +3693,7 @@
       <a:defPPr>
         <a:defRPr lang="en-US"/>
       </a:defPPr>
-      <a:lvl1pPr marL="0" algn="l" defTabSz="457200" rtl="0" eaLnBrk="1" latinLnBrk="0" hangingPunct="1">
+      <a:lvl1pPr marL="0" algn="l" defTabSz="914400" rtl="0" eaLnBrk="1" latinLnBrk="0" hangingPunct="1">
         <a:defRPr sz="1800" kern="1200">
           <a:solidFill>
             <a:schemeClr val="tx1"/>
@@ -2998,7 +3703,7 @@
           <a:cs typeface="+mn-cs"/>
         </a:defRPr>
       </a:lvl1pPr>
-      <a:lvl2pPr marL="457200" algn="l" defTabSz="457200" rtl="0" eaLnBrk="1" latinLnBrk="0" hangingPunct="1">
+      <a:lvl2pPr marL="457200" algn="l" defTabSz="914400" rtl="0" eaLnBrk="1" latinLnBrk="0" hangingPunct="1">
         <a:defRPr sz="1800" kern="1200">
           <a:solidFill>
             <a:schemeClr val="tx1"/>
@@ -3008,7 +3713,7 @@
           <a:cs typeface="+mn-cs"/>
         </a:defRPr>
       </a:lvl2pPr>
-      <a:lvl3pPr marL="914400" algn="l" defTabSz="457200" rtl="0" eaLnBrk="1" latinLnBrk="0" hangingPunct="1">
+      <a:lvl3pPr marL="914400" algn="l" defTabSz="914400" rtl="0" eaLnBrk="1" latinLnBrk="0" hangingPunct="1">
         <a:defRPr sz="1800" kern="1200">
           <a:solidFill>
             <a:schemeClr val="tx1"/>
@@ -3018,7 +3723,7 @@
           <a:cs typeface="+mn-cs"/>
         </a:defRPr>
       </a:lvl3pPr>
-      <a:lvl4pPr marL="1371600" algn="l" defTabSz="457200" rtl="0" eaLnBrk="1" latinLnBrk="0" hangingPunct="1">
+      <a:lvl4pPr marL="1371600" algn="l" defTabSz="914400" rtl="0" eaLnBrk="1" latinLnBrk="0" hangingPunct="1">
         <a:defRPr sz="1800" kern="1200">
           <a:solidFill>
             <a:schemeClr val="tx1"/>
@@ -3028,7 +3733,7 @@
           <a:cs typeface="+mn-cs"/>
         </a:defRPr>
       </a:lvl4pPr>
-      <a:lvl5pPr marL="1828800" algn="l" defTabSz="457200" rtl="0" eaLnBrk="1" latinLnBrk="0" hangingPunct="1">
+      <a:lvl5pPr marL="1828800" algn="l" defTabSz="914400" rtl="0" eaLnBrk="1" latinLnBrk="0" hangingPunct="1">
         <a:defRPr sz="1800" kern="1200">
           <a:solidFill>
             <a:schemeClr val="tx1"/>
@@ -3038,7 +3743,7 @@
           <a:cs typeface="+mn-cs"/>
         </a:defRPr>
       </a:lvl5pPr>
-      <a:lvl6pPr marL="2286000" algn="l" defTabSz="457200" rtl="0" eaLnBrk="1" latinLnBrk="0" hangingPunct="1">
+      <a:lvl6pPr marL="2286000" algn="l" defTabSz="914400" rtl="0" eaLnBrk="1" latinLnBrk="0" hangingPunct="1">
         <a:defRPr sz="1800" kern="1200">
           <a:solidFill>
             <a:schemeClr val="tx1"/>
@@ -3048,7 +3753,7 @@
           <a:cs typeface="+mn-cs"/>
         </a:defRPr>
       </a:lvl6pPr>
-      <a:lvl7pPr marL="2743200" algn="l" defTabSz="457200" rtl="0" eaLnBrk="1" latinLnBrk="0" hangingPunct="1">
+      <a:lvl7pPr marL="2743200" algn="l" defTabSz="914400" rtl="0" eaLnBrk="1" latinLnBrk="0" hangingPunct="1">
         <a:defRPr sz="1800" kern="1200">
           <a:solidFill>
             <a:schemeClr val="tx1"/>
@@ -3058,7 +3763,7 @@
           <a:cs typeface="+mn-cs"/>
         </a:defRPr>
       </a:lvl7pPr>
-      <a:lvl8pPr marL="3200400" algn="l" defTabSz="457200" rtl="0" eaLnBrk="1" latinLnBrk="0" hangingPunct="1">
+      <a:lvl8pPr marL="3200400" algn="l" defTabSz="914400" rtl="0" eaLnBrk="1" latinLnBrk="0" hangingPunct="1">
         <a:defRPr sz="1800" kern="1200">
           <a:solidFill>
             <a:schemeClr val="tx1"/>
@@ -3068,7 +3773,7 @@
           <a:cs typeface="+mn-cs"/>
         </a:defRPr>
       </a:lvl8pPr>
-      <a:lvl9pPr marL="3657600" algn="l" defTabSz="457200" rtl="0" eaLnBrk="1" latinLnBrk="0" hangingPunct="1">
+      <a:lvl9pPr marL="3657600" algn="l" defTabSz="914400" rtl="0" eaLnBrk="1" latinLnBrk="0" hangingPunct="1">
         <a:defRPr sz="1800" kern="1200">
           <a:solidFill>
             <a:schemeClr val="tx1"/>
@@ -3093,128 +3798,92 @@
         <p:nvPr/>
       </p:nvGrpSpPr>
       <p:grpSpPr/>
-      <p:pic>
-        <p:nvPicPr>
-          <p:cNvPr id="2" name="Picture 1" descr="image2.jpeg"/>
-          <p:cNvPicPr>
-            <a:picLocks noChangeAspect="1"/>
-          </p:cNvPicPr>
-          <p:nvPr/>
-        </p:nvPicPr>
-        <p:blipFill>
-          <a:blip r:embed="rId2"/>
-          <a:stretch>
-            <a:fillRect/>
-          </a:stretch>
-        </p:blipFill>
+      <p:sp>
+        <p:nvSpPr>
+          <p:cNvPr id="2" name="Title 1"/>
+          <p:cNvSpPr>
+            <a:spLocks noGrp="1"/>
+          </p:cNvSpPr>
+          <p:nvPr>
+            <p:ph type="ctrTitle"/>
+          </p:nvPr>
+        </p:nvSpPr>
         <p:spPr>
           <a:xfrm>
-            <a:off x="73820" y="6096269"/>
-            <a:ext cx="648692" cy="694793"/>
+            <a:off x="1524030" y="1788292"/>
+            <a:ext cx="9144000" cy="2387590"/>
+          </a:xfrm>
+        </p:spPr>
+        <p:txBody>
+          <a:bodyPr>
+            <a:normAutofit fontScale="90000"/>
+          </a:bodyPr>
+          <a:lstStyle/>
+          <a:p>
+            <a:r>
+              <a:t>Chesterton Academy</a:t>
+            </a:r>
+            <a:br/>
+            <a:r>
+              <a:t>Emergency Communication Options</a:t>
+            </a:r>
+          </a:p>
+        </p:txBody>
+      </p:sp>
+      <p:sp>
+        <p:nvSpPr>
+          <p:cNvPr id="3" name="Subtitle 2"/>
+          <p:cNvSpPr>
+            <a:spLocks noGrp="1"/>
+          </p:cNvSpPr>
+          <p:nvPr>
+            <p:ph type="subTitle" idx="1"/>
+          </p:nvPr>
+        </p:nvSpPr>
+        <p:spPr/>
+        <p:txBody>
+          <a:bodyPr/>
+          <a:lstStyle/>
+          <a:p/>
+        </p:txBody>
+      </p:sp>
+      <p:sp>
+        <p:nvSpPr>
+          <p:cNvPr id="4" name="TextBox 3"/>
+          <p:cNvSpPr txBox="1"/>
+          <p:nvPr/>
+        </p:nvSpPr>
+        <p:spPr>
+          <a:xfrm>
+            <a:off x="3756538" y="4421489"/>
+            <a:ext cx="3944995" cy="831006"/>
           </a:xfrm>
           <a:prstGeom prst="rect">
             <a:avLst/>
           </a:prstGeom>
+          <a:noFill/>
         </p:spPr>
-      </p:pic>
-      <p:pic>
-        <p:nvPicPr>
-          <p:cNvPr id="3" name="Picture 2" descr="image3.jpg"/>
-          <p:cNvPicPr>
-            <a:picLocks noChangeAspect="1"/>
-          </p:cNvPicPr>
-          <p:nvPr/>
-        </p:nvPicPr>
-        <p:blipFill>
-          <a:blip r:embed="rId3"/>
-          <a:stretch>
-            <a:fillRect/>
-          </a:stretch>
-        </p:blipFill>
-        <p:spPr>
-          <a:xfrm>
-            <a:off x="11000831" y="82217"/>
-            <a:ext cx="1097280" cy="1067079"/>
-          </a:xfrm>
-          <a:prstGeom prst="rect">
-            <a:avLst/>
-          </a:prstGeom>
-        </p:spPr>
-      </p:pic>
-      <p:sp>
-        <p:nvSpPr>
-          <p:cNvPr id="4" name="Rectangle 3"/>
-          <p:cNvSpPr/>
-          <p:nvPr/>
-        </p:nvSpPr>
-        <p:spPr>
-          <a:xfrm>
-            <a:off x="1524000" y="1788284"/>
-            <a:ext cx="9144000" cy="2387600"/>
-          </a:xfrm>
-          <a:prstGeom prst="rect">
-            <a:avLst/>
-          </a:prstGeom>
-        </p:spPr>
-        <p:style>
-          <a:lnRef idx="1">
-            <a:schemeClr val="accent1"/>
-          </a:lnRef>
-          <a:fillRef idx="3">
-            <a:schemeClr val="accent1"/>
-          </a:fillRef>
-          <a:effectRef idx="2">
-            <a:schemeClr val="accent1"/>
-          </a:effectRef>
-          <a:fontRef idx="minor">
-            <a:schemeClr val="lt1"/>
-          </a:fontRef>
-        </p:style>
-        <p:txBody>
-          <a:bodyPr rtlCol="0" anchor="ctr"/>
-          <a:lstStyle/>
-          <a:p>
-            <a:r>
-              <a:t>Chesterton AcademyEmergency Communication Options</a:t>
-            </a:r>
-          </a:p>
-        </p:txBody>
-      </p:sp>
-      <p:sp>
-        <p:nvSpPr>
-          <p:cNvPr id="5" name="Rectangle 4"/>
-          <p:cNvSpPr/>
-          <p:nvPr/>
-        </p:nvSpPr>
-        <p:spPr>
-          <a:xfrm>
-            <a:off x="3756572" y="4421505"/>
-            <a:ext cx="3944994" cy="830997"/>
-          </a:xfrm>
-          <a:prstGeom prst="rect">
-            <a:avLst/>
-          </a:prstGeom>
-        </p:spPr>
-        <p:style>
-          <a:lnRef idx="1">
-            <a:schemeClr val="accent1"/>
-          </a:lnRef>
-          <a:fillRef idx="3">
-            <a:schemeClr val="accent1"/>
-          </a:fillRef>
-          <a:effectRef idx="2">
-            <a:schemeClr val="accent1"/>
-          </a:effectRef>
-          <a:fontRef idx="minor">
-            <a:schemeClr val="lt1"/>
-          </a:fontRef>
-        </p:style>
-        <p:txBody>
-          <a:bodyPr rtlCol="0" anchor="ctr"/>
-          <a:lstStyle/>
-          <a:p>
-            <a:r>
-              <a:t>Douglas CoombsFebruary 8, 2022</a:t>
+        <p:txBody>
+          <a:bodyPr wrap="square">
+            <a:spAutoFit/>
+          </a:bodyPr>
+          <a:lstStyle/>
+          <a:p>
+            <a:pPr lvl="0" algn="ctr">
+              <a:buNone/>
+            </a:pPr>
+            <a:r>
+              <a:rPr sz="2400"/>
+              <a:t>Douglas Coombs</a:t>
+            </a:r>
+          </a:p>
+          <a:p>
+            <a:pPr lvl="0" algn="ctr">
+              <a:buNone/>
+            </a:pPr>
+            <a:r>
+              <a:rPr sz="2400"/>
+              <a:t>February 8, 2022</a:t>
             </a:r>
           </a:p>
         </p:txBody>
@@ -3239,78 +3908,112 @@
       <p:grpSpPr/>
       <p:sp>
         <p:nvSpPr>
-          <p:cNvPr id="2" name="Rectangle 1"/>
-          <p:cNvSpPr/>
-          <p:nvPr/>
+          <p:cNvPr id="2" name="Title 1"/>
+          <p:cNvSpPr>
+            <a:spLocks noGrp="1"/>
+          </p:cNvSpPr>
+          <p:nvPr>
+            <p:ph type="title"/>
+          </p:nvPr>
+        </p:nvSpPr>
+        <p:spPr/>
+        <p:txBody>
+          <a:bodyPr>
+            <a:normAutofit/>
+          </a:bodyPr>
+          <a:lstStyle/>
+          <a:p>
+            <a:r>
+              <a:t>Overview of Options</a:t>
+            </a:r>
+          </a:p>
+        </p:txBody>
+      </p:sp>
+      <p:sp>
+        <p:nvSpPr>
+          <p:cNvPr id="3" name="Content Placeholder 2"/>
+          <p:cNvSpPr>
+            <a:spLocks noGrp="1"/>
+          </p:cNvSpPr>
+          <p:nvPr>
+            <p:ph type="obj" idx="1"/>
+          </p:nvPr>
         </p:nvSpPr>
         <p:spPr>
           <a:xfrm>
-            <a:off x="493095" y="1227"/>
-            <a:ext cx="10515600" cy="1067080"/>
+            <a:off x="493136" y="1132759"/>
+            <a:ext cx="11471422" cy="5055992"/>
           </a:xfrm>
-          <a:prstGeom prst="rect">
-            <a:avLst/>
-          </a:prstGeom>
         </p:spPr>
-        <p:style>
-          <a:lnRef idx="1">
-            <a:schemeClr val="accent1"/>
-          </a:lnRef>
-          <a:fillRef idx="3">
-            <a:schemeClr val="accent1"/>
-          </a:fillRef>
-          <a:effectRef idx="2">
-            <a:schemeClr val="accent1"/>
-          </a:effectRef>
-          <a:fontRef idx="minor">
-            <a:schemeClr val="lt1"/>
-          </a:fontRef>
-        </p:style>
-        <p:txBody>
-          <a:bodyPr rtlCol="0" anchor="ctr"/>
-          <a:lstStyle/>
-          <a:p>
-            <a:r>
-              <a:t>Overview of Options</a:t>
-            </a:r>
-          </a:p>
-        </p:txBody>
-      </p:sp>
-      <p:sp>
-        <p:nvSpPr>
-          <p:cNvPr id="3" name="Rectangle 2"/>
-          <p:cNvSpPr/>
-          <p:nvPr/>
-        </p:nvSpPr>
-        <p:spPr>
-          <a:xfrm>
-            <a:off x="493094" y="1132764"/>
-            <a:ext cx="11471379" cy="5056001"/>
-          </a:xfrm>
-          <a:prstGeom prst="rect">
-            <a:avLst/>
-          </a:prstGeom>
-        </p:spPr>
-        <p:style>
-          <a:lnRef idx="1">
-            <a:schemeClr val="accent1"/>
-          </a:lnRef>
-          <a:fillRef idx="3">
-            <a:schemeClr val="accent1"/>
-          </a:fillRef>
-          <a:effectRef idx="2">
-            <a:schemeClr val="accent1"/>
-          </a:effectRef>
-          <a:fontRef idx="minor">
-            <a:schemeClr val="lt1"/>
-          </a:fontRef>
-        </p:style>
-        <p:txBody>
-          <a:bodyPr rtlCol="0" anchor="ctr"/>
-          <a:lstStyle/>
-          <a:p>
-            <a:r>
-              <a:t>Comprehensive Email and Texting ProgramsJupiterEdPotentially cheapest and easiest to set upFlocknotesMuch more flexible but also more expensive and time consuming to set upStandalone Texting SolutionsExpertTexting.comSeems straightforward with intuitive user interfaceOffers two-way texting with parents, if desiredPer text pricing makes it more attractive for infrequent, emergency useTextEmAll.com</a:t>
+        <p:txBody>
+          <a:bodyPr wrap="square">
+            <a:normAutofit/>
+          </a:bodyPr>
+          <a:lstStyle/>
+          <a:p>
+            <a:pPr lvl="0"/>
+            <a:r>
+              <a:t>Comprehensive Email and Texting Programs</a:t>
+            </a:r>
+          </a:p>
+          <a:p>
+            <a:pPr lvl="1"/>
+            <a:r>
+              <a:t>JupiterEd</a:t>
+            </a:r>
+          </a:p>
+          <a:p>
+            <a:pPr lvl="2"/>
+            <a:r>
+              <a:t>Potentially cheapest and easiest to set up</a:t>
+            </a:r>
+          </a:p>
+          <a:p>
+            <a:pPr lvl="1"/>
+            <a:r>
+              <a:t>Flocknotes</a:t>
+            </a:r>
+          </a:p>
+          <a:p>
+            <a:pPr lvl="2"/>
+            <a:r>
+              <a:t>Much more flexible but also more expensive and time consuming to set up</a:t>
+            </a:r>
+          </a:p>
+          <a:p>
+            <a:pPr lvl="0"/>
+            <a:r>
+              <a:t>Standalone Texting Solutions</a:t>
+            </a:r>
+          </a:p>
+          <a:p>
+            <a:pPr lvl="1"/>
+            <a:r>
+              <a:t>ExpertTexting.com</a:t>
+            </a:r>
+          </a:p>
+          <a:p>
+            <a:pPr lvl="2"/>
+            <a:r>
+              <a:t>Seems straightforward with intuitive user interface</a:t>
+            </a:r>
+          </a:p>
+          <a:p>
+            <a:pPr lvl="2"/>
+            <a:r>
+              <a:t>Offers two-way texting with parents, if desired</a:t>
+            </a:r>
+          </a:p>
+          <a:p>
+            <a:pPr lvl="2"/>
+            <a:r>
+              <a:t>Per text pricing makes it more attractive for infrequent, emergency use</a:t>
+            </a:r>
+          </a:p>
+          <a:p>
+            <a:pPr lvl="1"/>
+            <a:r>
+              <a:t>TextEmAll.com</a:t>
             </a:r>
           </a:p>
         </p:txBody>
@@ -3335,78 +4038,64 @@
       <p:grpSpPr/>
       <p:sp>
         <p:nvSpPr>
-          <p:cNvPr id="2" name="Rectangle 1"/>
-          <p:cNvSpPr/>
-          <p:nvPr/>
+          <p:cNvPr id="2" name="Title 1"/>
+          <p:cNvSpPr>
+            <a:spLocks noGrp="1"/>
+          </p:cNvSpPr>
+          <p:nvPr>
+            <p:ph type="title"/>
+          </p:nvPr>
+        </p:nvSpPr>
+        <p:spPr/>
+        <p:txBody>
+          <a:bodyPr>
+            <a:normAutofit/>
+          </a:bodyPr>
+          <a:lstStyle/>
+          <a:p>
+            <a:r>
+              <a:t>JupiterEd.com</a:t>
+            </a:r>
+          </a:p>
+        </p:txBody>
+      </p:sp>
+      <p:sp>
+        <p:nvSpPr>
+          <p:cNvPr id="3" name="Content Placeholder 2"/>
+          <p:cNvSpPr>
+            <a:spLocks noGrp="1"/>
+          </p:cNvSpPr>
+          <p:nvPr>
+            <p:ph type="obj" idx="1"/>
+          </p:nvPr>
         </p:nvSpPr>
         <p:spPr>
           <a:xfrm>
-            <a:off x="493095" y="1227"/>
-            <a:ext cx="10515600" cy="1067080"/>
+            <a:off x="493136" y="1132759"/>
+            <a:ext cx="10717408" cy="5055992"/>
           </a:xfrm>
-          <a:prstGeom prst="rect">
-            <a:avLst/>
-          </a:prstGeom>
         </p:spPr>
-        <p:style>
-          <a:lnRef idx="1">
-            <a:schemeClr val="accent1"/>
-          </a:lnRef>
-          <a:fillRef idx="3">
-            <a:schemeClr val="accent1"/>
-          </a:fillRef>
-          <a:effectRef idx="2">
-            <a:schemeClr val="accent1"/>
-          </a:effectRef>
-          <a:fontRef idx="minor">
-            <a:schemeClr val="lt1"/>
-          </a:fontRef>
-        </p:style>
-        <p:txBody>
-          <a:bodyPr rtlCol="0" anchor="ctr"/>
-          <a:lstStyle/>
-          <a:p>
-            <a:r>
-              <a:t>JupiterEd.com</a:t>
-            </a:r>
-          </a:p>
-        </p:txBody>
-      </p:sp>
-      <p:sp>
-        <p:nvSpPr>
-          <p:cNvPr id="3" name="Rectangle 2"/>
-          <p:cNvSpPr/>
-          <p:nvPr/>
-        </p:nvSpPr>
-        <p:spPr>
-          <a:xfrm>
-            <a:off x="493094" y="1132764"/>
-            <a:ext cx="10717449" cy="5056001"/>
-          </a:xfrm>
-          <a:prstGeom prst="rect">
-            <a:avLst/>
-          </a:prstGeom>
-        </p:spPr>
-        <p:style>
-          <a:lnRef idx="1">
-            <a:schemeClr val="accent1"/>
-          </a:lnRef>
-          <a:fillRef idx="3">
-            <a:schemeClr val="accent1"/>
-          </a:fillRef>
-          <a:effectRef idx="2">
-            <a:schemeClr val="accent1"/>
-          </a:effectRef>
-          <a:fontRef idx="minor">
-            <a:schemeClr val="lt1"/>
-          </a:fontRef>
-        </p:style>
-        <p:txBody>
-          <a:bodyPr rtlCol="0" anchor="ctr"/>
-          <a:lstStyle/>
-          <a:p>
-            <a:r>
-              <a:t>Parents need to login to JupiterEd and opt-in to emergency texting serviceAnother option would be to use non-emergency text messages for weather announcements, but these can get lost as they are common</a:t>
+        <p:txBody>
+          <a:bodyPr wrap="square">
+            <a:normAutofit/>
+          </a:bodyPr>
+          <a:lstStyle/>
+          <a:p>
+            <a:pPr lvl="0"/>
+            <a:r>
+              <a:t>Parents need to login to </a:t>
+            </a:r>
+            <a:r>
+              <a:t>JupiterEd</a:t>
+            </a:r>
+            <a:r>
+              <a:t> and opt-in to emergency texting service</a:t>
+            </a:r>
+          </a:p>
+          <a:p>
+            <a:pPr lvl="1"/>
+            <a:r>
+              <a:t>Another option would be to use non-emergency text messages for weather announcements, but these can get lost as they are common</a:t>
             </a:r>
           </a:p>
         </p:txBody>
@@ -3431,35 +4120,17 @@
       <p:grpSpPr/>
       <p:sp>
         <p:nvSpPr>
-          <p:cNvPr id="2" name="Rectangle 1"/>
-          <p:cNvSpPr/>
-          <p:nvPr/>
-        </p:nvSpPr>
-        <p:spPr>
-          <a:xfrm>
-            <a:off x="493095" y="1227"/>
-            <a:ext cx="10515600" cy="1067080"/>
-          </a:xfrm>
-          <a:prstGeom prst="rect">
-            <a:avLst/>
-          </a:prstGeom>
-        </p:spPr>
-        <p:style>
-          <a:lnRef idx="1">
-            <a:schemeClr val="accent1"/>
-          </a:lnRef>
-          <a:fillRef idx="3">
-            <a:schemeClr val="accent1"/>
-          </a:fillRef>
-          <a:effectRef idx="2">
-            <a:schemeClr val="accent1"/>
-          </a:effectRef>
-          <a:fontRef idx="minor">
-            <a:schemeClr val="lt1"/>
-          </a:fontRef>
-        </p:style>
-        <p:txBody>
-          <a:bodyPr rtlCol="0" anchor="ctr"/>
+          <p:cNvPr id="2" name="Title 1"/>
+          <p:cNvSpPr>
+            <a:spLocks noGrp="1"/>
+          </p:cNvSpPr>
+          <p:nvPr>
+            <p:ph type="title"/>
+          </p:nvPr>
+        </p:nvSpPr>
+        <p:spPr/>
+        <p:txBody>
+          <a:bodyPr/>
           <a:lstStyle/>
           <a:p>
             <a:r>
@@ -3470,39 +4141,34 @@
       </p:sp>
       <p:sp>
         <p:nvSpPr>
-          <p:cNvPr id="3" name="Rectangle 2"/>
-          <p:cNvSpPr/>
-          <p:nvPr/>
-        </p:nvSpPr>
-        <p:spPr>
-          <a:xfrm>
-            <a:off x="493095" y="1190542"/>
-            <a:ext cx="11243092" cy="4848274"/>
-          </a:xfrm>
-          <a:prstGeom prst="rect">
-            <a:avLst/>
-          </a:prstGeom>
-        </p:spPr>
-        <p:style>
-          <a:lnRef idx="1">
-            <a:schemeClr val="accent1"/>
-          </a:lnRef>
-          <a:fillRef idx="3">
-            <a:schemeClr val="accent1"/>
-          </a:fillRef>
-          <a:effectRef idx="2">
-            <a:schemeClr val="accent1"/>
-          </a:effectRef>
-          <a:fontRef idx="minor">
-            <a:schemeClr val="lt1"/>
-          </a:fontRef>
-        </p:style>
-        <p:txBody>
-          <a:bodyPr rtlCol="0" anchor="ctr"/>
-          <a:lstStyle/>
-          <a:p>
-            <a:r>
-              <a:t>Comprehensive email and texting serviceMrs. Sena is familiar with the serviceMore expensive at ~</a:t>
+          <p:cNvPr id="3" name="Content Placeholder 2"/>
+          <p:cNvSpPr>
+            <a:spLocks noGrp="1"/>
+          </p:cNvSpPr>
+          <p:nvPr>
+            <p:ph type="obj" idx="1"/>
+          </p:nvPr>
+        </p:nvSpPr>
+        <p:spPr/>
+        <p:txBody>
+          <a:bodyPr wrap="square"/>
+          <a:lstStyle/>
+          <a:p>
+            <a:pPr lvl="0"/>
+            <a:r>
+              <a:t>Comprehensive email and texting service</a:t>
+            </a:r>
+          </a:p>
+          <a:p>
+            <a:pPr lvl="0"/>
+            <a:r>
+              <a:t>Mrs. Sena is familiar with the service</a:t>
+            </a:r>
+          </a:p>
+          <a:p>
+            <a:pPr lvl="0"/>
+            <a:r>
+              <a:t>More expensive at ~</a:t>
             </a:r>
           </a:p>
         </p:txBody>
@@ -3527,35 +4193,17 @@
       <p:grpSpPr/>
       <p:sp>
         <p:nvSpPr>
-          <p:cNvPr id="2" name="Rectangle 1"/>
-          <p:cNvSpPr/>
-          <p:nvPr/>
-        </p:nvSpPr>
-        <p:spPr>
-          <a:xfrm>
-            <a:off x="493095" y="1227"/>
-            <a:ext cx="10515600" cy="1067080"/>
-          </a:xfrm>
-          <a:prstGeom prst="rect">
-            <a:avLst/>
-          </a:prstGeom>
-        </p:spPr>
-        <p:style>
-          <a:lnRef idx="1">
-            <a:schemeClr val="accent1"/>
-          </a:lnRef>
-          <a:fillRef idx="3">
-            <a:schemeClr val="accent1"/>
-          </a:fillRef>
-          <a:effectRef idx="2">
-            <a:schemeClr val="accent1"/>
-          </a:effectRef>
-          <a:fontRef idx="minor">
-            <a:schemeClr val="lt1"/>
-          </a:fontRef>
-        </p:style>
-        <p:txBody>
-          <a:bodyPr rtlCol="0" anchor="ctr"/>
+          <p:cNvPr id="2" name="Title 1"/>
+          <p:cNvSpPr>
+            <a:spLocks noGrp="1"/>
+          </p:cNvSpPr>
+          <p:nvPr>
+            <p:ph type="title"/>
+          </p:nvPr>
+        </p:nvSpPr>
+        <p:spPr/>
+        <p:txBody>
+          <a:bodyPr/>
           <a:lstStyle/>
           <a:p>
             <a:r>
@@ -3566,37 +4214,20 @@
       </p:sp>
       <p:sp>
         <p:nvSpPr>
-          <p:cNvPr id="3" name="Rectangle 2"/>
-          <p:cNvSpPr/>
-          <p:nvPr/>
-        </p:nvSpPr>
-        <p:spPr>
-          <a:xfrm>
-            <a:off x="493095" y="1190542"/>
-            <a:ext cx="11243092" cy="4848274"/>
-          </a:xfrm>
-          <a:prstGeom prst="rect">
-            <a:avLst/>
-          </a:prstGeom>
-        </p:spPr>
-        <p:style>
-          <a:lnRef idx="1">
-            <a:schemeClr val="accent1"/>
-          </a:lnRef>
-          <a:fillRef idx="3">
-            <a:schemeClr val="accent1"/>
-          </a:fillRef>
-          <a:effectRef idx="2">
-            <a:schemeClr val="accent1"/>
-          </a:effectRef>
-          <a:fontRef idx="minor">
-            <a:schemeClr val="lt1"/>
-          </a:fontRef>
-        </p:style>
-        <p:txBody>
-          <a:bodyPr rtlCol="0" anchor="ctr"/>
-          <a:lstStyle/>
-          <a:p>
+          <p:cNvPr id="3" name="Content Placeholder 2"/>
+          <p:cNvSpPr>
+            <a:spLocks noGrp="1"/>
+          </p:cNvSpPr>
+          <p:nvPr>
+            <p:ph type="obj" idx="1"/>
+          </p:nvPr>
+        </p:nvSpPr>
+        <p:spPr/>
+        <p:txBody>
+          <a:bodyPr wrap="square"/>
+          <a:lstStyle/>
+          <a:p>
+            <a:pPr lvl="0"/>
             <a:r>
               <a:t>Com</a:t>
             </a:r>
@@ -3623,35 +4254,17 @@
       <p:grpSpPr/>
       <p:sp>
         <p:nvSpPr>
-          <p:cNvPr id="2" name="Rectangle 1"/>
-          <p:cNvSpPr/>
-          <p:nvPr/>
-        </p:nvSpPr>
-        <p:spPr>
-          <a:xfrm>
-            <a:off x="493095" y="1227"/>
-            <a:ext cx="10515600" cy="1067080"/>
-          </a:xfrm>
-          <a:prstGeom prst="rect">
-            <a:avLst/>
-          </a:prstGeom>
-        </p:spPr>
-        <p:style>
-          <a:lnRef idx="1">
-            <a:schemeClr val="accent1"/>
-          </a:lnRef>
-          <a:fillRef idx="3">
-            <a:schemeClr val="accent1"/>
-          </a:fillRef>
-          <a:effectRef idx="2">
-            <a:schemeClr val="accent1"/>
-          </a:effectRef>
-          <a:fontRef idx="minor">
-            <a:schemeClr val="lt1"/>
-          </a:fontRef>
-        </p:style>
-        <p:txBody>
-          <a:bodyPr rtlCol="0" anchor="ctr"/>
+          <p:cNvPr id="2" name="Title 1"/>
+          <p:cNvSpPr>
+            <a:spLocks noGrp="1"/>
+          </p:cNvSpPr>
+          <p:nvPr>
+            <p:ph type="title"/>
+          </p:nvPr>
+        </p:nvSpPr>
+        <p:spPr/>
+        <p:txBody>
+          <a:bodyPr/>
           <a:lstStyle/>
           <a:p>
             <a:r>
@@ -3662,37 +4275,20 @@
       </p:sp>
       <p:sp>
         <p:nvSpPr>
-          <p:cNvPr id="3" name="Rectangle 2"/>
-          <p:cNvSpPr/>
-          <p:nvPr/>
-        </p:nvSpPr>
-        <p:spPr>
-          <a:xfrm>
-            <a:off x="493095" y="1190542"/>
-            <a:ext cx="11243092" cy="4848274"/>
-          </a:xfrm>
-          <a:prstGeom prst="rect">
-            <a:avLst/>
-          </a:prstGeom>
-        </p:spPr>
-        <p:style>
-          <a:lnRef idx="1">
-            <a:schemeClr val="accent1"/>
-          </a:lnRef>
-          <a:fillRef idx="3">
-            <a:schemeClr val="accent1"/>
-          </a:fillRef>
-          <a:effectRef idx="2">
-            <a:schemeClr val="accent1"/>
-          </a:effectRef>
-          <a:fontRef idx="minor">
-            <a:schemeClr val="lt1"/>
-          </a:fontRef>
-        </p:style>
-        <p:txBody>
-          <a:bodyPr rtlCol="0" anchor="ctr"/>
-          <a:lstStyle/>
-          <a:p>
+          <p:cNvPr id="3" name="Content Placeholder 2"/>
+          <p:cNvSpPr>
+            <a:spLocks noGrp="1"/>
+          </p:cNvSpPr>
+          <p:nvPr>
+            <p:ph type="obj" idx="1"/>
+          </p:nvPr>
+        </p:nvSpPr>
+        <p:spPr/>
+        <p:txBody>
+          <a:bodyPr wrap="square"/>
+          <a:lstStyle/>
+          <a:p>
+            <a:pPr lvl="0"/>
             <a:r>
               <a:t>jkh</a:t>
             </a:r>
@@ -3710,6 +4306,267 @@
 <file path=ppt/theme/theme1.xml><?xml version="1.0" encoding="utf-8"?>
 <a:theme xmlns:a="http://schemas.openxmlformats.org/drawingml/2006/main" name="Office Theme">
   <a:themeElements>
+    <a:clrScheme name="Office Theme">
+      <a:dk1>
+        <a:sysClr val="windowText" lastClr="000000"/>
+      </a:dk1>
+      <a:lt1>
+        <a:sysClr val="window" lastClr="FFFFFF"/>
+      </a:lt1>
+      <a:dk2>
+        <a:srgbClr val="44546A"/>
+      </a:dk2>
+      <a:lt2>
+        <a:srgbClr val="E7E6E6"/>
+      </a:lt2>
+      <a:accent1>
+        <a:srgbClr val="5B9BD5"/>
+      </a:accent1>
+      <a:accent2>
+        <a:srgbClr val="ED7D31"/>
+      </a:accent2>
+      <a:accent3>
+        <a:srgbClr val="A5A5A5"/>
+      </a:accent3>
+      <a:accent4>
+        <a:srgbClr val="FFC000"/>
+      </a:accent4>
+      <a:accent5>
+        <a:srgbClr val="4472C4"/>
+      </a:accent5>
+      <a:accent6>
+        <a:srgbClr val="70AD47"/>
+      </a:accent6>
+      <a:hlink>
+        <a:srgbClr val="0563C1"/>
+      </a:hlink>
+      <a:folHlink>
+        <a:srgbClr val="954F72"/>
+      </a:folHlink>
+    </a:clrScheme>
+    <a:fontScheme name="Office Theme">
+      <a:majorFont>
+        <a:latin typeface="Calibri Light" panose="020F0302020204030204"/>
+        <a:ea typeface=""/>
+        <a:cs typeface=""/>
+        <a:font script="Jpan" typeface="游ゴシック Light"/>
+        <a:font script="Hang" typeface="맑은 고딕"/>
+        <a:font script="Hans" typeface="等线 Light"/>
+        <a:font script="Hant" typeface="新細明體"/>
+        <a:font script="Arab" typeface="Times New Roman"/>
+        <a:font script="Hebr" typeface="Times New Roman"/>
+        <a:font script="Thai" typeface="Angsana New"/>
+        <a:font script="Ethi" typeface="Nyala"/>
+        <a:font script="Beng" typeface="Vrinda"/>
+        <a:font script="Gujr" typeface="Shruti"/>
+        <a:font script="Khmr" typeface="MoolBoran"/>
+        <a:font script="Knda" typeface="Tunga"/>
+        <a:font script="Guru" typeface="Raavi"/>
+        <a:font script="Cans" typeface="Euphemia"/>
+        <a:font script="Cher" typeface="Plantagenet Cherokee"/>
+        <a:font script="Yiii" typeface="Microsoft Yi Baiti"/>
+        <a:font script="Tibt" typeface="Microsoft Himalaya"/>
+        <a:font script="Thaa" typeface="MV Boli"/>
+        <a:font script="Deva" typeface="Mangal"/>
+        <a:font script="Telu" typeface="Gautami"/>
+        <a:font script="Taml" typeface="Latha"/>
+        <a:font script="Syrc" typeface="Estrangelo Edessa"/>
+        <a:font script="Orya" typeface="Kalinga"/>
+        <a:font script="Mlym" typeface="Kartika"/>
+        <a:font script="Laoo" typeface="DokChampa"/>
+        <a:font script="Sinh" typeface="Iskoola Pota"/>
+        <a:font script="Mong" typeface="Mongolian Baiti"/>
+        <a:font script="Viet" typeface="Times New Roman"/>
+        <a:font script="Uigh" typeface="Microsoft Uighur"/>
+        <a:font script="Geor" typeface="Sylfaen"/>
+      </a:majorFont>
+      <a:minorFont>
+        <a:latin typeface="Calibri" panose="020F0502020204030204"/>
+        <a:ea typeface=""/>
+        <a:cs typeface=""/>
+        <a:font script="Jpan" typeface="游ゴシック"/>
+        <a:font script="Hang" typeface="맑은 고딕"/>
+        <a:font script="Hans" typeface="等线"/>
+        <a:font script="Hant" typeface="新細明體"/>
+        <a:font script="Arab" typeface="Arial"/>
+        <a:font script="Hebr" typeface="Arial"/>
+        <a:font script="Thai" typeface="Cordia New"/>
+        <a:font script="Ethi" typeface="Nyala"/>
+        <a:font script="Beng" typeface="Vrinda"/>
+        <a:font script="Gujr" typeface="Shruti"/>
+        <a:font script="Khmr" typeface="DaunPenh"/>
+        <a:font script="Knda" typeface="Tunga"/>
+        <a:font script="Guru" typeface="Raavi"/>
+        <a:font script="Cans" typeface="Euphemia"/>
+        <a:font script="Cher" typeface="Plantagenet Cherokee"/>
+        <a:font script="Yiii" typeface="Microsoft Yi Baiti"/>
+        <a:font script="Tibt" typeface="Microsoft Himalaya"/>
+        <a:font script="Thaa" typeface="MV Boli"/>
+        <a:font script="Deva" typeface="Mangal"/>
+        <a:font script="Telu" typeface="Gautami"/>
+        <a:font script="Taml" typeface="Latha"/>
+        <a:font script="Syrc" typeface="Estrangelo Edessa"/>
+        <a:font script="Orya" typeface="Kalinga"/>
+        <a:font script="Mlym" typeface="Kartika"/>
+        <a:font script="Laoo" typeface="DokChampa"/>
+        <a:font script="Sinh" typeface="Iskoola Pota"/>
+        <a:font script="Mong" typeface="Mongolian Baiti"/>
+        <a:font script="Viet" typeface="Arial"/>
+        <a:font script="Uigh" typeface="Microsoft Uighur"/>
+        <a:font script="Geor" typeface="Sylfaen"/>
+      </a:minorFont>
+    </a:fontScheme>
+    <a:fmtScheme name="Office Theme">
+      <a:fillStyleLst>
+        <a:solidFill>
+          <a:schemeClr val="phClr"/>
+        </a:solidFill>
+        <a:gradFill rotWithShape="1">
+          <a:gsLst>
+            <a:gs pos="0">
+              <a:schemeClr val="phClr">
+                <a:lumMod val="110000"/>
+                <a:satMod val="105000"/>
+                <a:tint val="67000"/>
+              </a:schemeClr>
+            </a:gs>
+            <a:gs pos="50000">
+              <a:schemeClr val="phClr">
+                <a:lumMod val="105000"/>
+                <a:satMod val="103000"/>
+                <a:tint val="73000"/>
+              </a:schemeClr>
+            </a:gs>
+            <a:gs pos="100000">
+              <a:schemeClr val="phClr">
+                <a:lumMod val="105000"/>
+                <a:satMod val="109000"/>
+                <a:tint val="81000"/>
+              </a:schemeClr>
+            </a:gs>
+          </a:gsLst>
+          <a:lin ang="5400000" scaled="0"/>
+        </a:gradFill>
+        <a:gradFill rotWithShape="1">
+          <a:gsLst>
+            <a:gs pos="0">
+              <a:schemeClr val="phClr">
+                <a:satMod val="103000"/>
+                <a:lumMod val="102000"/>
+                <a:tint val="94000"/>
+              </a:schemeClr>
+            </a:gs>
+            <a:gs pos="50000">
+              <a:schemeClr val="phClr">
+                <a:satMod val="110000"/>
+                <a:lumMod val="100000"/>
+                <a:shade val="100000"/>
+              </a:schemeClr>
+            </a:gs>
+            <a:gs pos="100000">
+              <a:schemeClr val="phClr">
+                <a:lumMod val="99000"/>
+                <a:satMod val="120000"/>
+                <a:shade val="78000"/>
+              </a:schemeClr>
+            </a:gs>
+          </a:gsLst>
+          <a:lin ang="5400000" scaled="0"/>
+        </a:gradFill>
+      </a:fillStyleLst>
+      <a:lnStyleLst>
+        <a:ln w="6350" cap="flat" cmpd="sng" algn="ctr">
+          <a:solidFill>
+            <a:schemeClr val="phClr"/>
+          </a:solidFill>
+          <a:prstDash val="solid"/>
+          <a:miter lim="800000"/>
+        </a:ln>
+        <a:ln w="12700" cap="flat" cmpd="sng" algn="ctr">
+          <a:solidFill>
+            <a:schemeClr val="phClr"/>
+          </a:solidFill>
+          <a:prstDash val="solid"/>
+          <a:miter lim="800000"/>
+        </a:ln>
+        <a:ln w="19050" cap="flat" cmpd="sng" algn="ctr">
+          <a:solidFill>
+            <a:schemeClr val="phClr"/>
+          </a:solidFill>
+          <a:prstDash val="solid"/>
+          <a:miter lim="800000"/>
+        </a:ln>
+      </a:lnStyleLst>
+      <a:effectStyleLst>
+        <a:effectStyle>
+          <a:effectLst/>
+        </a:effectStyle>
+        <a:effectStyle>
+          <a:effectLst/>
+        </a:effectStyle>
+        <a:effectStyle>
+          <a:effectLst>
+            <a:outerShdw blurRad="57150" dist="19050" dir="5400000" algn="ctr" rotWithShape="0">
+              <a:srgbClr val="000000">
+                <a:alpha val="63000"/>
+              </a:srgbClr>
+            </a:outerShdw>
+          </a:effectLst>
+        </a:effectStyle>
+      </a:effectStyleLst>
+      <a:bgFillStyleLst>
+        <a:solidFill>
+          <a:schemeClr val="phClr"/>
+        </a:solidFill>
+        <a:solidFill>
+          <a:schemeClr val="phClr">
+            <a:tint val="95000"/>
+            <a:satMod val="170000"/>
+          </a:schemeClr>
+        </a:solidFill>
+        <a:gradFill rotWithShape="1">
+          <a:gsLst>
+            <a:gs pos="0">
+              <a:schemeClr val="phClr">
+                <a:tint val="93000"/>
+                <a:satMod val="150000"/>
+                <a:shade val="98000"/>
+                <a:lumMod val="102000"/>
+              </a:schemeClr>
+            </a:gs>
+            <a:gs pos="50000">
+              <a:schemeClr val="phClr">
+                <a:tint val="98000"/>
+                <a:satMod val="130000"/>
+                <a:shade val="90000"/>
+                <a:lumMod val="103000"/>
+              </a:schemeClr>
+            </a:gs>
+            <a:gs pos="100000">
+              <a:schemeClr val="phClr">
+                <a:shade val="63000"/>
+                <a:satMod val="120000"/>
+              </a:schemeClr>
+            </a:gs>
+          </a:gsLst>
+          <a:lin ang="5400000" scaled="0"/>
+        </a:gradFill>
+      </a:bgFillStyleLst>
+    </a:fmtScheme>
+  </a:themeElements>
+  <a:objectDefaults/>
+  <a:extraClrSchemeLst/>
+  <a:extLst>
+    <a:ext uri="{05A4C25C-085E-4340-85A3-A5531E510DB2}">
+      <thm15:themeFamily xmlns:thm15="http://schemas.microsoft.com/office/thememl/2012/main" name="Office Theme" id="{62F939B6-93AF-4DB8-9C6B-D6C7DFDC589F}" vid="{4A3C46E8-61CC-4603-A589-7422A47A8E4A}"/>
+    </a:ext>
+  </a:extLst>
+</a:theme>
+</file>
+
+<file path=ppt/theme/theme2.xml><?xml version="1.0" encoding="utf-8"?>
+<a:theme xmlns:a="http://schemas.openxmlformats.org/drawingml/2006/main" name="Office Theme">
+  <a:themeElements>
     <a:clrScheme name="Office">
       <a:dk1>
         <a:sysClr val="windowText" lastClr="000000"/>
@@ -3718,39 +4575,39 @@
         <a:sysClr val="window" lastClr="FFFFFF"/>
       </a:lt1>
       <a:dk2>
-        <a:srgbClr val="1F497D"/>
+        <a:srgbClr val="44546A"/>
       </a:dk2>
       <a:lt2>
-        <a:srgbClr val="EEECE1"/>
+        <a:srgbClr val="E7E6E6"/>
       </a:lt2>
       <a:accent1>
-        <a:srgbClr val="4F81BD"/>
+        <a:srgbClr val="5B9BD5"/>
       </a:accent1>
       <a:accent2>
-        <a:srgbClr val="C0504D"/>
+        <a:srgbClr val="ED7D31"/>
       </a:accent2>
       <a:accent3>
-        <a:srgbClr val="9BBB59"/>
+        <a:srgbClr val="A5A5A5"/>
       </a:accent3>
       <a:accent4>
-        <a:srgbClr val="8064A2"/>
+        <a:srgbClr val="FFC000"/>
       </a:accent4>
       <a:accent5>
-        <a:srgbClr val="4BACC6"/>
+        <a:srgbClr val="4472C4"/>
       </a:accent5>
       <a:accent6>
-        <a:srgbClr val="F79646"/>
+        <a:srgbClr val="70AD47"/>
       </a:accent6>
       <a:hlink>
-        <a:srgbClr val="0000FF"/>
+        <a:srgbClr val="0563C1"/>
       </a:hlink>
       <a:folHlink>
-        <a:srgbClr val="800080"/>
+        <a:srgbClr val="954F72"/>
       </a:folHlink>
     </a:clrScheme>
     <a:fontScheme name="Office">
       <a:majorFont>
-        <a:latin typeface="Calibri"/>
+        <a:latin typeface="Calibri Light" panose="020F0302020204030204"/>
         <a:ea typeface=""/>
         <a:cs typeface=""/>
         <a:font script="Jpan" typeface="ＭＳ Ｐゴシック"/>
@@ -3785,7 +4642,7 @@
         <a:font script="Geor" typeface="Sylfaen"/>
       </a:majorFont>
       <a:minorFont>
-        <a:latin typeface="Calibri"/>
+        <a:latin typeface="Calibri" panose="020F0502020204030204"/>
         <a:ea typeface=""/>
         <a:cs typeface=""/>
         <a:font script="Jpan" typeface="ＭＳ Ｐゴシック"/>
@@ -3829,200 +4686,141 @@
           <a:gsLst>
             <a:gs pos="0">
               <a:schemeClr val="phClr">
-                <a:tint val="50000"/>
-                <a:satMod val="300000"/>
+                <a:lumMod val="110000"/>
+                <a:satMod val="105000"/>
+                <a:tint val="67000"/>
               </a:schemeClr>
             </a:gs>
-            <a:gs pos="35000">
+            <a:gs pos="50000">
               <a:schemeClr val="phClr">
-                <a:tint val="37000"/>
-                <a:satMod val="300000"/>
+                <a:lumMod val="105000"/>
+                <a:satMod val="103000"/>
+                <a:tint val="73000"/>
               </a:schemeClr>
             </a:gs>
             <a:gs pos="100000">
               <a:schemeClr val="phClr">
-                <a:tint val="15000"/>
-                <a:satMod val="350000"/>
+                <a:lumMod val="105000"/>
+                <a:satMod val="109000"/>
+                <a:tint val="81000"/>
               </a:schemeClr>
             </a:gs>
           </a:gsLst>
-          <a:lin ang="16200000" scaled="1"/>
+          <a:lin ang="5400000" scaled="0"/>
         </a:gradFill>
         <a:gradFill rotWithShape="1">
           <a:gsLst>
             <a:gs pos="0">
               <a:schemeClr val="phClr">
-                <a:tint val="100000"/>
+                <a:satMod val="103000"/>
+                <a:lumMod val="102000"/>
+                <a:tint val="94000"/>
+              </a:schemeClr>
+            </a:gs>
+            <a:gs pos="50000">
+              <a:schemeClr val="phClr">
+                <a:satMod val="110000"/>
+                <a:lumMod val="100000"/>
                 <a:shade val="100000"/>
-                <a:satMod val="130000"/>
               </a:schemeClr>
             </a:gs>
             <a:gs pos="100000">
               <a:schemeClr val="phClr">
-                <a:tint val="50000"/>
-                <a:shade val="100000"/>
-                <a:satMod val="350000"/>
+                <a:lumMod val="99000"/>
+                <a:satMod val="120000"/>
+                <a:shade val="78000"/>
               </a:schemeClr>
             </a:gs>
           </a:gsLst>
-          <a:lin ang="16200000" scaled="0"/>
+          <a:lin ang="5400000" scaled="0"/>
         </a:gradFill>
       </a:fillStyleLst>
       <a:lnStyleLst>
-        <a:ln w="9525" cap="flat" cmpd="sng" algn="ctr">
-          <a:solidFill>
-            <a:schemeClr val="phClr">
-              <a:shade val="95000"/>
-              <a:satMod val="105000"/>
-            </a:schemeClr>
-          </a:solidFill>
-          <a:prstDash val="solid"/>
-        </a:ln>
-        <a:ln w="25400" cap="flat" cmpd="sng" algn="ctr">
+        <a:ln w="6350" cap="flat" cmpd="sng" algn="ctr">
           <a:solidFill>
             <a:schemeClr val="phClr"/>
           </a:solidFill>
           <a:prstDash val="solid"/>
+          <a:miter lim="800000"/>
         </a:ln>
-        <a:ln w="38100" cap="flat" cmpd="sng" algn="ctr">
+        <a:ln w="12700" cap="flat" cmpd="sng" algn="ctr">
           <a:solidFill>
             <a:schemeClr val="phClr"/>
           </a:solidFill>
           <a:prstDash val="solid"/>
+          <a:miter lim="800000"/>
+        </a:ln>
+        <a:ln w="19050" cap="flat" cmpd="sng" algn="ctr">
+          <a:solidFill>
+            <a:schemeClr val="phClr"/>
+          </a:solidFill>
+          <a:prstDash val="solid"/>
+          <a:miter lim="800000"/>
         </a:ln>
       </a:lnStyleLst>
       <a:effectStyleLst>
         <a:effectStyle>
+          <a:effectLst/>
+        </a:effectStyle>
+        <a:effectStyle>
+          <a:effectLst/>
+        </a:effectStyle>
+        <a:effectStyle>
           <a:effectLst>
-            <a:outerShdw blurRad="40000" dist="20000" dir="5400000" rotWithShape="0">
+            <a:outerShdw blurRad="57150" dist="19050" dir="5400000" algn="ctr" rotWithShape="0">
               <a:srgbClr val="000000">
-                <a:alpha val="38000"/>
+                <a:alpha val="63000"/>
               </a:srgbClr>
             </a:outerShdw>
           </a:effectLst>
-        </a:effectStyle>
-        <a:effectStyle>
-          <a:effectLst>
-            <a:outerShdw blurRad="40000" dist="23000" dir="5400000" rotWithShape="0">
-              <a:srgbClr val="000000">
-                <a:alpha val="35000"/>
-              </a:srgbClr>
-            </a:outerShdw>
-          </a:effectLst>
-        </a:effectStyle>
-        <a:effectStyle>
-          <a:effectLst>
-            <a:outerShdw blurRad="40000" dist="23000" dir="5400000" rotWithShape="0">
-              <a:srgbClr val="000000">
-                <a:alpha val="35000"/>
-              </a:srgbClr>
-            </a:outerShdw>
-          </a:effectLst>
-          <a:scene3d>
-            <a:camera prst="orthographicFront">
-              <a:rot lat="0" lon="0" rev="0"/>
-            </a:camera>
-            <a:lightRig rig="threePt" dir="t">
-              <a:rot lat="0" lon="0" rev="1200000"/>
-            </a:lightRig>
-          </a:scene3d>
-          <a:sp3d>
-            <a:bevelT w="63500" h="25400"/>
-          </a:sp3d>
         </a:effectStyle>
       </a:effectStyleLst>
       <a:bgFillStyleLst>
         <a:solidFill>
           <a:schemeClr val="phClr"/>
         </a:solidFill>
+        <a:solidFill>
+          <a:schemeClr val="phClr">
+            <a:tint val="95000"/>
+            <a:satMod val="170000"/>
+          </a:schemeClr>
+        </a:solidFill>
         <a:gradFill rotWithShape="1">
           <a:gsLst>
             <a:gs pos="0">
               <a:schemeClr val="phClr">
-                <a:tint val="40000"/>
-                <a:satMod val="350000"/>
+                <a:tint val="93000"/>
+                <a:satMod val="150000"/>
+                <a:shade val="98000"/>
+                <a:lumMod val="102000"/>
               </a:schemeClr>
             </a:gs>
-            <a:gs pos="40000">
+            <a:gs pos="50000">
               <a:schemeClr val="phClr">
-                <a:tint val="45000"/>
-                <a:shade val="99000"/>
-                <a:satMod val="350000"/>
+                <a:tint val="98000"/>
+                <a:satMod val="130000"/>
+                <a:shade val="90000"/>
+                <a:lumMod val="103000"/>
               </a:schemeClr>
             </a:gs>
             <a:gs pos="100000">
               <a:schemeClr val="phClr">
-                <a:shade val="20000"/>
-                <a:satMod val="255000"/>
+                <a:shade val="63000"/>
+                <a:satMod val="120000"/>
               </a:schemeClr>
             </a:gs>
           </a:gsLst>
-          <a:path path="circle">
-            <a:fillToRect l="50000" t="-80000" r="50000" b="180000"/>
-          </a:path>
-        </a:gradFill>
-        <a:gradFill rotWithShape="1">
-          <a:gsLst>
-            <a:gs pos="0">
-              <a:schemeClr val="phClr">
-                <a:tint val="80000"/>
-                <a:satMod val="300000"/>
-              </a:schemeClr>
-            </a:gs>
-            <a:gs pos="100000">
-              <a:schemeClr val="phClr">
-                <a:shade val="30000"/>
-                <a:satMod val="200000"/>
-              </a:schemeClr>
-            </a:gs>
-          </a:gsLst>
-          <a:path path="circle">
-            <a:fillToRect l="50000" t="50000" r="50000" b="50000"/>
-          </a:path>
+          <a:lin ang="5400000" scaled="0"/>
         </a:gradFill>
       </a:bgFillStyleLst>
     </a:fmtScheme>
   </a:themeElements>
-  <a:objectDefaults>
-    <a:spDef>
-      <a:spPr/>
-      <a:bodyPr/>
-      <a:lstStyle/>
-      <a:style>
-        <a:lnRef idx="1">
-          <a:schemeClr val="accent1"/>
-        </a:lnRef>
-        <a:fillRef idx="3">
-          <a:schemeClr val="accent1"/>
-        </a:fillRef>
-        <a:effectRef idx="2">
-          <a:schemeClr val="accent1"/>
-        </a:effectRef>
-        <a:fontRef idx="minor">
-          <a:schemeClr val="lt1"/>
-        </a:fontRef>
-      </a:style>
-    </a:spDef>
-    <a:lnDef>
-      <a:spPr/>
-      <a:bodyPr/>
-      <a:lstStyle/>
-      <a:style>
-        <a:lnRef idx="2">
-          <a:schemeClr val="accent1"/>
-        </a:lnRef>
-        <a:fillRef idx="0">
-          <a:schemeClr val="accent1"/>
-        </a:fillRef>
-        <a:effectRef idx="1">
-          <a:schemeClr val="accent1"/>
-        </a:effectRef>
-        <a:fontRef idx="minor">
-          <a:schemeClr val="tx1"/>
-        </a:fontRef>
-      </a:style>
-    </a:lnDef>
-  </a:objectDefaults>
+  <a:objectDefaults/>
   <a:extraClrSchemeLst/>
+  <a:extLst>
+    <a:ext uri="{05A4C25C-085E-4340-85A3-A5531E510DB2}">
+      <thm15:themeFamily xmlns:thm15="http://schemas.microsoft.com/office/thememl/2012/main" name="Office Theme" id="{62F939B6-93AF-4DB8-9C6B-D6C7DFDC589F}" vid="{4A3C46E8-61CC-4603-A589-7422A47A8E4A}"/>
+    </a:ext>
+  </a:extLst>
 </a:theme>
 </file>